--- a/course-materials/slides/Descriptive Statistics.pptx
+++ b/course-materials/slides/Descriptive Statistics.pptx
@@ -62,27 +62,29 @@
     <p:sldId id="307" r:id="rId58"/>
     <p:sldId id="308" r:id="rId59"/>
     <p:sldId id="309" r:id="rId60"/>
+    <p:sldId id="310" r:id="rId61"/>
+    <p:sldId id="311" r:id="rId62"/>
   </p:sldIdLst>
   <p:sldSz cy="5143500" cx="9144000"/>
   <p:notesSz cx="6858000" cy="9144000"/>
   <p:embeddedFontLst>
     <p:embeddedFont>
       <p:font typeface="Proxima Nova"/>
-      <p:regular r:id="rId61"/>
-      <p:bold r:id="rId62"/>
-      <p:italic r:id="rId63"/>
-      <p:boldItalic r:id="rId64"/>
+      <p:regular r:id="rId63"/>
+      <p:bold r:id="rId64"/>
+      <p:italic r:id="rId65"/>
+      <p:boldItalic r:id="rId66"/>
     </p:embeddedFont>
     <p:embeddedFont>
       <p:font typeface="Alfa Slab One"/>
-      <p:regular r:id="rId65"/>
+      <p:regular r:id="rId67"/>
     </p:embeddedFont>
     <p:embeddedFont>
       <p:font typeface="Open Sans"/>
-      <p:regular r:id="rId66"/>
-      <p:bold r:id="rId67"/>
-      <p:italic r:id="rId68"/>
-      <p:boldItalic r:id="rId69"/>
+      <p:regular r:id="rId68"/>
+      <p:bold r:id="rId69"/>
+      <p:italic r:id="rId70"/>
+      <p:boldItalic r:id="rId71"/>
     </p:embeddedFont>
   </p:embeddedFontLst>
   <p:defaultTextStyle>
@@ -3255,7 +3257,7 @@
       </p:grpSpPr>
       <p:sp>
         <p:nvSpPr>
-          <p:cNvPr id="255" name="Google Shape;255;g251c7ec207e_0_29:notes"/>
+          <p:cNvPr id="255" name="Google Shape;255;g3ea3e43ca15_0_0:notes"/>
           <p:cNvSpPr/>
           <p:nvPr>
             <p:ph idx="2" type="sldImg"/>
@@ -3290,7 +3292,7 @@
       </p:sp>
       <p:sp>
         <p:nvSpPr>
-          <p:cNvPr id="256" name="Google Shape;256;g251c7ec207e_0_29:notes"/>
+          <p:cNvPr id="256" name="Google Shape;256;g3ea3e43ca15_0_0:notes"/>
           <p:cNvSpPr txBox="1"/>
           <p:nvPr>
             <p:ph idx="1" type="body"/>
@@ -3354,7 +3356,7 @@
       </p:grpSpPr>
       <p:sp>
         <p:nvSpPr>
-          <p:cNvPr id="262" name="Google Shape;262;g2c350c65034_0_0:notes"/>
+          <p:cNvPr id="262" name="Google Shape;262;g251c7ec207e_0_29:notes"/>
           <p:cNvSpPr/>
           <p:nvPr>
             <p:ph idx="2" type="sldImg"/>
@@ -3389,7 +3391,7 @@
       </p:sp>
       <p:sp>
         <p:nvSpPr>
-          <p:cNvPr id="263" name="Google Shape;263;g2c350c65034_0_0:notes"/>
+          <p:cNvPr id="263" name="Google Shape;263;g251c7ec207e_0_29:notes"/>
           <p:cNvSpPr txBox="1"/>
           <p:nvPr>
             <p:ph idx="1" type="body"/>
@@ -3453,7 +3455,7 @@
       </p:grpSpPr>
       <p:sp>
         <p:nvSpPr>
-          <p:cNvPr id="269" name="Google Shape;269;g2f49c845e9f_0_12:notes"/>
+          <p:cNvPr id="269" name="Google Shape;269;g2c350c65034_0_0:notes"/>
           <p:cNvSpPr/>
           <p:nvPr>
             <p:ph idx="2" type="sldImg"/>
@@ -3488,7 +3490,7 @@
       </p:sp>
       <p:sp>
         <p:nvSpPr>
-          <p:cNvPr id="270" name="Google Shape;270;g2f49c845e9f_0_12:notes"/>
+          <p:cNvPr id="270" name="Google Shape;270;g2c350c65034_0_0:notes"/>
           <p:cNvSpPr txBox="1"/>
           <p:nvPr>
             <p:ph idx="1" type="body"/>
@@ -3538,7 +3540,7 @@
   <p:cSld>
     <p:spTree>
       <p:nvGrpSpPr>
-        <p:cNvPr id="275" name="Shape 275"/>
+        <p:cNvPr id="276" name="Shape 276"/>
         <p:cNvGrpSpPr/>
         <p:nvPr/>
       </p:nvGrpSpPr>
@@ -3552,7 +3554,7 @@
       </p:grpSpPr>
       <p:sp>
         <p:nvSpPr>
-          <p:cNvPr id="276" name="Google Shape;276;g2c350c65034_0_6:notes"/>
+          <p:cNvPr id="277" name="Google Shape;277;g2f49c845e9f_0_12:notes"/>
           <p:cNvSpPr/>
           <p:nvPr>
             <p:ph idx="2" type="sldImg"/>
@@ -3587,7 +3589,7 @@
       </p:sp>
       <p:sp>
         <p:nvSpPr>
-          <p:cNvPr id="277" name="Google Shape;277;g2c350c65034_0_6:notes"/>
+          <p:cNvPr id="278" name="Google Shape;278;g2f49c845e9f_0_12:notes"/>
           <p:cNvSpPr txBox="1"/>
           <p:nvPr>
             <p:ph idx="1" type="body"/>
@@ -3637,7 +3639,7 @@
   <p:cSld>
     <p:spTree>
       <p:nvGrpSpPr>
-        <p:cNvPr id="284" name="Shape 284"/>
+        <p:cNvPr id="283" name="Shape 283"/>
         <p:cNvGrpSpPr/>
         <p:nvPr/>
       </p:nvGrpSpPr>
@@ -3651,7 +3653,7 @@
       </p:grpSpPr>
       <p:sp>
         <p:nvSpPr>
-          <p:cNvPr id="285" name="Google Shape;285;g366417e5ac9_0_0:notes"/>
+          <p:cNvPr id="284" name="Google Shape;284;g3ea3e43ca15_0_6:notes"/>
           <p:cNvSpPr/>
           <p:nvPr>
             <p:ph idx="2" type="sldImg"/>
@@ -3686,7 +3688,7 @@
       </p:sp>
       <p:sp>
         <p:nvSpPr>
-          <p:cNvPr id="286" name="Google Shape;286;g366417e5ac9_0_0:notes"/>
+          <p:cNvPr id="285" name="Google Shape;285;g3ea3e43ca15_0_6:notes"/>
           <p:cNvSpPr txBox="1"/>
           <p:nvPr>
             <p:ph idx="1" type="body"/>
@@ -3750,7 +3752,7 @@
       </p:grpSpPr>
       <p:sp>
         <p:nvSpPr>
-          <p:cNvPr id="290" name="Google Shape;290;g2d8318b3d08_0_0:notes"/>
+          <p:cNvPr id="290" name="Google Shape;290;g2c350c65034_0_6:notes"/>
           <p:cNvSpPr/>
           <p:nvPr>
             <p:ph idx="2" type="sldImg"/>
@@ -3785,7 +3787,7 @@
       </p:sp>
       <p:sp>
         <p:nvSpPr>
-          <p:cNvPr id="291" name="Google Shape;291;g2d8318b3d08_0_0:notes"/>
+          <p:cNvPr id="291" name="Google Shape;291;g2c350c65034_0_6:notes"/>
           <p:cNvSpPr txBox="1"/>
           <p:nvPr>
             <p:ph idx="1" type="body"/>
@@ -3835,7 +3837,7 @@
   <p:cSld>
     <p:spTree>
       <p:nvGrpSpPr>
-        <p:cNvPr id="296" name="Shape 296"/>
+        <p:cNvPr id="298" name="Shape 298"/>
         <p:cNvGrpSpPr/>
         <p:nvPr/>
       </p:nvGrpSpPr>
@@ -3849,7 +3851,7 @@
       </p:grpSpPr>
       <p:sp>
         <p:nvSpPr>
-          <p:cNvPr id="297" name="Google Shape;297;g2c350c65034_0_21:notes"/>
+          <p:cNvPr id="299" name="Google Shape;299;g366417e5ac9_0_0:notes"/>
           <p:cNvSpPr/>
           <p:nvPr>
             <p:ph idx="2" type="sldImg"/>
@@ -3884,7 +3886,7 @@
       </p:sp>
       <p:sp>
         <p:nvSpPr>
-          <p:cNvPr id="298" name="Google Shape;298;g2c350c65034_0_21:notes"/>
+          <p:cNvPr id="300" name="Google Shape;300;g366417e5ac9_0_0:notes"/>
           <p:cNvSpPr txBox="1"/>
           <p:nvPr>
             <p:ph idx="1" type="body"/>
@@ -3934,7 +3936,7 @@
   <p:cSld>
     <p:spTree>
       <p:nvGrpSpPr>
-        <p:cNvPr id="302" name="Shape 302"/>
+        <p:cNvPr id="303" name="Shape 303"/>
         <p:cNvGrpSpPr/>
         <p:nvPr/>
       </p:nvGrpSpPr>
@@ -3948,7 +3950,7 @@
       </p:grpSpPr>
       <p:sp>
         <p:nvSpPr>
-          <p:cNvPr id="303" name="Google Shape;303;g22ab2d931f9_0_22:notes"/>
+          <p:cNvPr id="304" name="Google Shape;304;g2d8318b3d08_0_0:notes"/>
           <p:cNvSpPr/>
           <p:nvPr>
             <p:ph idx="2" type="sldImg"/>
@@ -3983,7 +3985,7 @@
       </p:sp>
       <p:sp>
         <p:nvSpPr>
-          <p:cNvPr id="304" name="Google Shape;304;g22ab2d931f9_0_22:notes"/>
+          <p:cNvPr id="305" name="Google Shape;305;g2d8318b3d08_0_0:notes"/>
           <p:cNvSpPr txBox="1"/>
           <p:nvPr>
             <p:ph idx="1" type="body"/>
@@ -4146,7 +4148,7 @@
       </p:grpSpPr>
       <p:sp>
         <p:nvSpPr>
-          <p:cNvPr id="311" name="Google Shape;311;g22ab2d931f9_0_29:notes"/>
+          <p:cNvPr id="311" name="Google Shape;311;g2c350c65034_0_21:notes"/>
           <p:cNvSpPr/>
           <p:nvPr>
             <p:ph idx="2" type="sldImg"/>
@@ -4181,7 +4183,7 @@
       </p:sp>
       <p:sp>
         <p:nvSpPr>
-          <p:cNvPr id="312" name="Google Shape;312;g22ab2d931f9_0_29:notes"/>
+          <p:cNvPr id="312" name="Google Shape;312;g2c350c65034_0_21:notes"/>
           <p:cNvSpPr txBox="1"/>
           <p:nvPr>
             <p:ph idx="1" type="body"/>
@@ -4231,7 +4233,7 @@
   <p:cSld>
     <p:spTree>
       <p:nvGrpSpPr>
-        <p:cNvPr id="318" name="Shape 318"/>
+        <p:cNvPr id="316" name="Shape 316"/>
         <p:cNvGrpSpPr/>
         <p:nvPr/>
       </p:nvGrpSpPr>
@@ -4245,7 +4247,7 @@
       </p:grpSpPr>
       <p:sp>
         <p:nvSpPr>
-          <p:cNvPr id="319" name="Google Shape;319;g22ab2d931f9_0_54:notes"/>
+          <p:cNvPr id="317" name="Google Shape;317;g22ab2d931f9_0_22:notes"/>
           <p:cNvSpPr/>
           <p:nvPr>
             <p:ph idx="2" type="sldImg"/>
@@ -4280,7 +4282,7 @@
       </p:sp>
       <p:sp>
         <p:nvSpPr>
-          <p:cNvPr id="320" name="Google Shape;320;g22ab2d931f9_0_54:notes"/>
+          <p:cNvPr id="318" name="Google Shape;318;g22ab2d931f9_0_22:notes"/>
           <p:cNvSpPr txBox="1"/>
           <p:nvPr>
             <p:ph idx="1" type="body"/>
@@ -4330,7 +4332,7 @@
   <p:cSld>
     <p:spTree>
       <p:nvGrpSpPr>
-        <p:cNvPr id="327" name="Shape 327"/>
+        <p:cNvPr id="324" name="Shape 324"/>
         <p:cNvGrpSpPr/>
         <p:nvPr/>
       </p:nvGrpSpPr>
@@ -4344,7 +4346,7 @@
       </p:grpSpPr>
       <p:sp>
         <p:nvSpPr>
-          <p:cNvPr id="328" name="Google Shape;328;g22ab2d931f9_0_43:notes"/>
+          <p:cNvPr id="325" name="Google Shape;325;g22ab2d931f9_0_29:notes"/>
           <p:cNvSpPr/>
           <p:nvPr>
             <p:ph idx="2" type="sldImg"/>
@@ -4379,7 +4381,7 @@
       </p:sp>
       <p:sp>
         <p:nvSpPr>
-          <p:cNvPr id="329" name="Google Shape;329;g22ab2d931f9_0_43:notes"/>
+          <p:cNvPr id="326" name="Google Shape;326;g22ab2d931f9_0_29:notes"/>
           <p:cNvSpPr txBox="1"/>
           <p:nvPr>
             <p:ph idx="1" type="body"/>
@@ -4429,7 +4431,7 @@
   <p:cSld>
     <p:spTree>
       <p:nvGrpSpPr>
-        <p:cNvPr id="335" name="Shape 335"/>
+        <p:cNvPr id="332" name="Shape 332"/>
         <p:cNvGrpSpPr/>
         <p:nvPr/>
       </p:nvGrpSpPr>
@@ -4443,7 +4445,7 @@
       </p:grpSpPr>
       <p:sp>
         <p:nvSpPr>
-          <p:cNvPr id="336" name="Google Shape;336;g3454ca6877e_0_0:notes"/>
+          <p:cNvPr id="333" name="Google Shape;333;g22ab2d931f9_0_54:notes"/>
           <p:cNvSpPr/>
           <p:nvPr>
             <p:ph idx="2" type="sldImg"/>
@@ -4478,7 +4480,7 @@
       </p:sp>
       <p:sp>
         <p:nvSpPr>
-          <p:cNvPr id="337" name="Google Shape;337;g3454ca6877e_0_0:notes"/>
+          <p:cNvPr id="334" name="Google Shape;334;g22ab2d931f9_0_54:notes"/>
           <p:cNvSpPr txBox="1"/>
           <p:nvPr>
             <p:ph idx="1" type="body"/>
@@ -4542,7 +4544,7 @@
       </p:grpSpPr>
       <p:sp>
         <p:nvSpPr>
-          <p:cNvPr id="342" name="Google Shape;342;g22ab2d931f9_0_61:notes"/>
+          <p:cNvPr id="342" name="Google Shape;342;g22ab2d931f9_0_43:notes"/>
           <p:cNvSpPr/>
           <p:nvPr>
             <p:ph idx="2" type="sldImg"/>
@@ -4577,7 +4579,7 @@
       </p:sp>
       <p:sp>
         <p:nvSpPr>
-          <p:cNvPr id="343" name="Google Shape;343;g22ab2d931f9_0_61:notes"/>
+          <p:cNvPr id="343" name="Google Shape;343;g22ab2d931f9_0_43:notes"/>
           <p:cNvSpPr txBox="1"/>
           <p:nvPr>
             <p:ph idx="1" type="body"/>
@@ -4641,7 +4643,7 @@
       </p:grpSpPr>
       <p:sp>
         <p:nvSpPr>
-          <p:cNvPr id="350" name="Google Shape;350;g2f49c845e9f_0_0:notes"/>
+          <p:cNvPr id="350" name="Google Shape;350;g3454ca6877e_0_0:notes"/>
           <p:cNvSpPr/>
           <p:nvPr>
             <p:ph idx="2" type="sldImg"/>
@@ -4676,7 +4678,7 @@
       </p:sp>
       <p:sp>
         <p:nvSpPr>
-          <p:cNvPr id="351" name="Google Shape;351;g2f49c845e9f_0_0:notes"/>
+          <p:cNvPr id="351" name="Google Shape;351;g3454ca6877e_0_0:notes"/>
           <p:cNvSpPr txBox="1"/>
           <p:nvPr>
             <p:ph idx="1" type="body"/>
@@ -4726,7 +4728,7 @@
   <p:cSld>
     <p:spTree>
       <p:nvGrpSpPr>
-        <p:cNvPr id="356" name="Shape 356"/>
+        <p:cNvPr id="355" name="Shape 355"/>
         <p:cNvGrpSpPr/>
         <p:nvPr/>
       </p:nvGrpSpPr>
@@ -4740,7 +4742,7 @@
       </p:grpSpPr>
       <p:sp>
         <p:nvSpPr>
-          <p:cNvPr id="357" name="Google Shape;357;g22ab2d931f9_0_68:notes"/>
+          <p:cNvPr id="356" name="Google Shape;356;g22ab2d931f9_0_61:notes"/>
           <p:cNvSpPr/>
           <p:nvPr>
             <p:ph idx="2" type="sldImg"/>
@@ -4775,7 +4777,7 @@
       </p:sp>
       <p:sp>
         <p:nvSpPr>
-          <p:cNvPr id="358" name="Google Shape;358;g22ab2d931f9_0_68:notes"/>
+          <p:cNvPr id="357" name="Google Shape;357;g22ab2d931f9_0_61:notes"/>
           <p:cNvSpPr txBox="1"/>
           <p:nvPr>
             <p:ph idx="1" type="body"/>
@@ -4825,7 +4827,7 @@
   <p:cSld>
     <p:spTree>
       <p:nvGrpSpPr>
-        <p:cNvPr id="362" name="Shape 362"/>
+        <p:cNvPr id="363" name="Shape 363"/>
         <p:cNvGrpSpPr/>
         <p:nvPr/>
       </p:nvGrpSpPr>
@@ -4839,7 +4841,7 @@
       </p:grpSpPr>
       <p:sp>
         <p:nvSpPr>
-          <p:cNvPr id="363" name="Google Shape;363;g22ab2d931f9_0_10:notes"/>
+          <p:cNvPr id="364" name="Google Shape;364;g2f49c845e9f_0_0:notes"/>
           <p:cNvSpPr/>
           <p:nvPr>
             <p:ph idx="2" type="sldImg"/>
@@ -4874,7 +4876,7 @@
       </p:sp>
       <p:sp>
         <p:nvSpPr>
-          <p:cNvPr id="364" name="Google Shape;364;g22ab2d931f9_0_10:notes"/>
+          <p:cNvPr id="365" name="Google Shape;365;g2f49c845e9f_0_0:notes"/>
           <p:cNvSpPr txBox="1"/>
           <p:nvPr>
             <p:ph idx="1" type="body"/>
@@ -4924,7 +4926,7 @@
   <p:cSld>
     <p:spTree>
       <p:nvGrpSpPr>
-        <p:cNvPr id="369" name="Shape 369"/>
+        <p:cNvPr id="370" name="Shape 370"/>
         <p:cNvGrpSpPr/>
         <p:nvPr/>
       </p:nvGrpSpPr>
@@ -4938,7 +4940,7 @@
       </p:grpSpPr>
       <p:sp>
         <p:nvSpPr>
-          <p:cNvPr id="370" name="Google Shape;370;g22ab2d931f9_0_73:notes"/>
+          <p:cNvPr id="371" name="Google Shape;371;g22ab2d931f9_0_68:notes"/>
           <p:cNvSpPr/>
           <p:nvPr>
             <p:ph idx="2" type="sldImg"/>
@@ -4973,7 +4975,7 @@
       </p:sp>
       <p:sp>
         <p:nvSpPr>
-          <p:cNvPr id="371" name="Google Shape;371;g22ab2d931f9_0_73:notes"/>
+          <p:cNvPr id="372" name="Google Shape;372;g22ab2d931f9_0_68:notes"/>
           <p:cNvSpPr txBox="1"/>
           <p:nvPr>
             <p:ph idx="1" type="body"/>
@@ -5023,7 +5025,7 @@
   <p:cSld>
     <p:spTree>
       <p:nvGrpSpPr>
-        <p:cNvPr id="375" name="Shape 375"/>
+        <p:cNvPr id="376" name="Shape 376"/>
         <p:cNvGrpSpPr/>
         <p:nvPr/>
       </p:nvGrpSpPr>
@@ -5037,7 +5039,7 @@
       </p:grpSpPr>
       <p:sp>
         <p:nvSpPr>
-          <p:cNvPr id="376" name="Google Shape;376;g22ab2d931f9_0_78:notes"/>
+          <p:cNvPr id="377" name="Google Shape;377;g22ab2d931f9_0_10:notes"/>
           <p:cNvSpPr/>
           <p:nvPr>
             <p:ph idx="2" type="sldImg"/>
@@ -5072,7 +5074,7 @@
       </p:sp>
       <p:sp>
         <p:nvSpPr>
-          <p:cNvPr id="377" name="Google Shape;377;g22ab2d931f9_0_78:notes"/>
+          <p:cNvPr id="378" name="Google Shape;378;g22ab2d931f9_0_10:notes"/>
           <p:cNvSpPr txBox="1"/>
           <p:nvPr>
             <p:ph idx="1" type="body"/>
@@ -5221,7 +5223,7 @@
   <p:cSld>
     <p:spTree>
       <p:nvGrpSpPr>
-        <p:cNvPr id="382" name="Shape 382"/>
+        <p:cNvPr id="383" name="Shape 383"/>
         <p:cNvGrpSpPr/>
         <p:nvPr/>
       </p:nvGrpSpPr>
@@ -5235,7 +5237,7 @@
       </p:grpSpPr>
       <p:sp>
         <p:nvSpPr>
-          <p:cNvPr id="383" name="Google Shape;383;g22ab2d931f9_0_110:notes"/>
+          <p:cNvPr id="384" name="Google Shape;384;g22ab2d931f9_0_73:notes"/>
           <p:cNvSpPr/>
           <p:nvPr>
             <p:ph idx="2" type="sldImg"/>
@@ -5270,7 +5272,7 @@
       </p:sp>
       <p:sp>
         <p:nvSpPr>
-          <p:cNvPr id="384" name="Google Shape;384;g22ab2d931f9_0_110:notes"/>
+          <p:cNvPr id="385" name="Google Shape;385;g22ab2d931f9_0_73:notes"/>
           <p:cNvSpPr txBox="1"/>
           <p:nvPr>
             <p:ph idx="1" type="body"/>
@@ -5320,7 +5322,7 @@
   <p:cSld>
     <p:spTree>
       <p:nvGrpSpPr>
-        <p:cNvPr id="387" name="Shape 387"/>
+        <p:cNvPr id="389" name="Shape 389"/>
         <p:cNvGrpSpPr/>
         <p:nvPr/>
       </p:nvGrpSpPr>
@@ -5334,7 +5336,7 @@
       </p:grpSpPr>
       <p:sp>
         <p:nvSpPr>
-          <p:cNvPr id="388" name="Google Shape;388;g22ab2d931f9_0_114:notes"/>
+          <p:cNvPr id="390" name="Google Shape;390;g22ab2d931f9_0_78:notes"/>
           <p:cNvSpPr/>
           <p:nvPr>
             <p:ph idx="2" type="sldImg"/>
@@ -5369,7 +5371,7 @@
       </p:sp>
       <p:sp>
         <p:nvSpPr>
-          <p:cNvPr id="389" name="Google Shape;389;g22ab2d931f9_0_114:notes"/>
+          <p:cNvPr id="391" name="Google Shape;391;g22ab2d931f9_0_78:notes"/>
           <p:cNvSpPr txBox="1"/>
           <p:nvPr>
             <p:ph idx="1" type="body"/>
@@ -5419,7 +5421,7 @@
   <p:cSld>
     <p:spTree>
       <p:nvGrpSpPr>
-        <p:cNvPr id="392" name="Shape 392"/>
+        <p:cNvPr id="396" name="Shape 396"/>
         <p:cNvGrpSpPr/>
         <p:nvPr/>
       </p:nvGrpSpPr>
@@ -5433,7 +5435,7 @@
       </p:grpSpPr>
       <p:sp>
         <p:nvSpPr>
-          <p:cNvPr id="393" name="Google Shape;393;g22ab2d931f9_0_118:notes"/>
+          <p:cNvPr id="397" name="Google Shape;397;g22ab2d931f9_0_110:notes"/>
           <p:cNvSpPr/>
           <p:nvPr>
             <p:ph idx="2" type="sldImg"/>
@@ -5468,7 +5470,7 @@
       </p:sp>
       <p:sp>
         <p:nvSpPr>
-          <p:cNvPr id="394" name="Google Shape;394;g22ab2d931f9_0_118:notes"/>
+          <p:cNvPr id="398" name="Google Shape;398;g22ab2d931f9_0_110:notes"/>
           <p:cNvSpPr txBox="1"/>
           <p:nvPr>
             <p:ph idx="1" type="body"/>
@@ -5518,7 +5520,7 @@
   <p:cSld>
     <p:spTree>
       <p:nvGrpSpPr>
-        <p:cNvPr id="397" name="Shape 397"/>
+        <p:cNvPr id="401" name="Shape 401"/>
         <p:cNvGrpSpPr/>
         <p:nvPr/>
       </p:nvGrpSpPr>
@@ -5532,7 +5534,7 @@
       </p:grpSpPr>
       <p:sp>
         <p:nvSpPr>
-          <p:cNvPr id="398" name="Google Shape;398;g2545b59bd59_0_5:notes"/>
+          <p:cNvPr id="402" name="Google Shape;402;g22ab2d931f9_0_114:notes"/>
           <p:cNvSpPr/>
           <p:nvPr>
             <p:ph idx="2" type="sldImg"/>
@@ -5567,7 +5569,7 @@
       </p:sp>
       <p:sp>
         <p:nvSpPr>
-          <p:cNvPr id="399" name="Google Shape;399;g2545b59bd59_0_5:notes"/>
+          <p:cNvPr id="403" name="Google Shape;403;g22ab2d931f9_0_114:notes"/>
           <p:cNvSpPr txBox="1"/>
           <p:nvPr>
             <p:ph idx="1" type="body"/>
@@ -5617,7 +5619,7 @@
   <p:cSld>
     <p:spTree>
       <p:nvGrpSpPr>
-        <p:cNvPr id="402" name="Shape 402"/>
+        <p:cNvPr id="406" name="Shape 406"/>
         <p:cNvGrpSpPr/>
         <p:nvPr/>
       </p:nvGrpSpPr>
@@ -5631,7 +5633,7 @@
       </p:grpSpPr>
       <p:sp>
         <p:nvSpPr>
-          <p:cNvPr id="403" name="Google Shape;403;g2545b59bd59_0_11:notes"/>
+          <p:cNvPr id="407" name="Google Shape;407;g22ab2d931f9_0_118:notes"/>
           <p:cNvSpPr/>
           <p:nvPr>
             <p:ph idx="2" type="sldImg"/>
@@ -5666,7 +5668,205 @@
       </p:sp>
       <p:sp>
         <p:nvSpPr>
-          <p:cNvPr id="404" name="Google Shape;404;g2545b59bd59_0_11:notes"/>
+          <p:cNvPr id="408" name="Google Shape;408;g22ab2d931f9_0_118:notes"/>
+          <p:cNvSpPr txBox="1"/>
+          <p:nvPr>
+            <p:ph idx="1" type="body"/>
+          </p:nvPr>
+        </p:nvSpPr>
+        <p:spPr>
+          <a:xfrm>
+            <a:off x="685800" y="4343400"/>
+            <a:ext cx="5486400" cy="4114800"/>
+          </a:xfrm>
+          <a:prstGeom prst="rect">
+            <a:avLst/>
+          </a:prstGeom>
+        </p:spPr>
+        <p:txBody>
+          <a:bodyPr anchorCtr="0" anchor="t" bIns="91425" lIns="91425" spcFirstLastPara="1" rIns="91425" wrap="square" tIns="91425">
+            <a:noAutofit/>
+          </a:bodyPr>
+          <a:lstStyle/>
+          <a:p>
+            <a:pPr indent="0" lvl="0" marL="0" rtl="0" algn="l">
+              <a:spcBef>
+                <a:spcPts val="0"/>
+              </a:spcBef>
+              <a:spcAft>
+                <a:spcPts val="0"/>
+              </a:spcAft>
+              <a:buNone/>
+            </a:pPr>
+            <a:r>
+              <a:t/>
+            </a:r>
+            <a:endParaRPr/>
+          </a:p>
+        </p:txBody>
+      </p:sp>
+    </p:spTree>
+  </p:cSld>
+  <p:clrMapOvr>
+    <a:masterClrMapping/>
+  </p:clrMapOvr>
+</p:notes>
+</file>
+
+<file path=ppt/notesSlides/notesSlide55.xml><?xml version="1.0" encoding="utf-8"?>
+<p:notes xmlns:a="http://schemas.openxmlformats.org/drawingml/2006/main" xmlns:r="http://schemas.openxmlformats.org/officeDocument/2006/relationships" xmlns:mc="http://schemas.openxmlformats.org/markup-compatibility/2006" xmlns:mv="urn:schemas-microsoft-com:mac:vml" xmlns:p="http://schemas.openxmlformats.org/presentationml/2006/main" xmlns:c="http://schemas.openxmlformats.org/drawingml/2006/chart" xmlns:dgm="http://schemas.openxmlformats.org/drawingml/2006/diagram" xmlns:o="urn:schemas-microsoft-com:office:office" xmlns:v="urn:schemas-microsoft-com:vml" xmlns:pvml="urn:schemas-microsoft-com:office:powerpoint" xmlns:com="http://schemas.openxmlformats.org/drawingml/2006/compatibility" xmlns:p14="http://schemas.microsoft.com/office/powerpoint/2010/main" xmlns:p15="http://schemas.microsoft.com/office/powerpoint/2012/main" xmlns:ahyp="http://schemas.microsoft.com/office/drawing/2018/hyperlinkcolor" showMasterPhAnim="0" showMasterSp="0">
+  <p:cSld>
+    <p:spTree>
+      <p:nvGrpSpPr>
+        <p:cNvPr id="411" name="Shape 411"/>
+        <p:cNvGrpSpPr/>
+        <p:nvPr/>
+      </p:nvGrpSpPr>
+      <p:grpSpPr>
+        <a:xfrm>
+          <a:off x="0" y="0"/>
+          <a:ext cx="0" cy="0"/>
+          <a:chOff x="0" y="0"/>
+          <a:chExt cx="0" cy="0"/>
+        </a:xfrm>
+      </p:grpSpPr>
+      <p:sp>
+        <p:nvSpPr>
+          <p:cNvPr id="412" name="Google Shape;412;g2545b59bd59_0_5:notes"/>
+          <p:cNvSpPr/>
+          <p:nvPr>
+            <p:ph idx="2" type="sldImg"/>
+          </p:nvPr>
+        </p:nvSpPr>
+        <p:spPr>
+          <a:xfrm>
+            <a:off x="381300" y="685800"/>
+            <a:ext cx="6096000" cy="3429000"/>
+          </a:xfrm>
+          <a:custGeom>
+            <a:rect b="b" l="l" r="r" t="t"/>
+            <a:pathLst>
+              <a:path extrusionOk="0" h="120000" w="120000">
+                <a:moveTo>
+                  <a:pt x="0" y="0"/>
+                </a:moveTo>
+                <a:lnTo>
+                  <a:pt x="120000" y="0"/>
+                </a:lnTo>
+                <a:lnTo>
+                  <a:pt x="120000" y="120000"/>
+                </a:lnTo>
+                <a:lnTo>
+                  <a:pt x="0" y="120000"/>
+                </a:lnTo>
+                <a:close/>
+              </a:path>
+            </a:pathLst>
+          </a:custGeom>
+        </p:spPr>
+      </p:sp>
+      <p:sp>
+        <p:nvSpPr>
+          <p:cNvPr id="413" name="Google Shape;413;g2545b59bd59_0_5:notes"/>
+          <p:cNvSpPr txBox="1"/>
+          <p:nvPr>
+            <p:ph idx="1" type="body"/>
+          </p:nvPr>
+        </p:nvSpPr>
+        <p:spPr>
+          <a:xfrm>
+            <a:off x="685800" y="4343400"/>
+            <a:ext cx="5486400" cy="4114800"/>
+          </a:xfrm>
+          <a:prstGeom prst="rect">
+            <a:avLst/>
+          </a:prstGeom>
+        </p:spPr>
+        <p:txBody>
+          <a:bodyPr anchorCtr="0" anchor="t" bIns="91425" lIns="91425" spcFirstLastPara="1" rIns="91425" wrap="square" tIns="91425">
+            <a:noAutofit/>
+          </a:bodyPr>
+          <a:lstStyle/>
+          <a:p>
+            <a:pPr indent="0" lvl="0" marL="0" rtl="0" algn="l">
+              <a:spcBef>
+                <a:spcPts val="0"/>
+              </a:spcBef>
+              <a:spcAft>
+                <a:spcPts val="0"/>
+              </a:spcAft>
+              <a:buNone/>
+            </a:pPr>
+            <a:r>
+              <a:t/>
+            </a:r>
+            <a:endParaRPr/>
+          </a:p>
+        </p:txBody>
+      </p:sp>
+    </p:spTree>
+  </p:cSld>
+  <p:clrMapOvr>
+    <a:masterClrMapping/>
+  </p:clrMapOvr>
+</p:notes>
+</file>
+
+<file path=ppt/notesSlides/notesSlide56.xml><?xml version="1.0" encoding="utf-8"?>
+<p:notes xmlns:a="http://schemas.openxmlformats.org/drawingml/2006/main" xmlns:r="http://schemas.openxmlformats.org/officeDocument/2006/relationships" xmlns:mc="http://schemas.openxmlformats.org/markup-compatibility/2006" xmlns:mv="urn:schemas-microsoft-com:mac:vml" xmlns:p="http://schemas.openxmlformats.org/presentationml/2006/main" xmlns:c="http://schemas.openxmlformats.org/drawingml/2006/chart" xmlns:dgm="http://schemas.openxmlformats.org/drawingml/2006/diagram" xmlns:o="urn:schemas-microsoft-com:office:office" xmlns:v="urn:schemas-microsoft-com:vml" xmlns:pvml="urn:schemas-microsoft-com:office:powerpoint" xmlns:com="http://schemas.openxmlformats.org/drawingml/2006/compatibility" xmlns:p14="http://schemas.microsoft.com/office/powerpoint/2010/main" xmlns:p15="http://schemas.microsoft.com/office/powerpoint/2012/main" xmlns:ahyp="http://schemas.microsoft.com/office/drawing/2018/hyperlinkcolor" showMasterPhAnim="0" showMasterSp="0">
+  <p:cSld>
+    <p:spTree>
+      <p:nvGrpSpPr>
+        <p:cNvPr id="416" name="Shape 416"/>
+        <p:cNvGrpSpPr/>
+        <p:nvPr/>
+      </p:nvGrpSpPr>
+      <p:grpSpPr>
+        <a:xfrm>
+          <a:off x="0" y="0"/>
+          <a:ext cx="0" cy="0"/>
+          <a:chOff x="0" y="0"/>
+          <a:chExt cx="0" cy="0"/>
+        </a:xfrm>
+      </p:grpSpPr>
+      <p:sp>
+        <p:nvSpPr>
+          <p:cNvPr id="417" name="Google Shape;417;g2545b59bd59_0_11:notes"/>
+          <p:cNvSpPr/>
+          <p:nvPr>
+            <p:ph idx="2" type="sldImg"/>
+          </p:nvPr>
+        </p:nvSpPr>
+        <p:spPr>
+          <a:xfrm>
+            <a:off x="381300" y="685800"/>
+            <a:ext cx="6096000" cy="3429000"/>
+          </a:xfrm>
+          <a:custGeom>
+            <a:rect b="b" l="l" r="r" t="t"/>
+            <a:pathLst>
+              <a:path extrusionOk="0" h="120000" w="120000">
+                <a:moveTo>
+                  <a:pt x="0" y="0"/>
+                </a:moveTo>
+                <a:lnTo>
+                  <a:pt x="120000" y="0"/>
+                </a:lnTo>
+                <a:lnTo>
+                  <a:pt x="120000" y="120000"/>
+                </a:lnTo>
+                <a:lnTo>
+                  <a:pt x="0" y="120000"/>
+                </a:lnTo>
+                <a:close/>
+              </a:path>
+            </a:pathLst>
+          </a:custGeom>
+        </p:spPr>
+      </p:sp>
+      <p:sp>
+        <p:nvSpPr>
+          <p:cNvPr id="418" name="Google Shape;418;g2545b59bd59_0_11:notes"/>
           <p:cNvSpPr txBox="1"/>
           <p:nvPr>
             <p:ph idx="1" type="body"/>
@@ -11435,7 +11635,7 @@
               <a:buClr>
                 <a:schemeClr val="dk1"/>
               </a:buClr>
-              <a:buSzPct val="36666"/>
+              <a:buSzPct val="36667"/>
               <a:buFont typeface="Arial"/>
               <a:buNone/>
             </a:pPr>
@@ -12262,7 +12462,7 @@
               <a:buClr>
                 <a:schemeClr val="dk1"/>
               </a:buClr>
-              <a:buSzPct val="36666"/>
+              <a:buSzPct val="36667"/>
               <a:buFont typeface="Arial"/>
               <a:buNone/>
             </a:pPr>
@@ -13895,7 +14095,7 @@
               <a:buClr>
                 <a:schemeClr val="dk1"/>
               </a:buClr>
-              <a:buSzPct val="36666"/>
+              <a:buSzPct val="36667"/>
               <a:buFont typeface="Arial"/>
               <a:buNone/>
             </a:pPr>
@@ -14451,7 +14651,7 @@
         </p:spPr>
         <p:txBody>
           <a:bodyPr anchorCtr="0" anchor="t" bIns="91425" lIns="91425" spcFirstLastPara="1" rIns="91425" wrap="square" tIns="91425">
-            <a:normAutofit lnSpcReduction="10000"/>
+            <a:normAutofit lnSpcReduction="20000"/>
           </a:bodyPr>
           <a:lstStyle/>
           <a:p>
@@ -14524,6 +14724,23 @@
             <a:r>
               <a:rPr lang="en"/>
               <a:t>Range</a:t>
+            </a:r>
+            <a:endParaRPr/>
+          </a:p>
+          <a:p>
+            <a:pPr indent="-342900" lvl="0" marL="457200" rtl="0" algn="l">
+              <a:spcBef>
+                <a:spcPts val="0"/>
+              </a:spcBef>
+              <a:spcAft>
+                <a:spcPts val="0"/>
+              </a:spcAft>
+              <a:buSzPts val="1800"/>
+              <a:buAutoNum type="arabicParenR"/>
+            </a:pPr>
+            <a:r>
+              <a:rPr lang="en"/>
+              <a:t>Interquartile Range (IQR)</a:t>
             </a:r>
             <a:endParaRPr/>
           </a:p>
@@ -14986,6 +15203,55 @@
                                           <p:spTgt spid="139">
                                             <p:txEl>
                                               <p:pRg end="7" st="7"/>
+                                            </p:txEl>
+                                          </p:spTgt>
+                                        </p:tgtEl>
+                                        <p:attrNameLst>
+                                          <p:attrName>style.visibility</p:attrName>
+                                        </p:attrNameLst>
+                                      </p:cBhvr>
+                                      <p:to>
+                                        <p:strVal val="visible"/>
+                                      </p:to>
+                                    </p:set>
+                                  </p:childTnLst>
+                                </p:cTn>
+                              </p:par>
+                            </p:childTnLst>
+                          </p:cTn>
+                        </p:par>
+                      </p:childTnLst>
+                    </p:cTn>
+                  </p:par>
+                  <p:par>
+                    <p:cTn fill="hold">
+                      <p:stCondLst>
+                        <p:cond delay="indefinite"/>
+                      </p:stCondLst>
+                      <p:childTnLst>
+                        <p:par>
+                          <p:cTn fill="hold">
+                            <p:stCondLst>
+                              <p:cond delay="0"/>
+                            </p:stCondLst>
+                            <p:childTnLst>
+                              <p:par>
+                                <p:cTn fill="hold" nodeType="clickEffect" presetClass="entr" presetID="1" presetSubtype="0">
+                                  <p:stCondLst>
+                                    <p:cond delay="0"/>
+                                  </p:stCondLst>
+                                  <p:childTnLst>
+                                    <p:set>
+                                      <p:cBhvr>
+                                        <p:cTn dur="1" fill="hold">
+                                          <p:stCondLst>
+                                            <p:cond delay="0"/>
+                                          </p:stCondLst>
+                                        </p:cTn>
+                                        <p:tgtEl>
+                                          <p:spTgt spid="139">
+                                            <p:txEl>
+                                              <p:pRg end="8" st="8"/>
                                             </p:txEl>
                                           </p:spTgt>
                                         </p:tgtEl>
@@ -17568,7 +17834,7 @@
               <a:buClr>
                 <a:schemeClr val="dk1"/>
               </a:buClr>
-              <a:buSzPct val="36666"/>
+              <a:buSzPct val="36667"/>
               <a:buFont typeface="Arial"/>
               <a:buNone/>
             </a:pPr>
@@ -19335,7 +19601,7 @@
             <a:tbl>
               <a:tblPr>
                 <a:noFill/>
-                <a:tableStyleId>{EED47769-FA5E-423C-9B21-314CA9FAAA3A}</a:tableStyleId>
+                <a:tableStyleId>{A49DC9EB-9361-4B51-8153-D682CE428B52}</a:tableStyleId>
               </a:tblPr>
               <a:tblGrid>
                 <a:gridCol w="3619500"/>
@@ -19723,10 +19989,10 @@
               <a:buNone/>
             </a:pPr>
             <a:r>
-              <a:rPr lang="en"/>
+              <a:rPr b="1" lang="en"/>
               <a:t>MAD = median(|Xi - median(X)|)</a:t>
             </a:r>
-            <a:endParaRPr/>
+            <a:endParaRPr b="1"/>
           </a:p>
         </p:txBody>
       </p:sp>
@@ -20224,7 +20490,7 @@
             <a:tbl>
               <a:tblPr>
                 <a:noFill/>
-                <a:tableStyleId>{EED47769-FA5E-423C-9B21-314CA9FAAA3A}</a:tableStyleId>
+                <a:tableStyleId>{A49DC9EB-9361-4B51-8153-D682CE428B52}</a:tableStyleId>
               </a:tblPr>
               <a:tblGrid>
                 <a:gridCol w="3619500"/>
@@ -21122,7 +21388,7 @@
 </file>
 
 <file path=ppt/slides/slide28.xml><?xml version="1.0" encoding="utf-8"?>
-<p:sld xmlns:a="http://schemas.openxmlformats.org/drawingml/2006/main" xmlns:r="http://schemas.openxmlformats.org/officeDocument/2006/relationships" xmlns:mc="http://schemas.openxmlformats.org/markup-compatibility/2006" xmlns:mv="urn:schemas-microsoft-com:mac:vml" xmlns:p="http://schemas.openxmlformats.org/presentationml/2006/main" xmlns:c="http://schemas.openxmlformats.org/drawingml/2006/chart" xmlns:dgm="http://schemas.openxmlformats.org/drawingml/2006/diagram" xmlns:o="urn:schemas-microsoft-com:office:office" xmlns:v="urn:schemas-microsoft-com:vml" xmlns:pvml="urn:schemas-microsoft-com:office:powerpoint" xmlns:com="http://schemas.openxmlformats.org/drawingml/2006/compatibility" xmlns:p14="http://schemas.microsoft.com/office/powerpoint/2010/main" xmlns:p15="http://schemas.microsoft.com/office/powerpoint/2012/main" xmlns:ahyp="http://schemas.microsoft.com/office/drawing/2018/hyperlinkcolor">
+<p:sld xmlns:a="http://schemas.openxmlformats.org/drawingml/2006/main" xmlns:r="http://schemas.openxmlformats.org/officeDocument/2006/relationships" xmlns:mc="http://schemas.openxmlformats.org/markup-compatibility/2006" xmlns:mv="urn:schemas-microsoft-com:mac:vml" xmlns:p="http://schemas.openxmlformats.org/presentationml/2006/main" xmlns:c="http://schemas.openxmlformats.org/drawingml/2006/chart" xmlns:dgm="http://schemas.openxmlformats.org/drawingml/2006/diagram" xmlns:o="urn:schemas-microsoft-com:office:office" xmlns:v="urn:schemas-microsoft-com:vml" xmlns:pvml="urn:schemas-microsoft-com:office:powerpoint" xmlns:com="http://schemas.openxmlformats.org/drawingml/2006/compatibility" xmlns:p14="http://schemas.microsoft.com/office/powerpoint/2010/main" xmlns:p15="http://schemas.microsoft.com/office/powerpoint/2012/main" xmlns:ahyp="http://schemas.microsoft.com/office/drawing/2018/hyperlinkcolor" show="0">
   <p:cSld>
     <p:spTree>
       <p:nvGrpSpPr>
@@ -21366,7 +21632,7 @@
         </p:spPr>
         <p:txBody>
           <a:bodyPr anchorCtr="0" anchor="t" bIns="91425" lIns="91425" spcFirstLastPara="1" rIns="91425" wrap="square" tIns="91425">
-            <a:normAutofit fontScale="85000" lnSpcReduction="20000"/>
+            <a:normAutofit fontScale="77500" lnSpcReduction="20000"/>
           </a:bodyPr>
           <a:lstStyle/>
           <a:p>
@@ -21429,7 +21695,23 @@
             </a:pPr>
             <a:r>
               <a:rPr lang="en"/>
-              <a:t>Value at which P % of the data are below = P(n + 1)/100</a:t>
+              <a:t>Value at which P % of the data are below = </a:t>
+            </a:r>
+            <a:endParaRPr/>
+          </a:p>
+          <a:p>
+            <a:pPr indent="0" lvl="0" marL="0" rtl="0" algn="l">
+              <a:spcBef>
+                <a:spcPts val="1200"/>
+              </a:spcBef>
+              <a:spcAft>
+                <a:spcPts val="0"/>
+              </a:spcAft>
+              <a:buNone/>
+            </a:pPr>
+            <a:r>
+              <a:rPr lang="en"/>
+              <a:t>P(n + 1)/100</a:t>
             </a:r>
             <a:endParaRPr/>
           </a:p>
@@ -21789,6 +22071,55 @@
                                           <p:spTgt spid="240">
                                             <p:txEl>
                                               <p:pRg end="5" st="5"/>
+                                            </p:txEl>
+                                          </p:spTgt>
+                                        </p:tgtEl>
+                                        <p:attrNameLst>
+                                          <p:attrName>style.visibility</p:attrName>
+                                        </p:attrNameLst>
+                                      </p:cBhvr>
+                                      <p:to>
+                                        <p:strVal val="visible"/>
+                                      </p:to>
+                                    </p:set>
+                                  </p:childTnLst>
+                                </p:cTn>
+                              </p:par>
+                            </p:childTnLst>
+                          </p:cTn>
+                        </p:par>
+                      </p:childTnLst>
+                    </p:cTn>
+                  </p:par>
+                  <p:par>
+                    <p:cTn fill="hold">
+                      <p:stCondLst>
+                        <p:cond delay="indefinite"/>
+                      </p:stCondLst>
+                      <p:childTnLst>
+                        <p:par>
+                          <p:cTn fill="hold">
+                            <p:stCondLst>
+                              <p:cond delay="0"/>
+                            </p:stCondLst>
+                            <p:childTnLst>
+                              <p:par>
+                                <p:cTn fill="hold" nodeType="clickEffect" presetClass="entr" presetID="1" presetSubtype="0">
+                                  <p:stCondLst>
+                                    <p:cond delay="0"/>
+                                  </p:stCondLst>
+                                  <p:childTnLst>
+                                    <p:set>
+                                      <p:cBhvr>
+                                        <p:cTn dur="1" fill="hold">
+                                          <p:stCondLst>
+                                            <p:cond delay="0"/>
+                                          </p:stCondLst>
+                                        </p:cTn>
+                                        <p:tgtEl>
+                                          <p:spTgt spid="240">
+                                            <p:txEl>
+                                              <p:pRg end="6" st="6"/>
                                             </p:txEl>
                                           </p:spTgt>
                                         </p:tgtEl>
@@ -23012,7 +23343,7 @@
 </file>
 
 <file path=ppt/slides/slide31.xml><?xml version="1.0" encoding="utf-8"?>
-<p:sld xmlns:a="http://schemas.openxmlformats.org/drawingml/2006/main" xmlns:r="http://schemas.openxmlformats.org/officeDocument/2006/relationships" xmlns:mc="http://schemas.openxmlformats.org/markup-compatibility/2006" xmlns:mv="urn:schemas-microsoft-com:mac:vml" xmlns:p="http://schemas.openxmlformats.org/presentationml/2006/main" xmlns:c="http://schemas.openxmlformats.org/drawingml/2006/chart" xmlns:dgm="http://schemas.openxmlformats.org/drawingml/2006/diagram" xmlns:o="urn:schemas-microsoft-com:office:office" xmlns:v="urn:schemas-microsoft-com:vml" xmlns:pvml="urn:schemas-microsoft-com:office:powerpoint" xmlns:com="http://schemas.openxmlformats.org/drawingml/2006/compatibility" xmlns:p14="http://schemas.microsoft.com/office/powerpoint/2010/main" xmlns:p15="http://schemas.microsoft.com/office/powerpoint/2012/main" xmlns:ahyp="http://schemas.microsoft.com/office/drawing/2018/hyperlinkcolor" show="0">
+<p:sld xmlns:a="http://schemas.openxmlformats.org/drawingml/2006/main" xmlns:r="http://schemas.openxmlformats.org/officeDocument/2006/relationships" xmlns:mc="http://schemas.openxmlformats.org/markup-compatibility/2006" xmlns:mv="urn:schemas-microsoft-com:mac:vml" xmlns:p="http://schemas.openxmlformats.org/presentationml/2006/main" xmlns:c="http://schemas.openxmlformats.org/drawingml/2006/chart" xmlns:dgm="http://schemas.openxmlformats.org/drawingml/2006/diagram" xmlns:o="urn:schemas-microsoft-com:office:office" xmlns:v="urn:schemas-microsoft-com:vml" xmlns:pvml="urn:schemas-microsoft-com:office:powerpoint" xmlns:com="http://schemas.openxmlformats.org/drawingml/2006/compatibility" xmlns:p14="http://schemas.microsoft.com/office/powerpoint/2010/main" xmlns:p15="http://schemas.microsoft.com/office/powerpoint/2012/main" xmlns:ahyp="http://schemas.microsoft.com/office/drawing/2018/hyperlinkcolor">
   <p:cSld>
     <p:spTree>
       <p:nvGrpSpPr>
@@ -23187,65 +23518,6 @@
             <a:r>
               <a:rPr lang="en" sz="1190"/>
               <a:t>3rd quartile = ¾(n + 1)th term</a:t>
-            </a:r>
-            <a:endParaRPr sz="1190"/>
-          </a:p>
-          <a:p>
-            <a:pPr indent="0" lvl="0" marL="0" rtl="0" algn="l">
-              <a:lnSpc>
-                <a:spcPct val="95000"/>
-              </a:lnSpc>
-              <a:spcBef>
-                <a:spcPts val="1200"/>
-              </a:spcBef>
-              <a:spcAft>
-                <a:spcPts val="0"/>
-              </a:spcAft>
-              <a:buSzPts val="605"/>
-              <a:buNone/>
-            </a:pPr>
-            <a:r>
-              <a:t/>
-            </a:r>
-            <a:endParaRPr sz="1190"/>
-          </a:p>
-          <a:p>
-            <a:pPr indent="0" lvl="0" marL="0" rtl="0" algn="l">
-              <a:lnSpc>
-                <a:spcPct val="95000"/>
-              </a:lnSpc>
-              <a:spcBef>
-                <a:spcPts val="1200"/>
-              </a:spcBef>
-              <a:spcAft>
-                <a:spcPts val="0"/>
-              </a:spcAft>
-              <a:buSzPts val="605"/>
-              <a:buNone/>
-            </a:pPr>
-            <a:r>
-              <a:rPr lang="en" sz="1190"/>
-              <a:t>Interquartile range measures spread between 25th and 75th percentiles</a:t>
-            </a:r>
-            <a:endParaRPr sz="1190"/>
-          </a:p>
-          <a:p>
-            <a:pPr indent="0" lvl="0" marL="0" rtl="0" algn="l">
-              <a:lnSpc>
-                <a:spcPct val="95000"/>
-              </a:lnSpc>
-              <a:spcBef>
-                <a:spcPts val="1200"/>
-              </a:spcBef>
-              <a:spcAft>
-                <a:spcPts val="0"/>
-              </a:spcAft>
-              <a:buSzPts val="605"/>
-              <a:buNone/>
-            </a:pPr>
-            <a:r>
-              <a:rPr lang="en" sz="1190"/>
-              <a:t>IQR = 3rd Quartile - 1st Quartile - IQR SLIDE*</a:t>
             </a:r>
             <a:endParaRPr sz="1190"/>
           </a:p>
@@ -23715,153 +23987,6 @@
                       </p:childTnLst>
                     </p:cTn>
                   </p:par>
-                  <p:par>
-                    <p:cTn fill="hold">
-                      <p:stCondLst>
-                        <p:cond delay="indefinite"/>
-                      </p:stCondLst>
-                      <p:childTnLst>
-                        <p:par>
-                          <p:cTn fill="hold">
-                            <p:stCondLst>
-                              <p:cond delay="0"/>
-                            </p:stCondLst>
-                            <p:childTnLst>
-                              <p:par>
-                                <p:cTn fill="hold" nodeType="clickEffect" presetClass="entr" presetID="1" presetSubtype="0">
-                                  <p:stCondLst>
-                                    <p:cond delay="0"/>
-                                  </p:stCondLst>
-                                  <p:childTnLst>
-                                    <p:set>
-                                      <p:cBhvr>
-                                        <p:cTn dur="1" fill="hold">
-                                          <p:stCondLst>
-                                            <p:cond delay="0"/>
-                                          </p:stCondLst>
-                                        </p:cTn>
-                                        <p:tgtEl>
-                                          <p:spTgt spid="253">
-                                            <p:txEl>
-                                              <p:pRg end="8" st="8"/>
-                                            </p:txEl>
-                                          </p:spTgt>
-                                        </p:tgtEl>
-                                        <p:attrNameLst>
-                                          <p:attrName>style.visibility</p:attrName>
-                                        </p:attrNameLst>
-                                      </p:cBhvr>
-                                      <p:to>
-                                        <p:strVal val="visible"/>
-                                      </p:to>
-                                    </p:set>
-                                  </p:childTnLst>
-                                </p:cTn>
-                              </p:par>
-                            </p:childTnLst>
-                          </p:cTn>
-                        </p:par>
-                      </p:childTnLst>
-                    </p:cTn>
-                  </p:par>
-                  <p:par>
-                    <p:cTn fill="hold">
-                      <p:stCondLst>
-                        <p:cond delay="indefinite"/>
-                      </p:stCondLst>
-                      <p:childTnLst>
-                        <p:par>
-                          <p:cTn fill="hold">
-                            <p:stCondLst>
-                              <p:cond delay="0"/>
-                            </p:stCondLst>
-                            <p:childTnLst>
-                              <p:par>
-                                <p:cTn fill="hold" nodeType="clickEffect" presetClass="entr" presetID="1" presetSubtype="0">
-                                  <p:stCondLst>
-                                    <p:cond delay="0"/>
-                                  </p:stCondLst>
-                                  <p:childTnLst>
-                                    <p:set>
-                                      <p:cBhvr>
-                                        <p:cTn dur="1" fill="hold">
-                                          <p:stCondLst>
-                                            <p:cond delay="0"/>
-                                          </p:stCondLst>
-                                        </p:cTn>
-                                        <p:tgtEl>
-                                          <p:spTgt spid="253">
-                                            <p:txEl>
-                                              <p:pRg end="9" st="9"/>
-                                            </p:txEl>
-                                          </p:spTgt>
-                                        </p:tgtEl>
-                                        <p:attrNameLst>
-                                          <p:attrName>style.visibility</p:attrName>
-                                        </p:attrNameLst>
-                                      </p:cBhvr>
-                                      <p:to>
-                                        <p:strVal val="visible"/>
-                                      </p:to>
-                                    </p:set>
-                                  </p:childTnLst>
-                                </p:cTn>
-                              </p:par>
-                            </p:childTnLst>
-                          </p:cTn>
-                        </p:par>
-                      </p:childTnLst>
-                    </p:cTn>
-                  </p:par>
-                  <p:par>
-                    <p:cTn fill="hold">
-                      <p:stCondLst>
-                        <p:cond delay="indefinite"/>
-                      </p:stCondLst>
-                      <p:childTnLst>
-                        <p:par>
-                          <p:cTn fill="hold">
-                            <p:stCondLst>
-                              <p:cond delay="0"/>
-                            </p:stCondLst>
-                            <p:childTnLst>
-                              <p:par>
-                                <p:cTn fill="hold" nodeType="clickEffect" presetClass="entr" presetID="1" presetSubtype="0">
-                                  <p:stCondLst>
-                                    <p:cond delay="0"/>
-                                  </p:stCondLst>
-                                  <p:childTnLst>
-                                    <p:set>
-                                      <p:cBhvr>
-                                        <p:cTn dur="1" fill="hold">
-                                          <p:stCondLst>
-                                            <p:cond delay="0"/>
-                                          </p:stCondLst>
-                                        </p:cTn>
-                                        <p:tgtEl>
-                                          <p:spTgt spid="253">
-                                            <p:txEl>
-                                              <p:pRg end="10" st="10"/>
-                                            </p:txEl>
-                                          </p:spTgt>
-                                        </p:tgtEl>
-                                        <p:attrNameLst>
-                                          <p:attrName>style.visibility</p:attrName>
-                                        </p:attrNameLst>
-                                      </p:cBhvr>
-                                      <p:to>
-                                        <p:strVal val="visible"/>
-                                      </p:to>
-                                    </p:set>
-                                  </p:childTnLst>
-                                </p:cTn>
-                              </p:par>
-                            </p:childTnLst>
-                          </p:cTn>
-                        </p:par>
-                      </p:childTnLst>
-                    </p:cTn>
-                  </p:par>
                 </p:childTnLst>
               </p:cTn>
               <p:prevCondLst>
@@ -23938,7 +24063,7 @@
             </a:pPr>
             <a:r>
               <a:rPr lang="en"/>
-              <a:t>Frequency Distributions</a:t>
+              <a:t>Interquartile Range</a:t>
             </a:r>
             <a:endParaRPr/>
           </a:p>
@@ -23947,6 +24072,747 @@
       <p:sp>
         <p:nvSpPr>
           <p:cNvPr id="259" name="Google Shape;259;p44"/>
+          <p:cNvSpPr txBox="1"/>
+          <p:nvPr>
+            <p:ph idx="1" type="body"/>
+          </p:nvPr>
+        </p:nvSpPr>
+        <p:spPr>
+          <a:xfrm>
+            <a:off x="311700" y="1152475"/>
+            <a:ext cx="5614200" cy="3416400"/>
+          </a:xfrm>
+          <a:prstGeom prst="rect">
+            <a:avLst/>
+          </a:prstGeom>
+        </p:spPr>
+        <p:txBody>
+          <a:bodyPr anchorCtr="0" anchor="t" bIns="91425" lIns="91425" spcFirstLastPara="1" rIns="91425" wrap="square" tIns="91425">
+            <a:normAutofit fontScale="70000"/>
+          </a:bodyPr>
+          <a:lstStyle/>
+          <a:p>
+            <a:pPr indent="0" lvl="0" marL="0" rtl="0" algn="l">
+              <a:spcBef>
+                <a:spcPts val="0"/>
+              </a:spcBef>
+              <a:spcAft>
+                <a:spcPts val="0"/>
+              </a:spcAft>
+              <a:buNone/>
+            </a:pPr>
+            <a:r>
+              <a:rPr lang="en"/>
+              <a:t>IQR measures the spread of the middle 50% of the data</a:t>
+            </a:r>
+            <a:endParaRPr/>
+          </a:p>
+          <a:p>
+            <a:pPr indent="0" lvl="0" marL="0" rtl="0" algn="l">
+              <a:spcBef>
+                <a:spcPts val="1200"/>
+              </a:spcBef>
+              <a:spcAft>
+                <a:spcPts val="0"/>
+              </a:spcAft>
+              <a:buNone/>
+            </a:pPr>
+            <a:r>
+              <a:rPr b="1" lang="en"/>
+              <a:t>IQR = Quartile 3 - Quartile 1 = 75th Percentile - 25th Percentile</a:t>
+            </a:r>
+            <a:endParaRPr b="1"/>
+          </a:p>
+          <a:p>
+            <a:pPr indent="0" lvl="0" marL="0" rtl="0" algn="l">
+              <a:spcBef>
+                <a:spcPts val="1200"/>
+              </a:spcBef>
+              <a:spcAft>
+                <a:spcPts val="0"/>
+              </a:spcAft>
+              <a:buNone/>
+            </a:pPr>
+            <a:r>
+              <a:rPr lang="en"/>
+              <a:t>Small IQR = Clustered together, Large IQR = Spread out</a:t>
+            </a:r>
+            <a:endParaRPr/>
+          </a:p>
+          <a:p>
+            <a:pPr indent="0" lvl="0" marL="0" rtl="0" algn="l">
+              <a:spcBef>
+                <a:spcPts val="1200"/>
+              </a:spcBef>
+              <a:spcAft>
+                <a:spcPts val="0"/>
+              </a:spcAft>
+              <a:buNone/>
+            </a:pPr>
+            <a:r>
+              <a:rPr lang="en"/>
+              <a:t>IQR is resistant to outliers and skew.</a:t>
+            </a:r>
+            <a:endParaRPr/>
+          </a:p>
+          <a:p>
+            <a:pPr indent="0" lvl="0" marL="0" rtl="0" algn="l">
+              <a:spcBef>
+                <a:spcPts val="1200"/>
+              </a:spcBef>
+              <a:spcAft>
+                <a:spcPts val="0"/>
+              </a:spcAft>
+              <a:buNone/>
+            </a:pPr>
+            <a:r>
+              <a:t/>
+            </a:r>
+            <a:endParaRPr/>
+          </a:p>
+          <a:p>
+            <a:pPr indent="0" lvl="0" marL="0" rtl="0" algn="l">
+              <a:spcBef>
+                <a:spcPts val="1200"/>
+              </a:spcBef>
+              <a:spcAft>
+                <a:spcPts val="0"/>
+              </a:spcAft>
+              <a:buNone/>
+            </a:pPr>
+            <a:r>
+              <a:rPr lang="en"/>
+              <a:t>Can be used to detect outliers as well.</a:t>
+            </a:r>
+            <a:endParaRPr/>
+          </a:p>
+          <a:p>
+            <a:pPr indent="0" lvl="0" marL="0" rtl="0" algn="l">
+              <a:spcBef>
+                <a:spcPts val="1200"/>
+              </a:spcBef>
+              <a:spcAft>
+                <a:spcPts val="0"/>
+              </a:spcAft>
+              <a:buNone/>
+            </a:pPr>
+            <a:r>
+              <a:rPr lang="en"/>
+              <a:t>IQR outlier formula: X is an outlier if </a:t>
+            </a:r>
+            <a:r>
+              <a:rPr b="1" lang="en"/>
+              <a:t>X &lt; Q1 - 1.5(IQR)</a:t>
+            </a:r>
+            <a:r>
+              <a:rPr lang="en"/>
+              <a:t> or </a:t>
+            </a:r>
+            <a:r>
+              <a:rPr b="1" lang="en"/>
+              <a:t>X &gt; Q3 + 1.5(IQR)</a:t>
+            </a:r>
+            <a:endParaRPr b="1"/>
+          </a:p>
+          <a:p>
+            <a:pPr indent="0" lvl="0" marL="0" rtl="0" algn="l">
+              <a:spcBef>
+                <a:spcPts val="1200"/>
+              </a:spcBef>
+              <a:spcAft>
+                <a:spcPts val="0"/>
+              </a:spcAft>
+              <a:buNone/>
+            </a:pPr>
+            <a:r>
+              <a:t/>
+            </a:r>
+            <a:endParaRPr b="1"/>
+          </a:p>
+          <a:p>
+            <a:pPr indent="0" lvl="0" marL="0" rtl="0" algn="l">
+              <a:spcBef>
+                <a:spcPts val="1200"/>
+              </a:spcBef>
+              <a:spcAft>
+                <a:spcPts val="1200"/>
+              </a:spcAft>
+              <a:buNone/>
+            </a:pPr>
+            <a:r>
+              <a:t/>
+            </a:r>
+            <a:endParaRPr b="1"/>
+          </a:p>
+        </p:txBody>
+      </p:sp>
+      <p:pic>
+        <p:nvPicPr>
+          <p:cNvPr id="260" name="Google Shape;260;p44"/>
+          <p:cNvPicPr preferRelativeResize="0"/>
+          <p:nvPr/>
+        </p:nvPicPr>
+        <p:blipFill>
+          <a:blip r:embed="rId3">
+            <a:alphaModFix/>
+          </a:blip>
+          <a:stretch>
+            <a:fillRect/>
+          </a:stretch>
+        </p:blipFill>
+        <p:spPr>
+          <a:xfrm>
+            <a:off x="5925900" y="1352275"/>
+            <a:ext cx="2913300" cy="2167716"/>
+          </a:xfrm>
+          <a:prstGeom prst="rect">
+            <a:avLst/>
+          </a:prstGeom>
+          <a:noFill/>
+          <a:ln>
+            <a:noFill/>
+          </a:ln>
+        </p:spPr>
+      </p:pic>
+    </p:spTree>
+  </p:cSld>
+  <p:clrMapOvr>
+    <a:masterClrMapping/>
+  </p:clrMapOvr>
+  <p:timing>
+    <p:tnLst>
+      <p:par>
+        <p:cTn dur="indefinite" nodeType="tmRoot" restart="never">
+          <p:childTnLst>
+            <p:seq concurrent="1" nextAc="seek">
+              <p:cTn dur="indefinite" id="2" nodeType="mainSeq">
+                <p:childTnLst>
+                  <p:par>
+                    <p:cTn fill="hold">
+                      <p:stCondLst>
+                        <p:cond delay="indefinite"/>
+                      </p:stCondLst>
+                      <p:childTnLst>
+                        <p:par>
+                          <p:cTn fill="hold">
+                            <p:stCondLst>
+                              <p:cond delay="0"/>
+                            </p:stCondLst>
+                            <p:childTnLst>
+                              <p:par>
+                                <p:cTn fill="hold" nodeType="clickEffect" presetClass="entr" presetID="1" presetSubtype="0">
+                                  <p:stCondLst>
+                                    <p:cond delay="0"/>
+                                  </p:stCondLst>
+                                  <p:childTnLst>
+                                    <p:set>
+                                      <p:cBhvr>
+                                        <p:cTn dur="1" fill="hold">
+                                          <p:stCondLst>
+                                            <p:cond delay="0"/>
+                                          </p:stCondLst>
+                                        </p:cTn>
+                                        <p:tgtEl>
+                                          <p:spTgt spid="259">
+                                            <p:txEl>
+                                              <p:pRg end="0" st="0"/>
+                                            </p:txEl>
+                                          </p:spTgt>
+                                        </p:tgtEl>
+                                        <p:attrNameLst>
+                                          <p:attrName>style.visibility</p:attrName>
+                                        </p:attrNameLst>
+                                      </p:cBhvr>
+                                      <p:to>
+                                        <p:strVal val="visible"/>
+                                      </p:to>
+                                    </p:set>
+                                  </p:childTnLst>
+                                </p:cTn>
+                              </p:par>
+                            </p:childTnLst>
+                          </p:cTn>
+                        </p:par>
+                      </p:childTnLst>
+                    </p:cTn>
+                  </p:par>
+                  <p:par>
+                    <p:cTn fill="hold">
+                      <p:stCondLst>
+                        <p:cond delay="indefinite"/>
+                      </p:stCondLst>
+                      <p:childTnLst>
+                        <p:par>
+                          <p:cTn fill="hold">
+                            <p:stCondLst>
+                              <p:cond delay="0"/>
+                            </p:stCondLst>
+                            <p:childTnLst>
+                              <p:par>
+                                <p:cTn fill="hold" nodeType="clickEffect" presetClass="entr" presetID="1" presetSubtype="0">
+                                  <p:stCondLst>
+                                    <p:cond delay="0"/>
+                                  </p:stCondLst>
+                                  <p:childTnLst>
+                                    <p:set>
+                                      <p:cBhvr>
+                                        <p:cTn dur="1" fill="hold">
+                                          <p:stCondLst>
+                                            <p:cond delay="0"/>
+                                          </p:stCondLst>
+                                        </p:cTn>
+                                        <p:tgtEl>
+                                          <p:spTgt spid="259">
+                                            <p:txEl>
+                                              <p:pRg end="1" st="1"/>
+                                            </p:txEl>
+                                          </p:spTgt>
+                                        </p:tgtEl>
+                                        <p:attrNameLst>
+                                          <p:attrName>style.visibility</p:attrName>
+                                        </p:attrNameLst>
+                                      </p:cBhvr>
+                                      <p:to>
+                                        <p:strVal val="visible"/>
+                                      </p:to>
+                                    </p:set>
+                                  </p:childTnLst>
+                                </p:cTn>
+                              </p:par>
+                            </p:childTnLst>
+                          </p:cTn>
+                        </p:par>
+                      </p:childTnLst>
+                    </p:cTn>
+                  </p:par>
+                  <p:par>
+                    <p:cTn fill="hold">
+                      <p:stCondLst>
+                        <p:cond delay="indefinite"/>
+                      </p:stCondLst>
+                      <p:childTnLst>
+                        <p:par>
+                          <p:cTn fill="hold">
+                            <p:stCondLst>
+                              <p:cond delay="0"/>
+                            </p:stCondLst>
+                            <p:childTnLst>
+                              <p:par>
+                                <p:cTn fill="hold" nodeType="clickEffect" presetClass="entr" presetID="1" presetSubtype="0">
+                                  <p:stCondLst>
+                                    <p:cond delay="0"/>
+                                  </p:stCondLst>
+                                  <p:childTnLst>
+                                    <p:set>
+                                      <p:cBhvr>
+                                        <p:cTn dur="1" fill="hold">
+                                          <p:stCondLst>
+                                            <p:cond delay="0"/>
+                                          </p:stCondLst>
+                                        </p:cTn>
+                                        <p:tgtEl>
+                                          <p:spTgt spid="259">
+                                            <p:txEl>
+                                              <p:pRg end="2" st="2"/>
+                                            </p:txEl>
+                                          </p:spTgt>
+                                        </p:tgtEl>
+                                        <p:attrNameLst>
+                                          <p:attrName>style.visibility</p:attrName>
+                                        </p:attrNameLst>
+                                      </p:cBhvr>
+                                      <p:to>
+                                        <p:strVal val="visible"/>
+                                      </p:to>
+                                    </p:set>
+                                  </p:childTnLst>
+                                </p:cTn>
+                              </p:par>
+                            </p:childTnLst>
+                          </p:cTn>
+                        </p:par>
+                      </p:childTnLst>
+                    </p:cTn>
+                  </p:par>
+                  <p:par>
+                    <p:cTn fill="hold">
+                      <p:stCondLst>
+                        <p:cond delay="indefinite"/>
+                      </p:stCondLst>
+                      <p:childTnLst>
+                        <p:par>
+                          <p:cTn fill="hold">
+                            <p:stCondLst>
+                              <p:cond delay="0"/>
+                            </p:stCondLst>
+                            <p:childTnLst>
+                              <p:par>
+                                <p:cTn fill="hold" nodeType="clickEffect" presetClass="entr" presetID="1" presetSubtype="0">
+                                  <p:stCondLst>
+                                    <p:cond delay="0"/>
+                                  </p:stCondLst>
+                                  <p:childTnLst>
+                                    <p:set>
+                                      <p:cBhvr>
+                                        <p:cTn dur="1" fill="hold">
+                                          <p:stCondLst>
+                                            <p:cond delay="0"/>
+                                          </p:stCondLst>
+                                        </p:cTn>
+                                        <p:tgtEl>
+                                          <p:spTgt spid="259">
+                                            <p:txEl>
+                                              <p:pRg end="3" st="3"/>
+                                            </p:txEl>
+                                          </p:spTgt>
+                                        </p:tgtEl>
+                                        <p:attrNameLst>
+                                          <p:attrName>style.visibility</p:attrName>
+                                        </p:attrNameLst>
+                                      </p:cBhvr>
+                                      <p:to>
+                                        <p:strVal val="visible"/>
+                                      </p:to>
+                                    </p:set>
+                                  </p:childTnLst>
+                                </p:cTn>
+                              </p:par>
+                            </p:childTnLst>
+                          </p:cTn>
+                        </p:par>
+                      </p:childTnLst>
+                    </p:cTn>
+                  </p:par>
+                  <p:par>
+                    <p:cTn fill="hold">
+                      <p:stCondLst>
+                        <p:cond delay="indefinite"/>
+                      </p:stCondLst>
+                      <p:childTnLst>
+                        <p:par>
+                          <p:cTn fill="hold">
+                            <p:stCondLst>
+                              <p:cond delay="0"/>
+                            </p:stCondLst>
+                            <p:childTnLst>
+                              <p:par>
+                                <p:cTn fill="hold" nodeType="clickEffect" presetClass="entr" presetID="1" presetSubtype="0">
+                                  <p:stCondLst>
+                                    <p:cond delay="0"/>
+                                  </p:stCondLst>
+                                  <p:childTnLst>
+                                    <p:set>
+                                      <p:cBhvr>
+                                        <p:cTn dur="1" fill="hold">
+                                          <p:stCondLst>
+                                            <p:cond delay="0"/>
+                                          </p:stCondLst>
+                                        </p:cTn>
+                                        <p:tgtEl>
+                                          <p:spTgt spid="259">
+                                            <p:txEl>
+                                              <p:pRg end="4" st="4"/>
+                                            </p:txEl>
+                                          </p:spTgt>
+                                        </p:tgtEl>
+                                        <p:attrNameLst>
+                                          <p:attrName>style.visibility</p:attrName>
+                                        </p:attrNameLst>
+                                      </p:cBhvr>
+                                      <p:to>
+                                        <p:strVal val="visible"/>
+                                      </p:to>
+                                    </p:set>
+                                  </p:childTnLst>
+                                </p:cTn>
+                              </p:par>
+                            </p:childTnLst>
+                          </p:cTn>
+                        </p:par>
+                      </p:childTnLst>
+                    </p:cTn>
+                  </p:par>
+                  <p:par>
+                    <p:cTn fill="hold">
+                      <p:stCondLst>
+                        <p:cond delay="indefinite"/>
+                      </p:stCondLst>
+                      <p:childTnLst>
+                        <p:par>
+                          <p:cTn fill="hold">
+                            <p:stCondLst>
+                              <p:cond delay="0"/>
+                            </p:stCondLst>
+                            <p:childTnLst>
+                              <p:par>
+                                <p:cTn fill="hold" nodeType="clickEffect" presetClass="entr" presetID="1" presetSubtype="0">
+                                  <p:stCondLst>
+                                    <p:cond delay="0"/>
+                                  </p:stCondLst>
+                                  <p:childTnLst>
+                                    <p:set>
+                                      <p:cBhvr>
+                                        <p:cTn dur="1" fill="hold">
+                                          <p:stCondLst>
+                                            <p:cond delay="0"/>
+                                          </p:stCondLst>
+                                        </p:cTn>
+                                        <p:tgtEl>
+                                          <p:spTgt spid="259">
+                                            <p:txEl>
+                                              <p:pRg end="5" st="5"/>
+                                            </p:txEl>
+                                          </p:spTgt>
+                                        </p:tgtEl>
+                                        <p:attrNameLst>
+                                          <p:attrName>style.visibility</p:attrName>
+                                        </p:attrNameLst>
+                                      </p:cBhvr>
+                                      <p:to>
+                                        <p:strVal val="visible"/>
+                                      </p:to>
+                                    </p:set>
+                                  </p:childTnLst>
+                                </p:cTn>
+                              </p:par>
+                            </p:childTnLst>
+                          </p:cTn>
+                        </p:par>
+                      </p:childTnLst>
+                    </p:cTn>
+                  </p:par>
+                  <p:par>
+                    <p:cTn fill="hold">
+                      <p:stCondLst>
+                        <p:cond delay="indefinite"/>
+                      </p:stCondLst>
+                      <p:childTnLst>
+                        <p:par>
+                          <p:cTn fill="hold">
+                            <p:stCondLst>
+                              <p:cond delay="0"/>
+                            </p:stCondLst>
+                            <p:childTnLst>
+                              <p:par>
+                                <p:cTn fill="hold" nodeType="clickEffect" presetClass="entr" presetID="1" presetSubtype="0">
+                                  <p:stCondLst>
+                                    <p:cond delay="0"/>
+                                  </p:stCondLst>
+                                  <p:childTnLst>
+                                    <p:set>
+                                      <p:cBhvr>
+                                        <p:cTn dur="1" fill="hold">
+                                          <p:stCondLst>
+                                            <p:cond delay="0"/>
+                                          </p:stCondLst>
+                                        </p:cTn>
+                                        <p:tgtEl>
+                                          <p:spTgt spid="259">
+                                            <p:txEl>
+                                              <p:pRg end="6" st="6"/>
+                                            </p:txEl>
+                                          </p:spTgt>
+                                        </p:tgtEl>
+                                        <p:attrNameLst>
+                                          <p:attrName>style.visibility</p:attrName>
+                                        </p:attrNameLst>
+                                      </p:cBhvr>
+                                      <p:to>
+                                        <p:strVal val="visible"/>
+                                      </p:to>
+                                    </p:set>
+                                  </p:childTnLst>
+                                </p:cTn>
+                              </p:par>
+                            </p:childTnLst>
+                          </p:cTn>
+                        </p:par>
+                      </p:childTnLst>
+                    </p:cTn>
+                  </p:par>
+                  <p:par>
+                    <p:cTn fill="hold">
+                      <p:stCondLst>
+                        <p:cond delay="indefinite"/>
+                      </p:stCondLst>
+                      <p:childTnLst>
+                        <p:par>
+                          <p:cTn fill="hold">
+                            <p:stCondLst>
+                              <p:cond delay="0"/>
+                            </p:stCondLst>
+                            <p:childTnLst>
+                              <p:par>
+                                <p:cTn fill="hold" nodeType="clickEffect" presetClass="entr" presetID="1" presetSubtype="0">
+                                  <p:stCondLst>
+                                    <p:cond delay="0"/>
+                                  </p:stCondLst>
+                                  <p:childTnLst>
+                                    <p:set>
+                                      <p:cBhvr>
+                                        <p:cTn dur="1" fill="hold">
+                                          <p:stCondLst>
+                                            <p:cond delay="0"/>
+                                          </p:stCondLst>
+                                        </p:cTn>
+                                        <p:tgtEl>
+                                          <p:spTgt spid="259">
+                                            <p:txEl>
+                                              <p:pRg end="7" st="7"/>
+                                            </p:txEl>
+                                          </p:spTgt>
+                                        </p:tgtEl>
+                                        <p:attrNameLst>
+                                          <p:attrName>style.visibility</p:attrName>
+                                        </p:attrNameLst>
+                                      </p:cBhvr>
+                                      <p:to>
+                                        <p:strVal val="visible"/>
+                                      </p:to>
+                                    </p:set>
+                                  </p:childTnLst>
+                                </p:cTn>
+                              </p:par>
+                            </p:childTnLst>
+                          </p:cTn>
+                        </p:par>
+                      </p:childTnLst>
+                    </p:cTn>
+                  </p:par>
+                  <p:par>
+                    <p:cTn fill="hold">
+                      <p:stCondLst>
+                        <p:cond delay="indefinite"/>
+                      </p:stCondLst>
+                      <p:childTnLst>
+                        <p:par>
+                          <p:cTn fill="hold">
+                            <p:stCondLst>
+                              <p:cond delay="0"/>
+                            </p:stCondLst>
+                            <p:childTnLst>
+                              <p:par>
+                                <p:cTn fill="hold" nodeType="clickEffect" presetClass="entr" presetID="1" presetSubtype="0">
+                                  <p:stCondLst>
+                                    <p:cond delay="0"/>
+                                  </p:stCondLst>
+                                  <p:childTnLst>
+                                    <p:set>
+                                      <p:cBhvr>
+                                        <p:cTn dur="1" fill="hold">
+                                          <p:stCondLst>
+                                            <p:cond delay="0"/>
+                                          </p:stCondLst>
+                                        </p:cTn>
+                                        <p:tgtEl>
+                                          <p:spTgt spid="259">
+                                            <p:txEl>
+                                              <p:pRg end="8" st="8"/>
+                                            </p:txEl>
+                                          </p:spTgt>
+                                        </p:tgtEl>
+                                        <p:attrNameLst>
+                                          <p:attrName>style.visibility</p:attrName>
+                                        </p:attrNameLst>
+                                      </p:cBhvr>
+                                      <p:to>
+                                        <p:strVal val="visible"/>
+                                      </p:to>
+                                    </p:set>
+                                  </p:childTnLst>
+                                </p:cTn>
+                              </p:par>
+                            </p:childTnLst>
+                          </p:cTn>
+                        </p:par>
+                      </p:childTnLst>
+                    </p:cTn>
+                  </p:par>
+                </p:childTnLst>
+              </p:cTn>
+              <p:prevCondLst>
+                <p:cond evt="onPrev">
+                  <p:tgtEl>
+                    <p:sldTgt/>
+                  </p:tgtEl>
+                </p:cond>
+              </p:prevCondLst>
+              <p:nextCondLst>
+                <p:cond evt="onNext">
+                  <p:tgtEl>
+                    <p:sldTgt/>
+                  </p:tgtEl>
+                </p:cond>
+              </p:nextCondLst>
+            </p:seq>
+          </p:childTnLst>
+        </p:cTn>
+      </p:par>
+    </p:tnLst>
+  </p:timing>
+</p:sld>
+</file>
+
+<file path=ppt/slides/slide33.xml><?xml version="1.0" encoding="utf-8"?>
+<p:sld xmlns:a="http://schemas.openxmlformats.org/drawingml/2006/main" xmlns:r="http://schemas.openxmlformats.org/officeDocument/2006/relationships" xmlns:mc="http://schemas.openxmlformats.org/markup-compatibility/2006" xmlns:mv="urn:schemas-microsoft-com:mac:vml" xmlns:p="http://schemas.openxmlformats.org/presentationml/2006/main" xmlns:c="http://schemas.openxmlformats.org/drawingml/2006/chart" xmlns:dgm="http://schemas.openxmlformats.org/drawingml/2006/diagram" xmlns:o="urn:schemas-microsoft-com:office:office" xmlns:v="urn:schemas-microsoft-com:vml" xmlns:pvml="urn:schemas-microsoft-com:office:powerpoint" xmlns:com="http://schemas.openxmlformats.org/drawingml/2006/compatibility" xmlns:p14="http://schemas.microsoft.com/office/powerpoint/2010/main" xmlns:p15="http://schemas.microsoft.com/office/powerpoint/2012/main" xmlns:ahyp="http://schemas.microsoft.com/office/drawing/2018/hyperlinkcolor">
+  <p:cSld>
+    <p:spTree>
+      <p:nvGrpSpPr>
+        <p:cNvPr id="264" name="Shape 264"/>
+        <p:cNvGrpSpPr/>
+        <p:nvPr/>
+      </p:nvGrpSpPr>
+      <p:grpSpPr>
+        <a:xfrm>
+          <a:off x="0" y="0"/>
+          <a:ext cx="0" cy="0"/>
+          <a:chOff x="0" y="0"/>
+          <a:chExt cx="0" cy="0"/>
+        </a:xfrm>
+      </p:grpSpPr>
+      <p:sp>
+        <p:nvSpPr>
+          <p:cNvPr id="265" name="Google Shape;265;p45"/>
+          <p:cNvSpPr txBox="1"/>
+          <p:nvPr>
+            <p:ph type="title"/>
+          </p:nvPr>
+        </p:nvSpPr>
+        <p:spPr>
+          <a:xfrm>
+            <a:off x="311700" y="445025"/>
+            <a:ext cx="8520600" cy="572700"/>
+          </a:xfrm>
+          <a:prstGeom prst="rect">
+            <a:avLst/>
+          </a:prstGeom>
+        </p:spPr>
+        <p:txBody>
+          <a:bodyPr anchorCtr="0" anchor="t" bIns="91425" lIns="91425" spcFirstLastPara="1" rIns="91425" wrap="square" tIns="91425">
+            <a:normAutofit fontScale="90000"/>
+          </a:bodyPr>
+          <a:lstStyle/>
+          <a:p>
+            <a:pPr indent="0" lvl="0" marL="0" rtl="0" algn="l">
+              <a:spcBef>
+                <a:spcPts val="0"/>
+              </a:spcBef>
+              <a:spcAft>
+                <a:spcPts val="0"/>
+              </a:spcAft>
+              <a:buNone/>
+            </a:pPr>
+            <a:r>
+              <a:rPr lang="en"/>
+              <a:t>Frequency Distributions</a:t>
+            </a:r>
+            <a:endParaRPr/>
+          </a:p>
+        </p:txBody>
+      </p:sp>
+      <p:sp>
+        <p:nvSpPr>
+          <p:cNvPr id="266" name="Google Shape;266;p45"/>
           <p:cNvSpPr txBox="1"/>
           <p:nvPr>
             <p:ph idx="1" type="body"/>
@@ -23986,7 +24852,7 @@
       </p:sp>
       <p:graphicFrame>
         <p:nvGraphicFramePr>
-          <p:cNvPr id="260" name="Google Shape;260;p44"/>
+          <p:cNvPr id="267" name="Google Shape;267;p45"/>
           <p:cNvGraphicFramePr/>
           <p:nvPr/>
         </p:nvGraphicFramePr>
@@ -23999,7 +24865,7 @@
             <a:tbl>
               <a:tblPr>
                 <a:noFill/>
-                <a:tableStyleId>{EED47769-FA5E-423C-9B21-314CA9FAAA3A}</a:tableStyleId>
+                <a:tableStyleId>{A49DC9EB-9361-4B51-8153-D682CE428B52}</a:tableStyleId>
               </a:tblPr>
               <a:tblGrid>
                 <a:gridCol w="1809750"/>
@@ -24587,127 +25453,6 @@
 </p:sld>
 </file>
 
-<file path=ppt/slides/slide33.xml><?xml version="1.0" encoding="utf-8"?>
-<p:sld xmlns:a="http://schemas.openxmlformats.org/drawingml/2006/main" xmlns:r="http://schemas.openxmlformats.org/officeDocument/2006/relationships" xmlns:mc="http://schemas.openxmlformats.org/markup-compatibility/2006" xmlns:mv="urn:schemas-microsoft-com:mac:vml" xmlns:p="http://schemas.openxmlformats.org/presentationml/2006/main" xmlns:c="http://schemas.openxmlformats.org/drawingml/2006/chart" xmlns:dgm="http://schemas.openxmlformats.org/drawingml/2006/diagram" xmlns:o="urn:schemas-microsoft-com:office:office" xmlns:v="urn:schemas-microsoft-com:vml" xmlns:pvml="urn:schemas-microsoft-com:office:powerpoint" xmlns:com="http://schemas.openxmlformats.org/drawingml/2006/compatibility" xmlns:p14="http://schemas.microsoft.com/office/powerpoint/2010/main" xmlns:p15="http://schemas.microsoft.com/office/powerpoint/2012/main" xmlns:ahyp="http://schemas.microsoft.com/office/drawing/2018/hyperlinkcolor">
-  <p:cSld>
-    <p:spTree>
-      <p:nvGrpSpPr>
-        <p:cNvPr id="264" name="Shape 264"/>
-        <p:cNvGrpSpPr/>
-        <p:nvPr/>
-      </p:nvGrpSpPr>
-      <p:grpSpPr>
-        <a:xfrm>
-          <a:off x="0" y="0"/>
-          <a:ext cx="0" cy="0"/>
-          <a:chOff x="0" y="0"/>
-          <a:chExt cx="0" cy="0"/>
-        </a:xfrm>
-      </p:grpSpPr>
-      <p:sp>
-        <p:nvSpPr>
-          <p:cNvPr id="265" name="Google Shape;265;p45"/>
-          <p:cNvSpPr txBox="1"/>
-          <p:nvPr>
-            <p:ph type="title"/>
-          </p:nvPr>
-        </p:nvSpPr>
-        <p:spPr>
-          <a:xfrm>
-            <a:off x="311700" y="445025"/>
-            <a:ext cx="8520600" cy="572700"/>
-          </a:xfrm>
-          <a:prstGeom prst="rect">
-            <a:avLst/>
-          </a:prstGeom>
-        </p:spPr>
-        <p:txBody>
-          <a:bodyPr anchorCtr="0" anchor="t" bIns="91425" lIns="91425" spcFirstLastPara="1" rIns="91425" wrap="square" tIns="91425">
-            <a:normAutofit fontScale="90000"/>
-          </a:bodyPr>
-          <a:lstStyle/>
-          <a:p>
-            <a:pPr indent="0" lvl="0" marL="0" rtl="0" algn="l">
-              <a:spcBef>
-                <a:spcPts val="0"/>
-              </a:spcBef>
-              <a:spcAft>
-                <a:spcPts val="0"/>
-              </a:spcAft>
-              <a:buNone/>
-            </a:pPr>
-            <a:r>
-              <a:rPr lang="en"/>
-              <a:t>Skewness</a:t>
-            </a:r>
-            <a:endParaRPr/>
-          </a:p>
-        </p:txBody>
-      </p:sp>
-      <p:pic>
-        <p:nvPicPr>
-          <p:cNvPr id="266" name="Google Shape;266;p45"/>
-          <p:cNvPicPr preferRelativeResize="0"/>
-          <p:nvPr/>
-        </p:nvPicPr>
-        <p:blipFill>
-          <a:blip r:embed="rId3">
-            <a:alphaModFix/>
-          </a:blip>
-          <a:stretch>
-            <a:fillRect/>
-          </a:stretch>
-        </p:blipFill>
-        <p:spPr>
-          <a:xfrm>
-            <a:off x="1698838" y="2571750"/>
-            <a:ext cx="5746325" cy="2171425"/>
-          </a:xfrm>
-          <a:prstGeom prst="rect">
-            <a:avLst/>
-          </a:prstGeom>
-          <a:noFill/>
-          <a:ln>
-            <a:noFill/>
-          </a:ln>
-        </p:spPr>
-      </p:pic>
-      <p:pic>
-        <p:nvPicPr>
-          <p:cNvPr id="267" name="Google Shape;267;p45"/>
-          <p:cNvPicPr preferRelativeResize="0"/>
-          <p:nvPr/>
-        </p:nvPicPr>
-        <p:blipFill>
-          <a:blip r:embed="rId4">
-            <a:alphaModFix/>
-          </a:blip>
-          <a:stretch>
-            <a:fillRect/>
-          </a:stretch>
-        </p:blipFill>
-        <p:spPr>
-          <a:xfrm>
-            <a:off x="4572000" y="498950"/>
-            <a:ext cx="2933700" cy="1009650"/>
-          </a:xfrm>
-          <a:prstGeom prst="rect">
-            <a:avLst/>
-          </a:prstGeom>
-          <a:noFill/>
-          <a:ln>
-            <a:noFill/>
-          </a:ln>
-        </p:spPr>
-      </p:pic>
-    </p:spTree>
-  </p:cSld>
-  <p:clrMapOvr>
-    <a:masterClrMapping/>
-  </p:clrMapOvr>
-</p:sld>
-</file>
-
 <file path=ppt/slides/slide34.xml><?xml version="1.0" encoding="utf-8"?>
 <p:sld xmlns:a="http://schemas.openxmlformats.org/drawingml/2006/main" xmlns:r="http://schemas.openxmlformats.org/officeDocument/2006/relationships" xmlns:mc="http://schemas.openxmlformats.org/markup-compatibility/2006" xmlns:mv="urn:schemas-microsoft-com:mac:vml" xmlns:p="http://schemas.openxmlformats.org/presentationml/2006/main" xmlns:c="http://schemas.openxmlformats.org/drawingml/2006/chart" xmlns:dgm="http://schemas.openxmlformats.org/drawingml/2006/diagram" xmlns:o="urn:schemas-microsoft-com:office:office" xmlns:v="urn:schemas-microsoft-com:vml" xmlns:pvml="urn:schemas-microsoft-com:office:powerpoint" xmlns:com="http://schemas.openxmlformats.org/drawingml/2006/compatibility" xmlns:p14="http://schemas.microsoft.com/office/powerpoint/2010/main" xmlns:p15="http://schemas.microsoft.com/office/powerpoint/2012/main" xmlns:ahyp="http://schemas.microsoft.com/office/drawing/2018/hyperlinkcolor">
   <p:cSld>
@@ -24758,6 +25503,425 @@
               <a:buNone/>
             </a:pPr>
             <a:r>
+              <a:rPr lang="en"/>
+              <a:t>Skewness</a:t>
+            </a:r>
+            <a:endParaRPr/>
+          </a:p>
+        </p:txBody>
+      </p:sp>
+      <p:pic>
+        <p:nvPicPr>
+          <p:cNvPr id="273" name="Google Shape;273;p46"/>
+          <p:cNvPicPr preferRelativeResize="0"/>
+          <p:nvPr/>
+        </p:nvPicPr>
+        <p:blipFill>
+          <a:blip r:embed="rId3">
+            <a:alphaModFix/>
+          </a:blip>
+          <a:stretch>
+            <a:fillRect/>
+          </a:stretch>
+        </p:blipFill>
+        <p:spPr>
+          <a:xfrm>
+            <a:off x="4208328" y="2298975"/>
+            <a:ext cx="4357100" cy="1646475"/>
+          </a:xfrm>
+          <a:prstGeom prst="rect">
+            <a:avLst/>
+          </a:prstGeom>
+          <a:noFill/>
+          <a:ln>
+            <a:noFill/>
+          </a:ln>
+        </p:spPr>
+      </p:pic>
+      <p:pic>
+        <p:nvPicPr>
+          <p:cNvPr id="274" name="Google Shape;274;p46"/>
+          <p:cNvPicPr preferRelativeResize="0"/>
+          <p:nvPr/>
+        </p:nvPicPr>
+        <p:blipFill>
+          <a:blip r:embed="rId4">
+            <a:alphaModFix/>
+          </a:blip>
+          <a:stretch>
+            <a:fillRect/>
+          </a:stretch>
+        </p:blipFill>
+        <p:spPr>
+          <a:xfrm>
+            <a:off x="4572000" y="498950"/>
+            <a:ext cx="2933700" cy="1009650"/>
+          </a:xfrm>
+          <a:prstGeom prst="rect">
+            <a:avLst/>
+          </a:prstGeom>
+          <a:noFill/>
+          <a:ln>
+            <a:noFill/>
+          </a:ln>
+        </p:spPr>
+      </p:pic>
+      <p:sp>
+        <p:nvSpPr>
+          <p:cNvPr id="275" name="Google Shape;275;p46"/>
+          <p:cNvSpPr txBox="1"/>
+          <p:nvPr/>
+        </p:nvSpPr>
+        <p:spPr>
+          <a:xfrm>
+            <a:off x="311700" y="1157275"/>
+            <a:ext cx="3643200" cy="3399900"/>
+          </a:xfrm>
+          <a:prstGeom prst="rect">
+            <a:avLst/>
+          </a:prstGeom>
+          <a:noFill/>
+          <a:ln>
+            <a:noFill/>
+          </a:ln>
+        </p:spPr>
+        <p:txBody>
+          <a:bodyPr anchorCtr="0" anchor="t" bIns="91425" lIns="91425" spcFirstLastPara="1" rIns="91425" wrap="square" tIns="91425">
+            <a:noAutofit/>
+          </a:bodyPr>
+          <a:lstStyle/>
+          <a:p>
+            <a:pPr indent="0" lvl="0" marL="0" rtl="0" algn="l">
+              <a:spcBef>
+                <a:spcPts val="0"/>
+              </a:spcBef>
+              <a:spcAft>
+                <a:spcPts val="0"/>
+              </a:spcAft>
+              <a:buNone/>
+            </a:pPr>
+            <a:r>
+              <a:rPr lang="en" sz="1800">
+                <a:solidFill>
+                  <a:schemeClr val="dk2"/>
+                </a:solidFill>
+                <a:latin typeface="Proxima Nova"/>
+                <a:ea typeface="Proxima Nova"/>
+                <a:cs typeface="Proxima Nova"/>
+                <a:sym typeface="Proxima Nova"/>
+              </a:rPr>
+              <a:t>Skewness is a measure of asymmetry</a:t>
+            </a:r>
+            <a:endParaRPr sz="1800">
+              <a:solidFill>
+                <a:schemeClr val="dk2"/>
+              </a:solidFill>
+              <a:latin typeface="Proxima Nova"/>
+              <a:ea typeface="Proxima Nova"/>
+              <a:cs typeface="Proxima Nova"/>
+              <a:sym typeface="Proxima Nova"/>
+            </a:endParaRPr>
+          </a:p>
+          <a:p>
+            <a:pPr indent="0" lvl="0" marL="0" rtl="0" algn="l">
+              <a:spcBef>
+                <a:spcPts val="0"/>
+              </a:spcBef>
+              <a:spcAft>
+                <a:spcPts val="0"/>
+              </a:spcAft>
+              <a:buNone/>
+            </a:pPr>
+            <a:r>
+              <a:t/>
+            </a:r>
+            <a:endParaRPr sz="1800">
+              <a:solidFill>
+                <a:schemeClr val="dk2"/>
+              </a:solidFill>
+              <a:latin typeface="Proxima Nova"/>
+              <a:ea typeface="Proxima Nova"/>
+              <a:cs typeface="Proxima Nova"/>
+              <a:sym typeface="Proxima Nova"/>
+            </a:endParaRPr>
+          </a:p>
+          <a:p>
+            <a:pPr indent="0" lvl="0" marL="0" rtl="0" algn="l">
+              <a:spcBef>
+                <a:spcPts val="0"/>
+              </a:spcBef>
+              <a:spcAft>
+                <a:spcPts val="0"/>
+              </a:spcAft>
+              <a:buNone/>
+            </a:pPr>
+            <a:r>
+              <a:rPr lang="en" sz="1800">
+                <a:solidFill>
+                  <a:schemeClr val="dk2"/>
+                </a:solidFill>
+                <a:latin typeface="Proxima Nova"/>
+                <a:ea typeface="Proxima Nova"/>
+                <a:cs typeface="Proxima Nova"/>
+                <a:sym typeface="Proxima Nova"/>
+              </a:rPr>
+              <a:t>Central tendency is best described by the median, not the mean, when data are skewed.</a:t>
+            </a:r>
+            <a:endParaRPr sz="1800">
+              <a:solidFill>
+                <a:schemeClr val="dk2"/>
+              </a:solidFill>
+              <a:latin typeface="Proxima Nova"/>
+              <a:ea typeface="Proxima Nova"/>
+              <a:cs typeface="Proxima Nova"/>
+              <a:sym typeface="Proxima Nova"/>
+            </a:endParaRPr>
+          </a:p>
+          <a:p>
+            <a:pPr indent="0" lvl="0" marL="0" rtl="0" algn="l">
+              <a:spcBef>
+                <a:spcPts val="0"/>
+              </a:spcBef>
+              <a:spcAft>
+                <a:spcPts val="0"/>
+              </a:spcAft>
+              <a:buNone/>
+            </a:pPr>
+            <a:r>
+              <a:t/>
+            </a:r>
+            <a:endParaRPr sz="1800">
+              <a:solidFill>
+                <a:schemeClr val="dk2"/>
+              </a:solidFill>
+              <a:latin typeface="Proxima Nova"/>
+              <a:ea typeface="Proxima Nova"/>
+              <a:cs typeface="Proxima Nova"/>
+              <a:sym typeface="Proxima Nova"/>
+            </a:endParaRPr>
+          </a:p>
+          <a:p>
+            <a:pPr indent="0" lvl="0" marL="0" rtl="0" algn="l">
+              <a:spcBef>
+                <a:spcPts val="0"/>
+              </a:spcBef>
+              <a:spcAft>
+                <a:spcPts val="0"/>
+              </a:spcAft>
+              <a:buNone/>
+            </a:pPr>
+            <a:r>
+              <a:rPr lang="en" sz="1800">
+                <a:solidFill>
+                  <a:schemeClr val="dk2"/>
+                </a:solidFill>
+                <a:latin typeface="Proxima Nova"/>
+                <a:ea typeface="Proxima Nova"/>
+                <a:cs typeface="Proxima Nova"/>
+                <a:sym typeface="Proxima Nova"/>
+              </a:rPr>
+              <a:t>Skewness informs us about which statistical tests are appropriate and what types of transformations might be needed.</a:t>
+            </a:r>
+            <a:endParaRPr sz="1800">
+              <a:solidFill>
+                <a:schemeClr val="dk2"/>
+              </a:solidFill>
+              <a:latin typeface="Proxima Nova"/>
+              <a:ea typeface="Proxima Nova"/>
+              <a:cs typeface="Proxima Nova"/>
+              <a:sym typeface="Proxima Nova"/>
+            </a:endParaRPr>
+          </a:p>
+          <a:p>
+            <a:pPr indent="0" lvl="0" marL="0" rtl="0" algn="l">
+              <a:spcBef>
+                <a:spcPts val="0"/>
+              </a:spcBef>
+              <a:spcAft>
+                <a:spcPts val="0"/>
+              </a:spcAft>
+              <a:buNone/>
+            </a:pPr>
+            <a:r>
+              <a:t/>
+            </a:r>
+            <a:endParaRPr sz="1800">
+              <a:solidFill>
+                <a:schemeClr val="dk2"/>
+              </a:solidFill>
+              <a:latin typeface="Proxima Nova"/>
+              <a:ea typeface="Proxima Nova"/>
+              <a:cs typeface="Proxima Nova"/>
+              <a:sym typeface="Proxima Nova"/>
+            </a:endParaRPr>
+          </a:p>
+          <a:p>
+            <a:pPr indent="0" lvl="0" marL="0" rtl="0" algn="l">
+              <a:spcBef>
+                <a:spcPts val="0"/>
+              </a:spcBef>
+              <a:spcAft>
+                <a:spcPts val="0"/>
+              </a:spcAft>
+              <a:buNone/>
+            </a:pPr>
+            <a:r>
+              <a:rPr lang="en" sz="1800">
+                <a:solidFill>
+                  <a:schemeClr val="dk2"/>
+                </a:solidFill>
+                <a:latin typeface="Proxima Nova"/>
+                <a:ea typeface="Proxima Nova"/>
+                <a:cs typeface="Proxima Nova"/>
+                <a:sym typeface="Proxima Nova"/>
+              </a:rPr>
+              <a:t>It also informs us about potential for outliers</a:t>
+            </a:r>
+            <a:endParaRPr sz="1800">
+              <a:solidFill>
+                <a:schemeClr val="dk2"/>
+              </a:solidFill>
+              <a:latin typeface="Proxima Nova"/>
+              <a:ea typeface="Proxima Nova"/>
+              <a:cs typeface="Proxima Nova"/>
+              <a:sym typeface="Proxima Nova"/>
+            </a:endParaRPr>
+          </a:p>
+        </p:txBody>
+      </p:sp>
+    </p:spTree>
+  </p:cSld>
+  <p:clrMapOvr>
+    <a:masterClrMapping/>
+  </p:clrMapOvr>
+  <p:timing>
+    <p:tnLst>
+      <p:par>
+        <p:cTn dur="indefinite" nodeType="tmRoot" restart="never">
+          <p:childTnLst>
+            <p:seq concurrent="1" nextAc="seek">
+              <p:cTn dur="indefinite" id="2" nodeType="mainSeq">
+                <p:childTnLst>
+                  <p:par>
+                    <p:cTn fill="hold">
+                      <p:stCondLst>
+                        <p:cond delay="indefinite"/>
+                      </p:stCondLst>
+                      <p:childTnLst>
+                        <p:par>
+                          <p:cTn fill="hold">
+                            <p:stCondLst>
+                              <p:cond delay="0"/>
+                            </p:stCondLst>
+                            <p:childTnLst>
+                              <p:par>
+                                <p:cTn fill="hold" nodeType="clickEffect" presetClass="entr" presetID="1" presetSubtype="0">
+                                  <p:stCondLst>
+                                    <p:cond delay="0"/>
+                                  </p:stCondLst>
+                                  <p:childTnLst>
+                                    <p:set>
+                                      <p:cBhvr>
+                                        <p:cTn dur="1" fill="hold">
+                                          <p:stCondLst>
+                                            <p:cond delay="0"/>
+                                          </p:stCondLst>
+                                        </p:cTn>
+                                        <p:tgtEl>
+                                          <p:spTgt spid="275"/>
+                                        </p:tgtEl>
+                                        <p:attrNameLst>
+                                          <p:attrName>style.visibility</p:attrName>
+                                        </p:attrNameLst>
+                                      </p:cBhvr>
+                                      <p:to>
+                                        <p:strVal val="visible"/>
+                                      </p:to>
+                                    </p:set>
+                                  </p:childTnLst>
+                                </p:cTn>
+                              </p:par>
+                            </p:childTnLst>
+                          </p:cTn>
+                        </p:par>
+                      </p:childTnLst>
+                    </p:cTn>
+                  </p:par>
+                </p:childTnLst>
+              </p:cTn>
+              <p:prevCondLst>
+                <p:cond evt="onPrev">
+                  <p:tgtEl>
+                    <p:sldTgt/>
+                  </p:tgtEl>
+                </p:cond>
+              </p:prevCondLst>
+              <p:nextCondLst>
+                <p:cond evt="onNext">
+                  <p:tgtEl>
+                    <p:sldTgt/>
+                  </p:tgtEl>
+                </p:cond>
+              </p:nextCondLst>
+            </p:seq>
+          </p:childTnLst>
+        </p:cTn>
+      </p:par>
+    </p:tnLst>
+  </p:timing>
+</p:sld>
+</file>
+
+<file path=ppt/slides/slide35.xml><?xml version="1.0" encoding="utf-8"?>
+<p:sld xmlns:a="http://schemas.openxmlformats.org/drawingml/2006/main" xmlns:r="http://schemas.openxmlformats.org/officeDocument/2006/relationships" xmlns:mc="http://schemas.openxmlformats.org/markup-compatibility/2006" xmlns:mv="urn:schemas-microsoft-com:mac:vml" xmlns:p="http://schemas.openxmlformats.org/presentationml/2006/main" xmlns:c="http://schemas.openxmlformats.org/drawingml/2006/chart" xmlns:dgm="http://schemas.openxmlformats.org/drawingml/2006/diagram" xmlns:o="urn:schemas-microsoft-com:office:office" xmlns:v="urn:schemas-microsoft-com:vml" xmlns:pvml="urn:schemas-microsoft-com:office:powerpoint" xmlns:com="http://schemas.openxmlformats.org/drawingml/2006/compatibility" xmlns:p14="http://schemas.microsoft.com/office/powerpoint/2010/main" xmlns:p15="http://schemas.microsoft.com/office/powerpoint/2012/main" xmlns:ahyp="http://schemas.microsoft.com/office/drawing/2018/hyperlinkcolor">
+  <p:cSld>
+    <p:spTree>
+      <p:nvGrpSpPr>
+        <p:cNvPr id="279" name="Shape 279"/>
+        <p:cNvGrpSpPr/>
+        <p:nvPr/>
+      </p:nvGrpSpPr>
+      <p:grpSpPr>
+        <a:xfrm>
+          <a:off x="0" y="0"/>
+          <a:ext cx="0" cy="0"/>
+          <a:chOff x="0" y="0"/>
+          <a:chExt cx="0" cy="0"/>
+        </a:xfrm>
+      </p:grpSpPr>
+      <p:sp>
+        <p:nvSpPr>
+          <p:cNvPr id="280" name="Google Shape;280;p47"/>
+          <p:cNvSpPr txBox="1"/>
+          <p:nvPr>
+            <p:ph type="title"/>
+          </p:nvPr>
+        </p:nvSpPr>
+        <p:spPr>
+          <a:xfrm>
+            <a:off x="311700" y="445025"/>
+            <a:ext cx="8520600" cy="572700"/>
+          </a:xfrm>
+          <a:prstGeom prst="rect">
+            <a:avLst/>
+          </a:prstGeom>
+        </p:spPr>
+        <p:txBody>
+          <a:bodyPr anchorCtr="0" anchor="t" bIns="91425" lIns="91425" spcFirstLastPara="1" rIns="91425" wrap="square" tIns="91425">
+            <a:normAutofit fontScale="90000"/>
+          </a:bodyPr>
+          <a:lstStyle/>
+          <a:p>
+            <a:pPr indent="0" lvl="0" marL="0" rtl="0" algn="l">
+              <a:spcBef>
+                <a:spcPts val="0"/>
+              </a:spcBef>
+              <a:spcAft>
+                <a:spcPts val="0"/>
+              </a:spcAft>
+              <a:buNone/>
+            </a:pPr>
+            <a:r>
               <a:t/>
             </a:r>
             <a:endParaRPr/>
@@ -24766,7 +25930,7 @@
       </p:sp>
       <p:sp>
         <p:nvSpPr>
-          <p:cNvPr id="273" name="Google Shape;273;p46"/>
+          <p:cNvPr id="281" name="Google Shape;281;p47"/>
           <p:cNvSpPr txBox="1"/>
           <p:nvPr>
             <p:ph idx="1" type="body"/>
@@ -24805,7 +25969,7 @@
       </p:sp>
       <p:pic>
         <p:nvPicPr>
-          <p:cNvPr id="274" name="Google Shape;274;p46"/>
+          <p:cNvPr id="282" name="Google Shape;282;p47"/>
           <p:cNvPicPr preferRelativeResize="0"/>
           <p:nvPr/>
         </p:nvPicPr>
@@ -24839,12 +26003,12 @@
 </p:sld>
 </file>
 
-<file path=ppt/slides/slide35.xml><?xml version="1.0" encoding="utf-8"?>
+<file path=ppt/slides/slide36.xml><?xml version="1.0" encoding="utf-8"?>
 <p:sld xmlns:a="http://schemas.openxmlformats.org/drawingml/2006/main" xmlns:r="http://schemas.openxmlformats.org/officeDocument/2006/relationships" xmlns:mc="http://schemas.openxmlformats.org/markup-compatibility/2006" xmlns:mv="urn:schemas-microsoft-com:mac:vml" xmlns:p="http://schemas.openxmlformats.org/presentationml/2006/main" xmlns:c="http://schemas.openxmlformats.org/drawingml/2006/chart" xmlns:dgm="http://schemas.openxmlformats.org/drawingml/2006/diagram" xmlns:o="urn:schemas-microsoft-com:office:office" xmlns:v="urn:schemas-microsoft-com:vml" xmlns:pvml="urn:schemas-microsoft-com:office:powerpoint" xmlns:com="http://schemas.openxmlformats.org/drawingml/2006/compatibility" xmlns:p14="http://schemas.microsoft.com/office/powerpoint/2010/main" xmlns:p15="http://schemas.microsoft.com/office/powerpoint/2012/main" xmlns:ahyp="http://schemas.microsoft.com/office/drawing/2018/hyperlinkcolor">
   <p:cSld>
     <p:spTree>
       <p:nvGrpSpPr>
-        <p:cNvPr id="278" name="Shape 278"/>
+        <p:cNvPr id="286" name="Shape 286"/>
         <p:cNvGrpSpPr/>
         <p:nvPr/>
       </p:nvGrpSpPr>
@@ -24858,7 +26022,7 @@
       </p:grpSpPr>
       <p:sp>
         <p:nvSpPr>
-          <p:cNvPr id="279" name="Google Shape;279;p47"/>
+          <p:cNvPr id="287" name="Google Shape;287;p48"/>
           <p:cNvSpPr txBox="1"/>
           <p:nvPr>
             <p:ph type="title"/>
@@ -24890,6 +26054,110 @@
             </a:pPr>
             <a:r>
               <a:rPr lang="en"/>
+              <a:t>Skewness</a:t>
+            </a:r>
+            <a:endParaRPr/>
+          </a:p>
+        </p:txBody>
+      </p:sp>
+      <p:sp>
+        <p:nvSpPr>
+          <p:cNvPr id="288" name="Google Shape;288;p48"/>
+          <p:cNvSpPr txBox="1"/>
+          <p:nvPr>
+            <p:ph idx="1" type="body"/>
+          </p:nvPr>
+        </p:nvSpPr>
+        <p:spPr>
+          <a:xfrm>
+            <a:off x="311700" y="1152475"/>
+            <a:ext cx="8520600" cy="3416400"/>
+          </a:xfrm>
+          <a:prstGeom prst="rect">
+            <a:avLst/>
+          </a:prstGeom>
+        </p:spPr>
+        <p:txBody>
+          <a:bodyPr anchorCtr="0" anchor="t" bIns="91425" lIns="91425" spcFirstLastPara="1" rIns="91425" wrap="square" tIns="91425">
+            <a:normAutofit/>
+          </a:bodyPr>
+          <a:lstStyle/>
+          <a:p>
+            <a:pPr indent="0" lvl="0" marL="0" rtl="0" algn="l">
+              <a:spcBef>
+                <a:spcPts val="0"/>
+              </a:spcBef>
+              <a:spcAft>
+                <a:spcPts val="1200"/>
+              </a:spcAft>
+              <a:buNone/>
+            </a:pPr>
+            <a:r>
+              <a:t/>
+            </a:r>
+            <a:endParaRPr/>
+          </a:p>
+        </p:txBody>
+      </p:sp>
+    </p:spTree>
+  </p:cSld>
+  <p:clrMapOvr>
+    <a:masterClrMapping/>
+  </p:clrMapOvr>
+</p:sld>
+</file>
+
+<file path=ppt/slides/slide37.xml><?xml version="1.0" encoding="utf-8"?>
+<p:sld xmlns:a="http://schemas.openxmlformats.org/drawingml/2006/main" xmlns:r="http://schemas.openxmlformats.org/officeDocument/2006/relationships" xmlns:mc="http://schemas.openxmlformats.org/markup-compatibility/2006" xmlns:mv="urn:schemas-microsoft-com:mac:vml" xmlns:p="http://schemas.openxmlformats.org/presentationml/2006/main" xmlns:c="http://schemas.openxmlformats.org/drawingml/2006/chart" xmlns:dgm="http://schemas.openxmlformats.org/drawingml/2006/diagram" xmlns:o="urn:schemas-microsoft-com:office:office" xmlns:v="urn:schemas-microsoft-com:vml" xmlns:pvml="urn:schemas-microsoft-com:office:powerpoint" xmlns:com="http://schemas.openxmlformats.org/drawingml/2006/compatibility" xmlns:p14="http://schemas.microsoft.com/office/powerpoint/2010/main" xmlns:p15="http://schemas.microsoft.com/office/powerpoint/2012/main" xmlns:ahyp="http://schemas.microsoft.com/office/drawing/2018/hyperlinkcolor">
+  <p:cSld>
+    <p:spTree>
+      <p:nvGrpSpPr>
+        <p:cNvPr id="292" name="Shape 292"/>
+        <p:cNvGrpSpPr/>
+        <p:nvPr/>
+      </p:nvGrpSpPr>
+      <p:grpSpPr>
+        <a:xfrm>
+          <a:off x="0" y="0"/>
+          <a:ext cx="0" cy="0"/>
+          <a:chOff x="0" y="0"/>
+          <a:chExt cx="0" cy="0"/>
+        </a:xfrm>
+      </p:grpSpPr>
+      <p:sp>
+        <p:nvSpPr>
+          <p:cNvPr id="293" name="Google Shape;293;p49"/>
+          <p:cNvSpPr txBox="1"/>
+          <p:nvPr>
+            <p:ph type="title"/>
+          </p:nvPr>
+        </p:nvSpPr>
+        <p:spPr>
+          <a:xfrm>
+            <a:off x="311700" y="445025"/>
+            <a:ext cx="8520600" cy="572700"/>
+          </a:xfrm>
+          <a:prstGeom prst="rect">
+            <a:avLst/>
+          </a:prstGeom>
+        </p:spPr>
+        <p:txBody>
+          <a:bodyPr anchorCtr="0" anchor="t" bIns="91425" lIns="91425" spcFirstLastPara="1" rIns="91425" wrap="square" tIns="91425">
+            <a:normAutofit fontScale="90000"/>
+          </a:bodyPr>
+          <a:lstStyle/>
+          <a:p>
+            <a:pPr indent="0" lvl="0" marL="0" rtl="0" algn="l">
+              <a:spcBef>
+                <a:spcPts val="0"/>
+              </a:spcBef>
+              <a:spcAft>
+                <a:spcPts val="0"/>
+              </a:spcAft>
+              <a:buNone/>
+            </a:pPr>
+            <a:r>
+              <a:rPr lang="en"/>
               <a:t>Kurtosis</a:t>
             </a:r>
             <a:endParaRPr/>
@@ -24898,7 +26166,7 @@
       </p:sp>
       <p:pic>
         <p:nvPicPr>
-          <p:cNvPr id="280" name="Google Shape;280;p47"/>
+          <p:cNvPr id="294" name="Google Shape;294;p49"/>
           <p:cNvPicPr preferRelativeResize="0"/>
           <p:nvPr/>
         </p:nvPicPr>
@@ -24926,7 +26194,7 @@
       </p:pic>
       <p:pic>
         <p:nvPicPr>
-          <p:cNvPr id="281" name="Google Shape;281;p47"/>
+          <p:cNvPr id="295" name="Google Shape;295;p49"/>
           <p:cNvPicPr preferRelativeResize="0"/>
           <p:nvPr/>
         </p:nvPicPr>
@@ -24954,7 +26222,7 @@
       </p:pic>
       <p:sp>
         <p:nvSpPr>
-          <p:cNvPr id="282" name="Google Shape;282;p47"/>
+          <p:cNvPr id="296" name="Google Shape;296;p49"/>
           <p:cNvSpPr txBox="1"/>
           <p:nvPr/>
         </p:nvSpPr>
@@ -25113,7 +26381,7 @@
       </p:sp>
       <p:graphicFrame>
         <p:nvGraphicFramePr>
-          <p:cNvPr id="283" name="Google Shape;283;p47"/>
+          <p:cNvPr id="297" name="Google Shape;297;p49"/>
           <p:cNvGraphicFramePr/>
           <p:nvPr/>
         </p:nvGraphicFramePr>
@@ -25126,7 +26394,7 @@
             <a:tbl>
               <a:tblPr>
                 <a:noFill/>
-                <a:tableStyleId>{EED47769-FA5E-423C-9B21-314CA9FAAA3A}</a:tableStyleId>
+                <a:tableStyleId>{A49DC9EB-9361-4B51-8153-D682CE428B52}</a:tableStyleId>
               </a:tblPr>
               <a:tblGrid>
                 <a:gridCol w="1296700"/>
@@ -25522,12 +26790,12 @@
 </p:sld>
 </file>
 
-<file path=ppt/slides/slide36.xml><?xml version="1.0" encoding="utf-8"?>
+<file path=ppt/slides/slide38.xml><?xml version="1.0" encoding="utf-8"?>
 <p:sld xmlns:a="http://schemas.openxmlformats.org/drawingml/2006/main" xmlns:r="http://schemas.openxmlformats.org/officeDocument/2006/relationships" xmlns:mc="http://schemas.openxmlformats.org/markup-compatibility/2006" xmlns:mv="urn:schemas-microsoft-com:mac:vml" xmlns:p="http://schemas.openxmlformats.org/presentationml/2006/main" xmlns:c="http://schemas.openxmlformats.org/drawingml/2006/chart" xmlns:dgm="http://schemas.openxmlformats.org/drawingml/2006/diagram" xmlns:o="urn:schemas-microsoft-com:office:office" xmlns:v="urn:schemas-microsoft-com:vml" xmlns:pvml="urn:schemas-microsoft-com:office:powerpoint" xmlns:com="http://schemas.openxmlformats.org/drawingml/2006/compatibility" xmlns:p14="http://schemas.microsoft.com/office/powerpoint/2010/main" xmlns:p15="http://schemas.microsoft.com/office/powerpoint/2012/main" xmlns:ahyp="http://schemas.microsoft.com/office/drawing/2018/hyperlinkcolor">
   <p:cSld>
     <p:spTree>
       <p:nvGrpSpPr>
-        <p:cNvPr id="287" name="Shape 287"/>
+        <p:cNvPr id="301" name="Shape 301"/>
         <p:cNvGrpSpPr/>
         <p:nvPr/>
       </p:nvGrpSpPr>
@@ -25541,7 +26809,7 @@
       </p:grpSpPr>
       <p:pic>
         <p:nvPicPr>
-          <p:cNvPr id="288" name="Google Shape;288;p48"/>
+          <p:cNvPr id="302" name="Google Shape;302;p50"/>
           <p:cNvPicPr preferRelativeResize="0"/>
           <p:nvPr/>
         </p:nvPicPr>
@@ -25575,12 +26843,12 @@
 </p:sld>
 </file>
 
-<file path=ppt/slides/slide37.xml><?xml version="1.0" encoding="utf-8"?>
+<file path=ppt/slides/slide39.xml><?xml version="1.0" encoding="utf-8"?>
 <p:sld xmlns:a="http://schemas.openxmlformats.org/drawingml/2006/main" xmlns:r="http://schemas.openxmlformats.org/officeDocument/2006/relationships" xmlns:mc="http://schemas.openxmlformats.org/markup-compatibility/2006" xmlns:mv="urn:schemas-microsoft-com:mac:vml" xmlns:p="http://schemas.openxmlformats.org/presentationml/2006/main" xmlns:c="http://schemas.openxmlformats.org/drawingml/2006/chart" xmlns:dgm="http://schemas.openxmlformats.org/drawingml/2006/diagram" xmlns:o="urn:schemas-microsoft-com:office:office" xmlns:v="urn:schemas-microsoft-com:vml" xmlns:pvml="urn:schemas-microsoft-com:office:powerpoint" xmlns:com="http://schemas.openxmlformats.org/drawingml/2006/compatibility" xmlns:p14="http://schemas.microsoft.com/office/powerpoint/2010/main" xmlns:p15="http://schemas.microsoft.com/office/powerpoint/2012/main" xmlns:ahyp="http://schemas.microsoft.com/office/drawing/2018/hyperlinkcolor">
   <p:cSld>
     <p:spTree>
       <p:nvGrpSpPr>
-        <p:cNvPr id="292" name="Shape 292"/>
+        <p:cNvPr id="306" name="Shape 306"/>
         <p:cNvGrpSpPr/>
         <p:nvPr/>
       </p:nvGrpSpPr>
@@ -25594,7 +26862,7 @@
       </p:grpSpPr>
       <p:sp>
         <p:nvSpPr>
-          <p:cNvPr id="293" name="Google Shape;293;p49"/>
+          <p:cNvPr id="307" name="Google Shape;307;p51"/>
           <p:cNvSpPr txBox="1"/>
           <p:nvPr>
             <p:ph type="title"/>
@@ -25642,7 +26910,7 @@
       </p:sp>
       <p:sp>
         <p:nvSpPr>
-          <p:cNvPr id="294" name="Google Shape;294;p49"/>
+          <p:cNvPr id="308" name="Google Shape;308;p51"/>
           <p:cNvSpPr txBox="1"/>
           <p:nvPr>
             <p:ph idx="1" type="body"/>
@@ -25742,7 +27010,7 @@
             </a:pPr>
             <a:r>
               <a:rPr lang="en"/>
-              <a:t>Kurtosis &gt;3 suggests </a:t>
+              <a:t>Kurtosis &gt; 3 suggests </a:t>
             </a:r>
             <a:r>
               <a:rPr lang="en"/>
@@ -25762,7 +27030,7 @@
             </a:pPr>
             <a:r>
               <a:rPr lang="en"/>
-              <a:t>Kurtosis &lt;3 suggest lighter tails, a flatter peak, and less potential for outliers</a:t>
+              <a:t>Kurtosis &lt; 3 suggest lighter tails, a flatter peak, and less potential for outliers</a:t>
             </a:r>
             <a:endParaRPr/>
           </a:p>
@@ -25786,7 +27054,7 @@
       </p:sp>
       <p:pic>
         <p:nvPicPr>
-          <p:cNvPr id="295" name="Google Shape;295;p49"/>
+          <p:cNvPr id="309" name="Google Shape;309;p51"/>
           <p:cNvPicPr preferRelativeResize="0"/>
           <p:nvPr/>
         </p:nvPicPr>
@@ -25817,739 +27085,6 @@
   <p:clrMapOvr>
     <a:masterClrMapping/>
   </p:clrMapOvr>
-</p:sld>
-</file>
-
-<file path=ppt/slides/slide38.xml><?xml version="1.0" encoding="utf-8"?>
-<p:sld xmlns:a="http://schemas.openxmlformats.org/drawingml/2006/main" xmlns:r="http://schemas.openxmlformats.org/officeDocument/2006/relationships" xmlns:mc="http://schemas.openxmlformats.org/markup-compatibility/2006" xmlns:mv="urn:schemas-microsoft-com:mac:vml" xmlns:p="http://schemas.openxmlformats.org/presentationml/2006/main" xmlns:c="http://schemas.openxmlformats.org/drawingml/2006/chart" xmlns:dgm="http://schemas.openxmlformats.org/drawingml/2006/diagram" xmlns:o="urn:schemas-microsoft-com:office:office" xmlns:v="urn:schemas-microsoft-com:vml" xmlns:pvml="urn:schemas-microsoft-com:office:powerpoint" xmlns:com="http://schemas.openxmlformats.org/drawingml/2006/compatibility" xmlns:p14="http://schemas.microsoft.com/office/powerpoint/2010/main" xmlns:p15="http://schemas.microsoft.com/office/powerpoint/2012/main" xmlns:ahyp="http://schemas.microsoft.com/office/drawing/2018/hyperlinkcolor">
-  <p:cSld>
-    <p:spTree>
-      <p:nvGrpSpPr>
-        <p:cNvPr id="299" name="Shape 299"/>
-        <p:cNvGrpSpPr/>
-        <p:nvPr/>
-      </p:nvGrpSpPr>
-      <p:grpSpPr>
-        <a:xfrm>
-          <a:off x="0" y="0"/>
-          <a:ext cx="0" cy="0"/>
-          <a:chOff x="0" y="0"/>
-          <a:chExt cx="0" cy="0"/>
-        </a:xfrm>
-      </p:grpSpPr>
-      <p:sp>
-        <p:nvSpPr>
-          <p:cNvPr id="300" name="Google Shape;300;p50"/>
-          <p:cNvSpPr txBox="1"/>
-          <p:nvPr>
-            <p:ph type="title"/>
-          </p:nvPr>
-        </p:nvSpPr>
-        <p:spPr>
-          <a:xfrm>
-            <a:off x="311700" y="445025"/>
-            <a:ext cx="8520600" cy="572700"/>
-          </a:xfrm>
-          <a:prstGeom prst="rect">
-            <a:avLst/>
-          </a:prstGeom>
-        </p:spPr>
-        <p:txBody>
-          <a:bodyPr anchorCtr="0" anchor="t" bIns="91425" lIns="91425" spcFirstLastPara="1" rIns="91425" wrap="square" tIns="91425">
-            <a:normAutofit fontScale="90000"/>
-          </a:bodyPr>
-          <a:lstStyle/>
-          <a:p>
-            <a:pPr indent="0" lvl="0" marL="0" rtl="0" algn="l">
-              <a:spcBef>
-                <a:spcPts val="0"/>
-              </a:spcBef>
-              <a:spcAft>
-                <a:spcPts val="0"/>
-              </a:spcAft>
-              <a:buNone/>
-            </a:pPr>
-            <a:r>
-              <a:rPr lang="en"/>
-              <a:t>Measures Of Association</a:t>
-            </a:r>
-            <a:endParaRPr/>
-          </a:p>
-        </p:txBody>
-      </p:sp>
-      <p:sp>
-        <p:nvSpPr>
-          <p:cNvPr id="301" name="Google Shape;301;p50"/>
-          <p:cNvSpPr txBox="1"/>
-          <p:nvPr>
-            <p:ph idx="1" type="body"/>
-          </p:nvPr>
-        </p:nvSpPr>
-        <p:spPr>
-          <a:xfrm>
-            <a:off x="311700" y="1152475"/>
-            <a:ext cx="8520600" cy="3416400"/>
-          </a:xfrm>
-          <a:prstGeom prst="rect">
-            <a:avLst/>
-          </a:prstGeom>
-        </p:spPr>
-        <p:txBody>
-          <a:bodyPr anchorCtr="0" anchor="t" bIns="91425" lIns="91425" spcFirstLastPara="1" rIns="91425" wrap="square" tIns="91425">
-            <a:normAutofit/>
-          </a:bodyPr>
-          <a:lstStyle/>
-          <a:p>
-            <a:pPr indent="0" lvl="0" marL="0" rtl="0" algn="l">
-              <a:spcBef>
-                <a:spcPts val="0"/>
-              </a:spcBef>
-              <a:spcAft>
-                <a:spcPts val="0"/>
-              </a:spcAft>
-              <a:buNone/>
-            </a:pPr>
-            <a:r>
-              <a:rPr lang="en"/>
-              <a:t>Measures of Association tell us how two (or more) variables relate to one another.  We’ll cover:</a:t>
-            </a:r>
-            <a:endParaRPr/>
-          </a:p>
-          <a:p>
-            <a:pPr indent="-342900" lvl="0" marL="457200" rtl="0" algn="l">
-              <a:spcBef>
-                <a:spcPts val="1200"/>
-              </a:spcBef>
-              <a:spcAft>
-                <a:spcPts val="0"/>
-              </a:spcAft>
-              <a:buSzPts val="1800"/>
-              <a:buAutoNum type="arabicParenR"/>
-            </a:pPr>
-            <a:r>
-              <a:rPr lang="en"/>
-              <a:t>Covariance</a:t>
-            </a:r>
-            <a:endParaRPr/>
-          </a:p>
-          <a:p>
-            <a:pPr indent="-342900" lvl="0" marL="457200" rtl="0" algn="l">
-              <a:spcBef>
-                <a:spcPts val="0"/>
-              </a:spcBef>
-              <a:spcAft>
-                <a:spcPts val="0"/>
-              </a:spcAft>
-              <a:buSzPts val="1800"/>
-              <a:buAutoNum type="arabicParenR"/>
-            </a:pPr>
-            <a:r>
-              <a:rPr lang="en"/>
-              <a:t>Correlation</a:t>
-            </a:r>
-            <a:endParaRPr/>
-          </a:p>
-        </p:txBody>
-      </p:sp>
-    </p:spTree>
-  </p:cSld>
-  <p:clrMapOvr>
-    <a:masterClrMapping/>
-  </p:clrMapOvr>
-</p:sld>
-</file>
-
-<file path=ppt/slides/slide39.xml><?xml version="1.0" encoding="utf-8"?>
-<p:sld xmlns:a="http://schemas.openxmlformats.org/drawingml/2006/main" xmlns:r="http://schemas.openxmlformats.org/officeDocument/2006/relationships" xmlns:mc="http://schemas.openxmlformats.org/markup-compatibility/2006" xmlns:mv="urn:schemas-microsoft-com:mac:vml" xmlns:p="http://schemas.openxmlformats.org/presentationml/2006/main" xmlns:c="http://schemas.openxmlformats.org/drawingml/2006/chart" xmlns:dgm="http://schemas.openxmlformats.org/drawingml/2006/diagram" xmlns:o="urn:schemas-microsoft-com:office:office" xmlns:v="urn:schemas-microsoft-com:vml" xmlns:pvml="urn:schemas-microsoft-com:office:powerpoint" xmlns:com="http://schemas.openxmlformats.org/drawingml/2006/compatibility" xmlns:p14="http://schemas.microsoft.com/office/powerpoint/2010/main" xmlns:p15="http://schemas.microsoft.com/office/powerpoint/2012/main" xmlns:ahyp="http://schemas.microsoft.com/office/drawing/2018/hyperlinkcolor">
-  <p:cSld>
-    <p:spTree>
-      <p:nvGrpSpPr>
-        <p:cNvPr id="305" name="Shape 305"/>
-        <p:cNvGrpSpPr/>
-        <p:nvPr/>
-      </p:nvGrpSpPr>
-      <p:grpSpPr>
-        <a:xfrm>
-          <a:off x="0" y="0"/>
-          <a:ext cx="0" cy="0"/>
-          <a:chOff x="0" y="0"/>
-          <a:chExt cx="0" cy="0"/>
-        </a:xfrm>
-      </p:grpSpPr>
-      <p:sp>
-        <p:nvSpPr>
-          <p:cNvPr id="306" name="Google Shape;306;p51"/>
-          <p:cNvSpPr txBox="1"/>
-          <p:nvPr>
-            <p:ph type="title"/>
-          </p:nvPr>
-        </p:nvSpPr>
-        <p:spPr>
-          <a:xfrm>
-            <a:off x="311700" y="229375"/>
-            <a:ext cx="8520600" cy="572700"/>
-          </a:xfrm>
-          <a:prstGeom prst="rect">
-            <a:avLst/>
-          </a:prstGeom>
-        </p:spPr>
-        <p:txBody>
-          <a:bodyPr anchorCtr="0" anchor="t" bIns="91425" lIns="91425" spcFirstLastPara="1" rIns="91425" wrap="square" tIns="91425">
-            <a:normAutofit fontScale="90000"/>
-          </a:bodyPr>
-          <a:lstStyle/>
-          <a:p>
-            <a:pPr indent="0" lvl="0" marL="0" rtl="0" algn="l">
-              <a:spcBef>
-                <a:spcPts val="0"/>
-              </a:spcBef>
-              <a:spcAft>
-                <a:spcPts val="0"/>
-              </a:spcAft>
-              <a:buNone/>
-            </a:pPr>
-            <a:r>
-              <a:rPr lang="en"/>
-              <a:t>Measures of Association: </a:t>
-            </a:r>
-            <a:r>
-              <a:rPr lang="en"/>
-              <a:t>Covariance</a:t>
-            </a:r>
-            <a:endParaRPr/>
-          </a:p>
-        </p:txBody>
-      </p:sp>
-      <p:sp>
-        <p:nvSpPr>
-          <p:cNvPr id="307" name="Google Shape;307;p51"/>
-          <p:cNvSpPr txBox="1"/>
-          <p:nvPr>
-            <p:ph idx="1" type="body"/>
-          </p:nvPr>
-        </p:nvSpPr>
-        <p:spPr>
-          <a:xfrm>
-            <a:off x="311700" y="863550"/>
-            <a:ext cx="3397500" cy="3416400"/>
-          </a:xfrm>
-          <a:prstGeom prst="rect">
-            <a:avLst/>
-          </a:prstGeom>
-        </p:spPr>
-        <p:txBody>
-          <a:bodyPr anchorCtr="0" anchor="t" bIns="91425" lIns="91425" spcFirstLastPara="1" rIns="91425" wrap="square" tIns="91425">
-            <a:normAutofit lnSpcReduction="20000"/>
-          </a:bodyPr>
-          <a:lstStyle/>
-          <a:p>
-            <a:pPr indent="0" lvl="0" marL="0" rtl="0" algn="l">
-              <a:spcBef>
-                <a:spcPts val="0"/>
-              </a:spcBef>
-              <a:spcAft>
-                <a:spcPts val="0"/>
-              </a:spcAft>
-              <a:buNone/>
-            </a:pPr>
-            <a:r>
-              <a:rPr lang="en"/>
-              <a:t>Steps:</a:t>
-            </a:r>
-            <a:endParaRPr/>
-          </a:p>
-          <a:p>
-            <a:pPr indent="-342900" lvl="0" marL="457200" rtl="0" algn="l">
-              <a:spcBef>
-                <a:spcPts val="1200"/>
-              </a:spcBef>
-              <a:spcAft>
-                <a:spcPts val="0"/>
-              </a:spcAft>
-              <a:buSzPts val="1800"/>
-              <a:buAutoNum type="arabicParenR"/>
-            </a:pPr>
-            <a:r>
-              <a:rPr lang="en"/>
-              <a:t>Calculate means of x and y</a:t>
-            </a:r>
-            <a:endParaRPr/>
-          </a:p>
-          <a:p>
-            <a:pPr indent="-342900" lvl="0" marL="457200" rtl="0" algn="l">
-              <a:spcBef>
-                <a:spcPts val="0"/>
-              </a:spcBef>
-              <a:spcAft>
-                <a:spcPts val="0"/>
-              </a:spcAft>
-              <a:buSzPts val="1800"/>
-              <a:buAutoNum type="arabicParenR"/>
-            </a:pPr>
-            <a:r>
-              <a:rPr lang="en"/>
-              <a:t>Subtract the mean of each variable from each observation</a:t>
-            </a:r>
-            <a:endParaRPr/>
-          </a:p>
-          <a:p>
-            <a:pPr indent="-342900" lvl="0" marL="457200" rtl="0" algn="l">
-              <a:spcBef>
-                <a:spcPts val="0"/>
-              </a:spcBef>
-              <a:spcAft>
-                <a:spcPts val="0"/>
-              </a:spcAft>
-              <a:buSzPts val="1800"/>
-              <a:buAutoNum type="arabicParenR"/>
-            </a:pPr>
-            <a:r>
-              <a:rPr lang="en"/>
-              <a:t>Multiply each x-xbar by each y-ybar</a:t>
-            </a:r>
-            <a:endParaRPr/>
-          </a:p>
-          <a:p>
-            <a:pPr indent="-342900" lvl="0" marL="457200" rtl="0" algn="l">
-              <a:spcBef>
-                <a:spcPts val="0"/>
-              </a:spcBef>
-              <a:spcAft>
-                <a:spcPts val="0"/>
-              </a:spcAft>
-              <a:buSzPts val="1800"/>
-              <a:buAutoNum type="arabicParenR"/>
-            </a:pPr>
-            <a:r>
-              <a:rPr lang="en"/>
-              <a:t>Sum the products </a:t>
-            </a:r>
-            <a:endParaRPr/>
-          </a:p>
-          <a:p>
-            <a:pPr indent="-342900" lvl="0" marL="457200" rtl="0" algn="l">
-              <a:spcBef>
-                <a:spcPts val="0"/>
-              </a:spcBef>
-              <a:spcAft>
-                <a:spcPts val="0"/>
-              </a:spcAft>
-              <a:buSzPts val="1800"/>
-              <a:buAutoNum type="arabicParenR"/>
-            </a:pPr>
-            <a:r>
-              <a:rPr lang="en"/>
-              <a:t>Divide by the </a:t>
-            </a:r>
-            <a:r>
-              <a:rPr b="1" lang="en"/>
-              <a:t>number of observations</a:t>
-            </a:r>
-            <a:r>
-              <a:rPr lang="en"/>
-              <a:t> </a:t>
-            </a:r>
-            <a:r>
-              <a:rPr b="1" lang="en"/>
-              <a:t>if population</a:t>
-            </a:r>
-            <a:r>
-              <a:rPr lang="en"/>
-              <a:t>, or </a:t>
-            </a:r>
-            <a:r>
-              <a:rPr b="1" lang="en"/>
-              <a:t>n-1 if a sample</a:t>
-            </a:r>
-            <a:endParaRPr b="1"/>
-          </a:p>
-        </p:txBody>
-      </p:sp>
-      <p:pic>
-        <p:nvPicPr>
-          <p:cNvPr id="308" name="Google Shape;308;p51"/>
-          <p:cNvPicPr preferRelativeResize="0"/>
-          <p:nvPr/>
-        </p:nvPicPr>
-        <p:blipFill>
-          <a:blip r:embed="rId3">
-            <a:alphaModFix/>
-          </a:blip>
-          <a:stretch>
-            <a:fillRect/>
-          </a:stretch>
-        </p:blipFill>
-        <p:spPr>
-          <a:xfrm>
-            <a:off x="4739757" y="1926575"/>
-            <a:ext cx="4041743" cy="1442100"/>
-          </a:xfrm>
-          <a:prstGeom prst="rect">
-            <a:avLst/>
-          </a:prstGeom>
-          <a:noFill/>
-          <a:ln>
-            <a:noFill/>
-          </a:ln>
-        </p:spPr>
-      </p:pic>
-      <p:pic>
-        <p:nvPicPr>
-          <p:cNvPr id="309" name="Google Shape;309;p51"/>
-          <p:cNvPicPr preferRelativeResize="0"/>
-          <p:nvPr/>
-        </p:nvPicPr>
-        <p:blipFill>
-          <a:blip r:embed="rId4">
-            <a:alphaModFix/>
-          </a:blip>
-          <a:stretch>
-            <a:fillRect/>
-          </a:stretch>
-        </p:blipFill>
-        <p:spPr>
-          <a:xfrm>
-            <a:off x="4758925" y="649904"/>
-            <a:ext cx="3578100" cy="1276675"/>
-          </a:xfrm>
-          <a:prstGeom prst="rect">
-            <a:avLst/>
-          </a:prstGeom>
-          <a:noFill/>
-          <a:ln>
-            <a:noFill/>
-          </a:ln>
-        </p:spPr>
-      </p:pic>
-    </p:spTree>
-  </p:cSld>
-  <p:clrMapOvr>
-    <a:masterClrMapping/>
-  </p:clrMapOvr>
-  <p:timing>
-    <p:tnLst>
-      <p:par>
-        <p:cTn dur="indefinite" nodeType="tmRoot" restart="never">
-          <p:childTnLst>
-            <p:seq concurrent="1" nextAc="seek">
-              <p:cTn dur="indefinite" id="2" nodeType="mainSeq">
-                <p:childTnLst>
-                  <p:par>
-                    <p:cTn fill="hold">
-                      <p:stCondLst>
-                        <p:cond delay="indefinite"/>
-                      </p:stCondLst>
-                      <p:childTnLst>
-                        <p:par>
-                          <p:cTn fill="hold">
-                            <p:stCondLst>
-                              <p:cond delay="0"/>
-                            </p:stCondLst>
-                            <p:childTnLst>
-                              <p:par>
-                                <p:cTn fill="hold" nodeType="clickEffect" presetClass="entr" presetID="1" presetSubtype="0">
-                                  <p:stCondLst>
-                                    <p:cond delay="0"/>
-                                  </p:stCondLst>
-                                  <p:childTnLst>
-                                    <p:set>
-                                      <p:cBhvr>
-                                        <p:cTn dur="1" fill="hold">
-                                          <p:stCondLst>
-                                            <p:cond delay="0"/>
-                                          </p:stCondLst>
-                                        </p:cTn>
-                                        <p:tgtEl>
-                                          <p:spTgt spid="307">
-                                            <p:txEl>
-                                              <p:pRg end="0" st="0"/>
-                                            </p:txEl>
-                                          </p:spTgt>
-                                        </p:tgtEl>
-                                        <p:attrNameLst>
-                                          <p:attrName>style.visibility</p:attrName>
-                                        </p:attrNameLst>
-                                      </p:cBhvr>
-                                      <p:to>
-                                        <p:strVal val="visible"/>
-                                      </p:to>
-                                    </p:set>
-                                  </p:childTnLst>
-                                </p:cTn>
-                              </p:par>
-                            </p:childTnLst>
-                          </p:cTn>
-                        </p:par>
-                      </p:childTnLst>
-                    </p:cTn>
-                  </p:par>
-                  <p:par>
-                    <p:cTn fill="hold">
-                      <p:stCondLst>
-                        <p:cond delay="indefinite"/>
-                      </p:stCondLst>
-                      <p:childTnLst>
-                        <p:par>
-                          <p:cTn fill="hold">
-                            <p:stCondLst>
-                              <p:cond delay="0"/>
-                            </p:stCondLst>
-                            <p:childTnLst>
-                              <p:par>
-                                <p:cTn fill="hold" nodeType="clickEffect" presetClass="entr" presetID="1" presetSubtype="0">
-                                  <p:stCondLst>
-                                    <p:cond delay="0"/>
-                                  </p:stCondLst>
-                                  <p:childTnLst>
-                                    <p:set>
-                                      <p:cBhvr>
-                                        <p:cTn dur="1" fill="hold">
-                                          <p:stCondLst>
-                                            <p:cond delay="0"/>
-                                          </p:stCondLst>
-                                        </p:cTn>
-                                        <p:tgtEl>
-                                          <p:spTgt spid="307">
-                                            <p:txEl>
-                                              <p:pRg end="1" st="1"/>
-                                            </p:txEl>
-                                          </p:spTgt>
-                                        </p:tgtEl>
-                                        <p:attrNameLst>
-                                          <p:attrName>style.visibility</p:attrName>
-                                        </p:attrNameLst>
-                                      </p:cBhvr>
-                                      <p:to>
-                                        <p:strVal val="visible"/>
-                                      </p:to>
-                                    </p:set>
-                                  </p:childTnLst>
-                                </p:cTn>
-                              </p:par>
-                            </p:childTnLst>
-                          </p:cTn>
-                        </p:par>
-                      </p:childTnLst>
-                    </p:cTn>
-                  </p:par>
-                  <p:par>
-                    <p:cTn fill="hold">
-                      <p:stCondLst>
-                        <p:cond delay="indefinite"/>
-                      </p:stCondLst>
-                      <p:childTnLst>
-                        <p:par>
-                          <p:cTn fill="hold">
-                            <p:stCondLst>
-                              <p:cond delay="0"/>
-                            </p:stCondLst>
-                            <p:childTnLst>
-                              <p:par>
-                                <p:cTn fill="hold" nodeType="clickEffect" presetClass="entr" presetID="1" presetSubtype="0">
-                                  <p:stCondLst>
-                                    <p:cond delay="0"/>
-                                  </p:stCondLst>
-                                  <p:childTnLst>
-                                    <p:set>
-                                      <p:cBhvr>
-                                        <p:cTn dur="1" fill="hold">
-                                          <p:stCondLst>
-                                            <p:cond delay="0"/>
-                                          </p:stCondLst>
-                                        </p:cTn>
-                                        <p:tgtEl>
-                                          <p:spTgt spid="307">
-                                            <p:txEl>
-                                              <p:pRg end="2" st="2"/>
-                                            </p:txEl>
-                                          </p:spTgt>
-                                        </p:tgtEl>
-                                        <p:attrNameLst>
-                                          <p:attrName>style.visibility</p:attrName>
-                                        </p:attrNameLst>
-                                      </p:cBhvr>
-                                      <p:to>
-                                        <p:strVal val="visible"/>
-                                      </p:to>
-                                    </p:set>
-                                  </p:childTnLst>
-                                </p:cTn>
-                              </p:par>
-                            </p:childTnLst>
-                          </p:cTn>
-                        </p:par>
-                      </p:childTnLst>
-                    </p:cTn>
-                  </p:par>
-                  <p:par>
-                    <p:cTn fill="hold">
-                      <p:stCondLst>
-                        <p:cond delay="indefinite"/>
-                      </p:stCondLst>
-                      <p:childTnLst>
-                        <p:par>
-                          <p:cTn fill="hold">
-                            <p:stCondLst>
-                              <p:cond delay="0"/>
-                            </p:stCondLst>
-                            <p:childTnLst>
-                              <p:par>
-                                <p:cTn fill="hold" nodeType="clickEffect" presetClass="entr" presetID="1" presetSubtype="0">
-                                  <p:stCondLst>
-                                    <p:cond delay="0"/>
-                                  </p:stCondLst>
-                                  <p:childTnLst>
-                                    <p:set>
-                                      <p:cBhvr>
-                                        <p:cTn dur="1" fill="hold">
-                                          <p:stCondLst>
-                                            <p:cond delay="0"/>
-                                          </p:stCondLst>
-                                        </p:cTn>
-                                        <p:tgtEl>
-                                          <p:spTgt spid="307">
-                                            <p:txEl>
-                                              <p:pRg end="3" st="3"/>
-                                            </p:txEl>
-                                          </p:spTgt>
-                                        </p:tgtEl>
-                                        <p:attrNameLst>
-                                          <p:attrName>style.visibility</p:attrName>
-                                        </p:attrNameLst>
-                                      </p:cBhvr>
-                                      <p:to>
-                                        <p:strVal val="visible"/>
-                                      </p:to>
-                                    </p:set>
-                                  </p:childTnLst>
-                                </p:cTn>
-                              </p:par>
-                            </p:childTnLst>
-                          </p:cTn>
-                        </p:par>
-                      </p:childTnLst>
-                    </p:cTn>
-                  </p:par>
-                  <p:par>
-                    <p:cTn fill="hold">
-                      <p:stCondLst>
-                        <p:cond delay="indefinite"/>
-                      </p:stCondLst>
-                      <p:childTnLst>
-                        <p:par>
-                          <p:cTn fill="hold">
-                            <p:stCondLst>
-                              <p:cond delay="0"/>
-                            </p:stCondLst>
-                            <p:childTnLst>
-                              <p:par>
-                                <p:cTn fill="hold" nodeType="clickEffect" presetClass="entr" presetID="1" presetSubtype="0">
-                                  <p:stCondLst>
-                                    <p:cond delay="0"/>
-                                  </p:stCondLst>
-                                  <p:childTnLst>
-                                    <p:set>
-                                      <p:cBhvr>
-                                        <p:cTn dur="1" fill="hold">
-                                          <p:stCondLst>
-                                            <p:cond delay="0"/>
-                                          </p:stCondLst>
-                                        </p:cTn>
-                                        <p:tgtEl>
-                                          <p:spTgt spid="307">
-                                            <p:txEl>
-                                              <p:pRg end="4" st="4"/>
-                                            </p:txEl>
-                                          </p:spTgt>
-                                        </p:tgtEl>
-                                        <p:attrNameLst>
-                                          <p:attrName>style.visibility</p:attrName>
-                                        </p:attrNameLst>
-                                      </p:cBhvr>
-                                      <p:to>
-                                        <p:strVal val="visible"/>
-                                      </p:to>
-                                    </p:set>
-                                  </p:childTnLst>
-                                </p:cTn>
-                              </p:par>
-                            </p:childTnLst>
-                          </p:cTn>
-                        </p:par>
-                      </p:childTnLst>
-                    </p:cTn>
-                  </p:par>
-                  <p:par>
-                    <p:cTn fill="hold">
-                      <p:stCondLst>
-                        <p:cond delay="indefinite"/>
-                      </p:stCondLst>
-                      <p:childTnLst>
-                        <p:par>
-                          <p:cTn fill="hold">
-                            <p:stCondLst>
-                              <p:cond delay="0"/>
-                            </p:stCondLst>
-                            <p:childTnLst>
-                              <p:par>
-                                <p:cTn fill="hold" nodeType="clickEffect" presetClass="entr" presetID="1" presetSubtype="0">
-                                  <p:stCondLst>
-                                    <p:cond delay="0"/>
-                                  </p:stCondLst>
-                                  <p:childTnLst>
-                                    <p:set>
-                                      <p:cBhvr>
-                                        <p:cTn dur="1" fill="hold">
-                                          <p:stCondLst>
-                                            <p:cond delay="0"/>
-                                          </p:stCondLst>
-                                        </p:cTn>
-                                        <p:tgtEl>
-                                          <p:spTgt spid="307">
-                                            <p:txEl>
-                                              <p:pRg end="5" st="5"/>
-                                            </p:txEl>
-                                          </p:spTgt>
-                                        </p:tgtEl>
-                                        <p:attrNameLst>
-                                          <p:attrName>style.visibility</p:attrName>
-                                        </p:attrNameLst>
-                                      </p:cBhvr>
-                                      <p:to>
-                                        <p:strVal val="visible"/>
-                                      </p:to>
-                                    </p:set>
-                                  </p:childTnLst>
-                                </p:cTn>
-                              </p:par>
-                            </p:childTnLst>
-                          </p:cTn>
-                        </p:par>
-                      </p:childTnLst>
-                    </p:cTn>
-                  </p:par>
-                </p:childTnLst>
-              </p:cTn>
-              <p:prevCondLst>
-                <p:cond evt="onPrev">
-                  <p:tgtEl>
-                    <p:sldTgt/>
-                  </p:tgtEl>
-                </p:cond>
-              </p:prevCondLst>
-              <p:nextCondLst>
-                <p:cond evt="onNext">
-                  <p:tgtEl>
-                    <p:sldTgt/>
-                  </p:tgtEl>
-                </p:cond>
-              </p:nextCondLst>
-            </p:seq>
-          </p:childTnLst>
-        </p:cTn>
-      </p:par>
-    </p:tnLst>
-  </p:timing>
 </p:sld>
 </file>
 
@@ -27243,6 +27778,739 @@
         </p:nvSpPr>
         <p:spPr>
           <a:xfrm>
+            <a:off x="311700" y="445025"/>
+            <a:ext cx="8520600" cy="572700"/>
+          </a:xfrm>
+          <a:prstGeom prst="rect">
+            <a:avLst/>
+          </a:prstGeom>
+        </p:spPr>
+        <p:txBody>
+          <a:bodyPr anchorCtr="0" anchor="t" bIns="91425" lIns="91425" spcFirstLastPara="1" rIns="91425" wrap="square" tIns="91425">
+            <a:normAutofit fontScale="90000"/>
+          </a:bodyPr>
+          <a:lstStyle/>
+          <a:p>
+            <a:pPr indent="0" lvl="0" marL="0" rtl="0" algn="l">
+              <a:spcBef>
+                <a:spcPts val="0"/>
+              </a:spcBef>
+              <a:spcAft>
+                <a:spcPts val="0"/>
+              </a:spcAft>
+              <a:buNone/>
+            </a:pPr>
+            <a:r>
+              <a:rPr lang="en"/>
+              <a:t>Measures Of Association</a:t>
+            </a:r>
+            <a:endParaRPr/>
+          </a:p>
+        </p:txBody>
+      </p:sp>
+      <p:sp>
+        <p:nvSpPr>
+          <p:cNvPr id="315" name="Google Shape;315;p52"/>
+          <p:cNvSpPr txBox="1"/>
+          <p:nvPr>
+            <p:ph idx="1" type="body"/>
+          </p:nvPr>
+        </p:nvSpPr>
+        <p:spPr>
+          <a:xfrm>
+            <a:off x="311700" y="1152475"/>
+            <a:ext cx="8520600" cy="3416400"/>
+          </a:xfrm>
+          <a:prstGeom prst="rect">
+            <a:avLst/>
+          </a:prstGeom>
+        </p:spPr>
+        <p:txBody>
+          <a:bodyPr anchorCtr="0" anchor="t" bIns="91425" lIns="91425" spcFirstLastPara="1" rIns="91425" wrap="square" tIns="91425">
+            <a:normAutofit/>
+          </a:bodyPr>
+          <a:lstStyle/>
+          <a:p>
+            <a:pPr indent="0" lvl="0" marL="0" rtl="0" algn="l">
+              <a:spcBef>
+                <a:spcPts val="0"/>
+              </a:spcBef>
+              <a:spcAft>
+                <a:spcPts val="0"/>
+              </a:spcAft>
+              <a:buNone/>
+            </a:pPr>
+            <a:r>
+              <a:rPr lang="en"/>
+              <a:t>Measures of Association tell us how two (or more) variables relate to one another.  We’ll cover:</a:t>
+            </a:r>
+            <a:endParaRPr/>
+          </a:p>
+          <a:p>
+            <a:pPr indent="-342900" lvl="0" marL="457200" rtl="0" algn="l">
+              <a:spcBef>
+                <a:spcPts val="1200"/>
+              </a:spcBef>
+              <a:spcAft>
+                <a:spcPts val="0"/>
+              </a:spcAft>
+              <a:buSzPts val="1800"/>
+              <a:buAutoNum type="arabicParenR"/>
+            </a:pPr>
+            <a:r>
+              <a:rPr lang="en"/>
+              <a:t>Covariance</a:t>
+            </a:r>
+            <a:endParaRPr/>
+          </a:p>
+          <a:p>
+            <a:pPr indent="-342900" lvl="0" marL="457200" rtl="0" algn="l">
+              <a:spcBef>
+                <a:spcPts val="0"/>
+              </a:spcBef>
+              <a:spcAft>
+                <a:spcPts val="0"/>
+              </a:spcAft>
+              <a:buSzPts val="1800"/>
+              <a:buAutoNum type="arabicParenR"/>
+            </a:pPr>
+            <a:r>
+              <a:rPr lang="en"/>
+              <a:t>Correlation</a:t>
+            </a:r>
+            <a:endParaRPr/>
+          </a:p>
+        </p:txBody>
+      </p:sp>
+    </p:spTree>
+  </p:cSld>
+  <p:clrMapOvr>
+    <a:masterClrMapping/>
+  </p:clrMapOvr>
+</p:sld>
+</file>
+
+<file path=ppt/slides/slide41.xml><?xml version="1.0" encoding="utf-8"?>
+<p:sld xmlns:a="http://schemas.openxmlformats.org/drawingml/2006/main" xmlns:r="http://schemas.openxmlformats.org/officeDocument/2006/relationships" xmlns:mc="http://schemas.openxmlformats.org/markup-compatibility/2006" xmlns:mv="urn:schemas-microsoft-com:mac:vml" xmlns:p="http://schemas.openxmlformats.org/presentationml/2006/main" xmlns:c="http://schemas.openxmlformats.org/drawingml/2006/chart" xmlns:dgm="http://schemas.openxmlformats.org/drawingml/2006/diagram" xmlns:o="urn:schemas-microsoft-com:office:office" xmlns:v="urn:schemas-microsoft-com:vml" xmlns:pvml="urn:schemas-microsoft-com:office:powerpoint" xmlns:com="http://schemas.openxmlformats.org/drawingml/2006/compatibility" xmlns:p14="http://schemas.microsoft.com/office/powerpoint/2010/main" xmlns:p15="http://schemas.microsoft.com/office/powerpoint/2012/main" xmlns:ahyp="http://schemas.microsoft.com/office/drawing/2018/hyperlinkcolor">
+  <p:cSld>
+    <p:spTree>
+      <p:nvGrpSpPr>
+        <p:cNvPr id="319" name="Shape 319"/>
+        <p:cNvGrpSpPr/>
+        <p:nvPr/>
+      </p:nvGrpSpPr>
+      <p:grpSpPr>
+        <a:xfrm>
+          <a:off x="0" y="0"/>
+          <a:ext cx="0" cy="0"/>
+          <a:chOff x="0" y="0"/>
+          <a:chExt cx="0" cy="0"/>
+        </a:xfrm>
+      </p:grpSpPr>
+      <p:sp>
+        <p:nvSpPr>
+          <p:cNvPr id="320" name="Google Shape;320;p53"/>
+          <p:cNvSpPr txBox="1"/>
+          <p:nvPr>
+            <p:ph type="title"/>
+          </p:nvPr>
+        </p:nvSpPr>
+        <p:spPr>
+          <a:xfrm>
+            <a:off x="311700" y="229375"/>
+            <a:ext cx="8520600" cy="572700"/>
+          </a:xfrm>
+          <a:prstGeom prst="rect">
+            <a:avLst/>
+          </a:prstGeom>
+        </p:spPr>
+        <p:txBody>
+          <a:bodyPr anchorCtr="0" anchor="t" bIns="91425" lIns="91425" spcFirstLastPara="1" rIns="91425" wrap="square" tIns="91425">
+            <a:normAutofit fontScale="90000"/>
+          </a:bodyPr>
+          <a:lstStyle/>
+          <a:p>
+            <a:pPr indent="0" lvl="0" marL="0" rtl="0" algn="l">
+              <a:spcBef>
+                <a:spcPts val="0"/>
+              </a:spcBef>
+              <a:spcAft>
+                <a:spcPts val="0"/>
+              </a:spcAft>
+              <a:buNone/>
+            </a:pPr>
+            <a:r>
+              <a:rPr lang="en"/>
+              <a:t>Measures of Association: </a:t>
+            </a:r>
+            <a:r>
+              <a:rPr lang="en"/>
+              <a:t>Covariance</a:t>
+            </a:r>
+            <a:endParaRPr/>
+          </a:p>
+        </p:txBody>
+      </p:sp>
+      <p:sp>
+        <p:nvSpPr>
+          <p:cNvPr id="321" name="Google Shape;321;p53"/>
+          <p:cNvSpPr txBox="1"/>
+          <p:nvPr>
+            <p:ph idx="1" type="body"/>
+          </p:nvPr>
+        </p:nvSpPr>
+        <p:spPr>
+          <a:xfrm>
+            <a:off x="311700" y="863550"/>
+            <a:ext cx="3397500" cy="3416400"/>
+          </a:xfrm>
+          <a:prstGeom prst="rect">
+            <a:avLst/>
+          </a:prstGeom>
+        </p:spPr>
+        <p:txBody>
+          <a:bodyPr anchorCtr="0" anchor="t" bIns="91425" lIns="91425" spcFirstLastPara="1" rIns="91425" wrap="square" tIns="91425">
+            <a:normAutofit lnSpcReduction="20000"/>
+          </a:bodyPr>
+          <a:lstStyle/>
+          <a:p>
+            <a:pPr indent="0" lvl="0" marL="0" rtl="0" algn="l">
+              <a:spcBef>
+                <a:spcPts val="0"/>
+              </a:spcBef>
+              <a:spcAft>
+                <a:spcPts val="0"/>
+              </a:spcAft>
+              <a:buNone/>
+            </a:pPr>
+            <a:r>
+              <a:rPr lang="en"/>
+              <a:t>Steps:</a:t>
+            </a:r>
+            <a:endParaRPr/>
+          </a:p>
+          <a:p>
+            <a:pPr indent="-342900" lvl="0" marL="457200" rtl="0" algn="l">
+              <a:spcBef>
+                <a:spcPts val="1200"/>
+              </a:spcBef>
+              <a:spcAft>
+                <a:spcPts val="0"/>
+              </a:spcAft>
+              <a:buSzPts val="1800"/>
+              <a:buAutoNum type="arabicParenR"/>
+            </a:pPr>
+            <a:r>
+              <a:rPr lang="en"/>
+              <a:t>Calculate means of x and y</a:t>
+            </a:r>
+            <a:endParaRPr/>
+          </a:p>
+          <a:p>
+            <a:pPr indent="-342900" lvl="0" marL="457200" rtl="0" algn="l">
+              <a:spcBef>
+                <a:spcPts val="0"/>
+              </a:spcBef>
+              <a:spcAft>
+                <a:spcPts val="0"/>
+              </a:spcAft>
+              <a:buSzPts val="1800"/>
+              <a:buAutoNum type="arabicParenR"/>
+            </a:pPr>
+            <a:r>
+              <a:rPr lang="en"/>
+              <a:t>Subtract the mean of each variable from each observation</a:t>
+            </a:r>
+            <a:endParaRPr/>
+          </a:p>
+          <a:p>
+            <a:pPr indent="-342900" lvl="0" marL="457200" rtl="0" algn="l">
+              <a:spcBef>
+                <a:spcPts val="0"/>
+              </a:spcBef>
+              <a:spcAft>
+                <a:spcPts val="0"/>
+              </a:spcAft>
+              <a:buSzPts val="1800"/>
+              <a:buAutoNum type="arabicParenR"/>
+            </a:pPr>
+            <a:r>
+              <a:rPr lang="en"/>
+              <a:t>Multiply each x-xbar by each y-ybar</a:t>
+            </a:r>
+            <a:endParaRPr/>
+          </a:p>
+          <a:p>
+            <a:pPr indent="-342900" lvl="0" marL="457200" rtl="0" algn="l">
+              <a:spcBef>
+                <a:spcPts val="0"/>
+              </a:spcBef>
+              <a:spcAft>
+                <a:spcPts val="0"/>
+              </a:spcAft>
+              <a:buSzPts val="1800"/>
+              <a:buAutoNum type="arabicParenR"/>
+            </a:pPr>
+            <a:r>
+              <a:rPr lang="en"/>
+              <a:t>Sum the products </a:t>
+            </a:r>
+            <a:endParaRPr/>
+          </a:p>
+          <a:p>
+            <a:pPr indent="-342900" lvl="0" marL="457200" rtl="0" algn="l">
+              <a:spcBef>
+                <a:spcPts val="0"/>
+              </a:spcBef>
+              <a:spcAft>
+                <a:spcPts val="0"/>
+              </a:spcAft>
+              <a:buSzPts val="1800"/>
+              <a:buAutoNum type="arabicParenR"/>
+            </a:pPr>
+            <a:r>
+              <a:rPr lang="en"/>
+              <a:t>Divide by the </a:t>
+            </a:r>
+            <a:r>
+              <a:rPr b="1" lang="en"/>
+              <a:t>number of observations</a:t>
+            </a:r>
+            <a:r>
+              <a:rPr lang="en"/>
+              <a:t> </a:t>
+            </a:r>
+            <a:r>
+              <a:rPr b="1" lang="en"/>
+              <a:t>if population</a:t>
+            </a:r>
+            <a:r>
+              <a:rPr lang="en"/>
+              <a:t>, or </a:t>
+            </a:r>
+            <a:r>
+              <a:rPr b="1" lang="en"/>
+              <a:t>n-1 if a sample</a:t>
+            </a:r>
+            <a:endParaRPr b="1"/>
+          </a:p>
+        </p:txBody>
+      </p:sp>
+      <p:pic>
+        <p:nvPicPr>
+          <p:cNvPr id="322" name="Google Shape;322;p53"/>
+          <p:cNvPicPr preferRelativeResize="0"/>
+          <p:nvPr/>
+        </p:nvPicPr>
+        <p:blipFill>
+          <a:blip r:embed="rId3">
+            <a:alphaModFix/>
+          </a:blip>
+          <a:stretch>
+            <a:fillRect/>
+          </a:stretch>
+        </p:blipFill>
+        <p:spPr>
+          <a:xfrm>
+            <a:off x="4739757" y="1926575"/>
+            <a:ext cx="4041743" cy="1442100"/>
+          </a:xfrm>
+          <a:prstGeom prst="rect">
+            <a:avLst/>
+          </a:prstGeom>
+          <a:noFill/>
+          <a:ln>
+            <a:noFill/>
+          </a:ln>
+        </p:spPr>
+      </p:pic>
+      <p:pic>
+        <p:nvPicPr>
+          <p:cNvPr id="323" name="Google Shape;323;p53"/>
+          <p:cNvPicPr preferRelativeResize="0"/>
+          <p:nvPr/>
+        </p:nvPicPr>
+        <p:blipFill>
+          <a:blip r:embed="rId4">
+            <a:alphaModFix/>
+          </a:blip>
+          <a:stretch>
+            <a:fillRect/>
+          </a:stretch>
+        </p:blipFill>
+        <p:spPr>
+          <a:xfrm>
+            <a:off x="4758925" y="649904"/>
+            <a:ext cx="3578100" cy="1276675"/>
+          </a:xfrm>
+          <a:prstGeom prst="rect">
+            <a:avLst/>
+          </a:prstGeom>
+          <a:noFill/>
+          <a:ln>
+            <a:noFill/>
+          </a:ln>
+        </p:spPr>
+      </p:pic>
+    </p:spTree>
+  </p:cSld>
+  <p:clrMapOvr>
+    <a:masterClrMapping/>
+  </p:clrMapOvr>
+  <p:timing>
+    <p:tnLst>
+      <p:par>
+        <p:cTn dur="indefinite" nodeType="tmRoot" restart="never">
+          <p:childTnLst>
+            <p:seq concurrent="1" nextAc="seek">
+              <p:cTn dur="indefinite" id="2" nodeType="mainSeq">
+                <p:childTnLst>
+                  <p:par>
+                    <p:cTn fill="hold">
+                      <p:stCondLst>
+                        <p:cond delay="indefinite"/>
+                      </p:stCondLst>
+                      <p:childTnLst>
+                        <p:par>
+                          <p:cTn fill="hold">
+                            <p:stCondLst>
+                              <p:cond delay="0"/>
+                            </p:stCondLst>
+                            <p:childTnLst>
+                              <p:par>
+                                <p:cTn fill="hold" nodeType="clickEffect" presetClass="entr" presetID="1" presetSubtype="0">
+                                  <p:stCondLst>
+                                    <p:cond delay="0"/>
+                                  </p:stCondLst>
+                                  <p:childTnLst>
+                                    <p:set>
+                                      <p:cBhvr>
+                                        <p:cTn dur="1" fill="hold">
+                                          <p:stCondLst>
+                                            <p:cond delay="0"/>
+                                          </p:stCondLst>
+                                        </p:cTn>
+                                        <p:tgtEl>
+                                          <p:spTgt spid="321">
+                                            <p:txEl>
+                                              <p:pRg end="0" st="0"/>
+                                            </p:txEl>
+                                          </p:spTgt>
+                                        </p:tgtEl>
+                                        <p:attrNameLst>
+                                          <p:attrName>style.visibility</p:attrName>
+                                        </p:attrNameLst>
+                                      </p:cBhvr>
+                                      <p:to>
+                                        <p:strVal val="visible"/>
+                                      </p:to>
+                                    </p:set>
+                                  </p:childTnLst>
+                                </p:cTn>
+                              </p:par>
+                            </p:childTnLst>
+                          </p:cTn>
+                        </p:par>
+                      </p:childTnLst>
+                    </p:cTn>
+                  </p:par>
+                  <p:par>
+                    <p:cTn fill="hold">
+                      <p:stCondLst>
+                        <p:cond delay="indefinite"/>
+                      </p:stCondLst>
+                      <p:childTnLst>
+                        <p:par>
+                          <p:cTn fill="hold">
+                            <p:stCondLst>
+                              <p:cond delay="0"/>
+                            </p:stCondLst>
+                            <p:childTnLst>
+                              <p:par>
+                                <p:cTn fill="hold" nodeType="clickEffect" presetClass="entr" presetID="1" presetSubtype="0">
+                                  <p:stCondLst>
+                                    <p:cond delay="0"/>
+                                  </p:stCondLst>
+                                  <p:childTnLst>
+                                    <p:set>
+                                      <p:cBhvr>
+                                        <p:cTn dur="1" fill="hold">
+                                          <p:stCondLst>
+                                            <p:cond delay="0"/>
+                                          </p:stCondLst>
+                                        </p:cTn>
+                                        <p:tgtEl>
+                                          <p:spTgt spid="321">
+                                            <p:txEl>
+                                              <p:pRg end="1" st="1"/>
+                                            </p:txEl>
+                                          </p:spTgt>
+                                        </p:tgtEl>
+                                        <p:attrNameLst>
+                                          <p:attrName>style.visibility</p:attrName>
+                                        </p:attrNameLst>
+                                      </p:cBhvr>
+                                      <p:to>
+                                        <p:strVal val="visible"/>
+                                      </p:to>
+                                    </p:set>
+                                  </p:childTnLst>
+                                </p:cTn>
+                              </p:par>
+                            </p:childTnLst>
+                          </p:cTn>
+                        </p:par>
+                      </p:childTnLst>
+                    </p:cTn>
+                  </p:par>
+                  <p:par>
+                    <p:cTn fill="hold">
+                      <p:stCondLst>
+                        <p:cond delay="indefinite"/>
+                      </p:stCondLst>
+                      <p:childTnLst>
+                        <p:par>
+                          <p:cTn fill="hold">
+                            <p:stCondLst>
+                              <p:cond delay="0"/>
+                            </p:stCondLst>
+                            <p:childTnLst>
+                              <p:par>
+                                <p:cTn fill="hold" nodeType="clickEffect" presetClass="entr" presetID="1" presetSubtype="0">
+                                  <p:stCondLst>
+                                    <p:cond delay="0"/>
+                                  </p:stCondLst>
+                                  <p:childTnLst>
+                                    <p:set>
+                                      <p:cBhvr>
+                                        <p:cTn dur="1" fill="hold">
+                                          <p:stCondLst>
+                                            <p:cond delay="0"/>
+                                          </p:stCondLst>
+                                        </p:cTn>
+                                        <p:tgtEl>
+                                          <p:spTgt spid="321">
+                                            <p:txEl>
+                                              <p:pRg end="2" st="2"/>
+                                            </p:txEl>
+                                          </p:spTgt>
+                                        </p:tgtEl>
+                                        <p:attrNameLst>
+                                          <p:attrName>style.visibility</p:attrName>
+                                        </p:attrNameLst>
+                                      </p:cBhvr>
+                                      <p:to>
+                                        <p:strVal val="visible"/>
+                                      </p:to>
+                                    </p:set>
+                                  </p:childTnLst>
+                                </p:cTn>
+                              </p:par>
+                            </p:childTnLst>
+                          </p:cTn>
+                        </p:par>
+                      </p:childTnLst>
+                    </p:cTn>
+                  </p:par>
+                  <p:par>
+                    <p:cTn fill="hold">
+                      <p:stCondLst>
+                        <p:cond delay="indefinite"/>
+                      </p:stCondLst>
+                      <p:childTnLst>
+                        <p:par>
+                          <p:cTn fill="hold">
+                            <p:stCondLst>
+                              <p:cond delay="0"/>
+                            </p:stCondLst>
+                            <p:childTnLst>
+                              <p:par>
+                                <p:cTn fill="hold" nodeType="clickEffect" presetClass="entr" presetID="1" presetSubtype="0">
+                                  <p:stCondLst>
+                                    <p:cond delay="0"/>
+                                  </p:stCondLst>
+                                  <p:childTnLst>
+                                    <p:set>
+                                      <p:cBhvr>
+                                        <p:cTn dur="1" fill="hold">
+                                          <p:stCondLst>
+                                            <p:cond delay="0"/>
+                                          </p:stCondLst>
+                                        </p:cTn>
+                                        <p:tgtEl>
+                                          <p:spTgt spid="321">
+                                            <p:txEl>
+                                              <p:pRg end="3" st="3"/>
+                                            </p:txEl>
+                                          </p:spTgt>
+                                        </p:tgtEl>
+                                        <p:attrNameLst>
+                                          <p:attrName>style.visibility</p:attrName>
+                                        </p:attrNameLst>
+                                      </p:cBhvr>
+                                      <p:to>
+                                        <p:strVal val="visible"/>
+                                      </p:to>
+                                    </p:set>
+                                  </p:childTnLst>
+                                </p:cTn>
+                              </p:par>
+                            </p:childTnLst>
+                          </p:cTn>
+                        </p:par>
+                      </p:childTnLst>
+                    </p:cTn>
+                  </p:par>
+                  <p:par>
+                    <p:cTn fill="hold">
+                      <p:stCondLst>
+                        <p:cond delay="indefinite"/>
+                      </p:stCondLst>
+                      <p:childTnLst>
+                        <p:par>
+                          <p:cTn fill="hold">
+                            <p:stCondLst>
+                              <p:cond delay="0"/>
+                            </p:stCondLst>
+                            <p:childTnLst>
+                              <p:par>
+                                <p:cTn fill="hold" nodeType="clickEffect" presetClass="entr" presetID="1" presetSubtype="0">
+                                  <p:stCondLst>
+                                    <p:cond delay="0"/>
+                                  </p:stCondLst>
+                                  <p:childTnLst>
+                                    <p:set>
+                                      <p:cBhvr>
+                                        <p:cTn dur="1" fill="hold">
+                                          <p:stCondLst>
+                                            <p:cond delay="0"/>
+                                          </p:stCondLst>
+                                        </p:cTn>
+                                        <p:tgtEl>
+                                          <p:spTgt spid="321">
+                                            <p:txEl>
+                                              <p:pRg end="4" st="4"/>
+                                            </p:txEl>
+                                          </p:spTgt>
+                                        </p:tgtEl>
+                                        <p:attrNameLst>
+                                          <p:attrName>style.visibility</p:attrName>
+                                        </p:attrNameLst>
+                                      </p:cBhvr>
+                                      <p:to>
+                                        <p:strVal val="visible"/>
+                                      </p:to>
+                                    </p:set>
+                                  </p:childTnLst>
+                                </p:cTn>
+                              </p:par>
+                            </p:childTnLst>
+                          </p:cTn>
+                        </p:par>
+                      </p:childTnLst>
+                    </p:cTn>
+                  </p:par>
+                  <p:par>
+                    <p:cTn fill="hold">
+                      <p:stCondLst>
+                        <p:cond delay="indefinite"/>
+                      </p:stCondLst>
+                      <p:childTnLst>
+                        <p:par>
+                          <p:cTn fill="hold">
+                            <p:stCondLst>
+                              <p:cond delay="0"/>
+                            </p:stCondLst>
+                            <p:childTnLst>
+                              <p:par>
+                                <p:cTn fill="hold" nodeType="clickEffect" presetClass="entr" presetID="1" presetSubtype="0">
+                                  <p:stCondLst>
+                                    <p:cond delay="0"/>
+                                  </p:stCondLst>
+                                  <p:childTnLst>
+                                    <p:set>
+                                      <p:cBhvr>
+                                        <p:cTn dur="1" fill="hold">
+                                          <p:stCondLst>
+                                            <p:cond delay="0"/>
+                                          </p:stCondLst>
+                                        </p:cTn>
+                                        <p:tgtEl>
+                                          <p:spTgt spid="321">
+                                            <p:txEl>
+                                              <p:pRg end="5" st="5"/>
+                                            </p:txEl>
+                                          </p:spTgt>
+                                        </p:tgtEl>
+                                        <p:attrNameLst>
+                                          <p:attrName>style.visibility</p:attrName>
+                                        </p:attrNameLst>
+                                      </p:cBhvr>
+                                      <p:to>
+                                        <p:strVal val="visible"/>
+                                      </p:to>
+                                    </p:set>
+                                  </p:childTnLst>
+                                </p:cTn>
+                              </p:par>
+                            </p:childTnLst>
+                          </p:cTn>
+                        </p:par>
+                      </p:childTnLst>
+                    </p:cTn>
+                  </p:par>
+                </p:childTnLst>
+              </p:cTn>
+              <p:prevCondLst>
+                <p:cond evt="onPrev">
+                  <p:tgtEl>
+                    <p:sldTgt/>
+                  </p:tgtEl>
+                </p:cond>
+              </p:prevCondLst>
+              <p:nextCondLst>
+                <p:cond evt="onNext">
+                  <p:tgtEl>
+                    <p:sldTgt/>
+                  </p:tgtEl>
+                </p:cond>
+              </p:nextCondLst>
+            </p:seq>
+          </p:childTnLst>
+        </p:cTn>
+      </p:par>
+    </p:tnLst>
+  </p:timing>
+</p:sld>
+</file>
+
+<file path=ppt/slides/slide42.xml><?xml version="1.0" encoding="utf-8"?>
+<p:sld xmlns:a="http://schemas.openxmlformats.org/drawingml/2006/main" xmlns:r="http://schemas.openxmlformats.org/officeDocument/2006/relationships" xmlns:mc="http://schemas.openxmlformats.org/markup-compatibility/2006" xmlns:mv="urn:schemas-microsoft-com:mac:vml" xmlns:p="http://schemas.openxmlformats.org/presentationml/2006/main" xmlns:c="http://schemas.openxmlformats.org/drawingml/2006/chart" xmlns:dgm="http://schemas.openxmlformats.org/drawingml/2006/diagram" xmlns:o="urn:schemas-microsoft-com:office:office" xmlns:v="urn:schemas-microsoft-com:vml" xmlns:pvml="urn:schemas-microsoft-com:office:powerpoint" xmlns:com="http://schemas.openxmlformats.org/drawingml/2006/compatibility" xmlns:p14="http://schemas.microsoft.com/office/powerpoint/2010/main" xmlns:p15="http://schemas.microsoft.com/office/powerpoint/2012/main" xmlns:ahyp="http://schemas.microsoft.com/office/drawing/2018/hyperlinkcolor">
+  <p:cSld>
+    <p:spTree>
+      <p:nvGrpSpPr>
+        <p:cNvPr id="327" name="Shape 327"/>
+        <p:cNvGrpSpPr/>
+        <p:nvPr/>
+      </p:nvGrpSpPr>
+      <p:grpSpPr>
+        <a:xfrm>
+          <a:off x="0" y="0"/>
+          <a:ext cx="0" cy="0"/>
+          <a:chOff x="0" y="0"/>
+          <a:chExt cx="0" cy="0"/>
+        </a:xfrm>
+      </p:grpSpPr>
+      <p:sp>
+        <p:nvSpPr>
+          <p:cNvPr id="328" name="Google Shape;328;p54"/>
+          <p:cNvSpPr txBox="1"/>
+          <p:nvPr>
+            <p:ph type="title"/>
+          </p:nvPr>
+        </p:nvSpPr>
+        <p:spPr>
+          <a:xfrm>
             <a:off x="311700" y="272500"/>
             <a:ext cx="8520600" cy="572700"/>
           </a:xfrm>
@@ -27275,7 +28543,7 @@
       </p:sp>
       <p:sp>
         <p:nvSpPr>
-          <p:cNvPr id="315" name="Google Shape;315;p52"/>
+          <p:cNvPr id="329" name="Google Shape;329;p54"/>
           <p:cNvSpPr txBox="1"/>
           <p:nvPr>
             <p:ph idx="1" type="body"/>
@@ -27419,7 +28687,7 @@
       </p:sp>
       <p:pic>
         <p:nvPicPr>
-          <p:cNvPr id="316" name="Google Shape;316;p52"/>
+          <p:cNvPr id="330" name="Google Shape;330;p54"/>
           <p:cNvPicPr preferRelativeResize="0"/>
           <p:nvPr/>
         </p:nvPicPr>
@@ -27447,7 +28715,7 @@
       </p:pic>
       <p:pic>
         <p:nvPicPr>
-          <p:cNvPr id="317" name="Google Shape;317;p52"/>
+          <p:cNvPr id="331" name="Google Shape;331;p54"/>
           <p:cNvPicPr preferRelativeResize="0"/>
           <p:nvPr/>
         </p:nvPicPr>
@@ -27512,7 +28780,7 @@
                                           </p:stCondLst>
                                         </p:cTn>
                                         <p:tgtEl>
-                                          <p:spTgt spid="315">
+                                          <p:spTgt spid="329">
                                             <p:txEl>
                                               <p:pRg end="0" st="0"/>
                                             </p:txEl>
@@ -27561,7 +28829,7 @@
                                           </p:stCondLst>
                                         </p:cTn>
                                         <p:tgtEl>
-                                          <p:spTgt spid="315">
+                                          <p:spTgt spid="329">
                                             <p:txEl>
                                               <p:pRg end="1" st="1"/>
                                             </p:txEl>
@@ -27610,7 +28878,7 @@
                                           </p:stCondLst>
                                         </p:cTn>
                                         <p:tgtEl>
-                                          <p:spTgt spid="315">
+                                          <p:spTgt spid="329">
                                             <p:txEl>
                                               <p:pRg end="2" st="2"/>
                                             </p:txEl>
@@ -27659,7 +28927,7 @@
                                           </p:stCondLst>
                                         </p:cTn>
                                         <p:tgtEl>
-                                          <p:spTgt spid="315">
+                                          <p:spTgt spid="329">
                                             <p:txEl>
                                               <p:pRg end="3" st="3"/>
                                             </p:txEl>
@@ -27708,7 +28976,7 @@
                                           </p:stCondLst>
                                         </p:cTn>
                                         <p:tgtEl>
-                                          <p:spTgt spid="315">
+                                          <p:spTgt spid="329">
                                             <p:txEl>
                                               <p:pRg end="4" st="4"/>
                                             </p:txEl>
@@ -27757,7 +29025,7 @@
                                           </p:stCondLst>
                                         </p:cTn>
                                         <p:tgtEl>
-                                          <p:spTgt spid="315">
+                                          <p:spTgt spid="329">
                                             <p:txEl>
                                               <p:pRg end="5" st="5"/>
                                             </p:txEl>
@@ -27806,7 +29074,7 @@
                                           </p:stCondLst>
                                         </p:cTn>
                                         <p:tgtEl>
-                                          <p:spTgt spid="315">
+                                          <p:spTgt spid="329">
                                             <p:txEl>
                                               <p:pRg end="6" st="6"/>
                                             </p:txEl>
@@ -27854,12 +29122,12 @@
 </p:sld>
 </file>
 
-<file path=ppt/slides/slide41.xml><?xml version="1.0" encoding="utf-8"?>
+<file path=ppt/slides/slide43.xml><?xml version="1.0" encoding="utf-8"?>
 <p:sld xmlns:a="http://schemas.openxmlformats.org/drawingml/2006/main" xmlns:r="http://schemas.openxmlformats.org/officeDocument/2006/relationships" xmlns:mc="http://schemas.openxmlformats.org/markup-compatibility/2006" xmlns:mv="urn:schemas-microsoft-com:mac:vml" xmlns:p="http://schemas.openxmlformats.org/presentationml/2006/main" xmlns:c="http://schemas.openxmlformats.org/drawingml/2006/chart" xmlns:dgm="http://schemas.openxmlformats.org/drawingml/2006/diagram" xmlns:o="urn:schemas-microsoft-com:office:office" xmlns:v="urn:schemas-microsoft-com:vml" xmlns:pvml="urn:schemas-microsoft-com:office:powerpoint" xmlns:com="http://schemas.openxmlformats.org/drawingml/2006/compatibility" xmlns:p14="http://schemas.microsoft.com/office/powerpoint/2010/main" xmlns:p15="http://schemas.microsoft.com/office/powerpoint/2012/main" xmlns:ahyp="http://schemas.microsoft.com/office/drawing/2018/hyperlinkcolor">
   <p:cSld>
     <p:spTree>
       <p:nvGrpSpPr>
-        <p:cNvPr id="321" name="Shape 321"/>
+        <p:cNvPr id="335" name="Shape 335"/>
         <p:cNvGrpSpPr/>
         <p:nvPr/>
       </p:nvGrpSpPr>
@@ -27873,7 +29141,7 @@
       </p:grpSpPr>
       <p:sp>
         <p:nvSpPr>
-          <p:cNvPr id="322" name="Google Shape;322;p53"/>
+          <p:cNvPr id="336" name="Google Shape;336;p55"/>
           <p:cNvSpPr txBox="1"/>
           <p:nvPr>
             <p:ph type="title"/>
@@ -27917,7 +29185,7 @@
       </p:sp>
       <p:sp>
         <p:nvSpPr>
-          <p:cNvPr id="323" name="Google Shape;323;p53"/>
+          <p:cNvPr id="337" name="Google Shape;337;p55"/>
           <p:cNvSpPr txBox="1"/>
           <p:nvPr>
             <p:ph idx="1" type="body"/>
@@ -28025,7 +29293,7 @@
       </p:sp>
       <p:pic>
         <p:nvPicPr>
-          <p:cNvPr id="324" name="Google Shape;324;p53"/>
+          <p:cNvPr id="338" name="Google Shape;338;p55"/>
           <p:cNvPicPr preferRelativeResize="0"/>
           <p:nvPr/>
         </p:nvPicPr>
@@ -28053,7 +29321,7 @@
       </p:pic>
       <p:pic>
         <p:nvPicPr>
-          <p:cNvPr id="325" name="Google Shape;325;p53"/>
+          <p:cNvPr id="339" name="Google Shape;339;p55"/>
           <p:cNvPicPr preferRelativeResize="0"/>
           <p:nvPr/>
         </p:nvPicPr>
@@ -28081,7 +29349,7 @@
       </p:pic>
       <p:sp>
         <p:nvSpPr>
-          <p:cNvPr id="326" name="Google Shape;326;p53"/>
+          <p:cNvPr id="340" name="Google Shape;340;p55"/>
           <p:cNvSpPr txBox="1"/>
           <p:nvPr/>
         </p:nvSpPr>
@@ -28313,7 +29581,7 @@
                                           </p:stCondLst>
                                         </p:cTn>
                                         <p:tgtEl>
-                                          <p:spTgt spid="323">
+                                          <p:spTgt spid="337">
                                             <p:txEl>
                                               <p:pRg end="0" st="0"/>
                                             </p:txEl>
@@ -28362,7 +29630,7 @@
                                           </p:stCondLst>
                                         </p:cTn>
                                         <p:tgtEl>
-                                          <p:spTgt spid="323">
+                                          <p:spTgt spid="337">
                                             <p:txEl>
                                               <p:pRg end="1" st="1"/>
                                             </p:txEl>
@@ -28411,7 +29679,7 @@
                                           </p:stCondLst>
                                         </p:cTn>
                                         <p:tgtEl>
-                                          <p:spTgt spid="323">
+                                          <p:spTgt spid="337">
                                             <p:txEl>
                                               <p:pRg end="2" st="2"/>
                                             </p:txEl>
@@ -28460,7 +29728,7 @@
                                           </p:stCondLst>
                                         </p:cTn>
                                         <p:tgtEl>
-                                          <p:spTgt spid="323">
+                                          <p:spTgt spid="337">
                                             <p:txEl>
                                               <p:pRg end="3" st="3"/>
                                             </p:txEl>
@@ -28508,12 +29776,12 @@
 </p:sld>
 </file>
 
-<file path=ppt/slides/slide42.xml><?xml version="1.0" encoding="utf-8"?>
+<file path=ppt/slides/slide44.xml><?xml version="1.0" encoding="utf-8"?>
 <p:sld xmlns:a="http://schemas.openxmlformats.org/drawingml/2006/main" xmlns:r="http://schemas.openxmlformats.org/officeDocument/2006/relationships" xmlns:mc="http://schemas.openxmlformats.org/markup-compatibility/2006" xmlns:mv="urn:schemas-microsoft-com:mac:vml" xmlns:p="http://schemas.openxmlformats.org/presentationml/2006/main" xmlns:c="http://schemas.openxmlformats.org/drawingml/2006/chart" xmlns:dgm="http://schemas.openxmlformats.org/drawingml/2006/diagram" xmlns:o="urn:schemas-microsoft-com:office:office" xmlns:v="urn:schemas-microsoft-com:vml" xmlns:pvml="urn:schemas-microsoft-com:office:powerpoint" xmlns:com="http://schemas.openxmlformats.org/drawingml/2006/compatibility" xmlns:p14="http://schemas.microsoft.com/office/powerpoint/2010/main" xmlns:p15="http://schemas.microsoft.com/office/powerpoint/2012/main" xmlns:ahyp="http://schemas.microsoft.com/office/drawing/2018/hyperlinkcolor">
   <p:cSld>
     <p:spTree>
       <p:nvGrpSpPr>
-        <p:cNvPr id="330" name="Shape 330"/>
+        <p:cNvPr id="344" name="Shape 344"/>
         <p:cNvGrpSpPr/>
         <p:nvPr/>
       </p:nvGrpSpPr>
@@ -28527,7 +29795,7 @@
       </p:grpSpPr>
       <p:sp>
         <p:nvSpPr>
-          <p:cNvPr id="331" name="Google Shape;331;p54"/>
+          <p:cNvPr id="345" name="Google Shape;345;p56"/>
           <p:cNvSpPr txBox="1"/>
           <p:nvPr>
             <p:ph type="title"/>
@@ -28567,7 +29835,7 @@
       </p:sp>
       <p:sp>
         <p:nvSpPr>
-          <p:cNvPr id="332" name="Google Shape;332;p54"/>
+          <p:cNvPr id="346" name="Google Shape;346;p56"/>
           <p:cNvSpPr txBox="1"/>
           <p:nvPr>
             <p:ph idx="1" type="body"/>
@@ -28712,7 +29980,7 @@
       </p:sp>
       <p:pic>
         <p:nvPicPr>
-          <p:cNvPr id="333" name="Google Shape;333;p54"/>
+          <p:cNvPr id="347" name="Google Shape;347;p56"/>
           <p:cNvPicPr preferRelativeResize="0"/>
           <p:nvPr/>
         </p:nvPicPr>
@@ -28739,7 +30007,7 @@
       </p:pic>
       <p:pic>
         <p:nvPicPr>
-          <p:cNvPr id="334" name="Google Shape;334;p54"/>
+          <p:cNvPr id="348" name="Google Shape;348;p56"/>
           <p:cNvPicPr preferRelativeResize="0"/>
           <p:nvPr/>
         </p:nvPicPr>
@@ -28804,7 +30072,7 @@
                                           </p:stCondLst>
                                         </p:cTn>
                                         <p:tgtEl>
-                                          <p:spTgt spid="332">
+                                          <p:spTgt spid="346">
                                             <p:txEl>
                                               <p:pRg end="0" st="0"/>
                                             </p:txEl>
@@ -28822,7 +30090,7 @@
                                       <p:cBhvr>
                                         <p:cTn dur="1000"/>
                                         <p:tgtEl>
-                                          <p:spTgt spid="332">
+                                          <p:spTgt spid="346">
                                             <p:txEl>
                                               <p:pRg end="0" st="0"/>
                                             </p:txEl>
@@ -28865,7 +30133,7 @@
                                           </p:stCondLst>
                                         </p:cTn>
                                         <p:tgtEl>
-                                          <p:spTgt spid="332">
+                                          <p:spTgt spid="346">
                                             <p:txEl>
                                               <p:pRg end="1" st="1"/>
                                             </p:txEl>
@@ -28883,7 +30151,7 @@
                                       <p:cBhvr>
                                         <p:cTn dur="1000"/>
                                         <p:tgtEl>
-                                          <p:spTgt spid="332">
+                                          <p:spTgt spid="346">
                                             <p:txEl>
                                               <p:pRg end="1" st="1"/>
                                             </p:txEl>
@@ -28926,7 +30194,7 @@
                                           </p:stCondLst>
                                         </p:cTn>
                                         <p:tgtEl>
-                                          <p:spTgt spid="332">
+                                          <p:spTgt spid="346">
                                             <p:txEl>
                                               <p:pRg end="2" st="2"/>
                                             </p:txEl>
@@ -28944,7 +30212,7 @@
                                       <p:cBhvr>
                                         <p:cTn dur="1000"/>
                                         <p:tgtEl>
-                                          <p:spTgt spid="332">
+                                          <p:spTgt spid="346">
                                             <p:txEl>
                                               <p:pRg end="2" st="2"/>
                                             </p:txEl>
@@ -28987,7 +30255,7 @@
                                           </p:stCondLst>
                                         </p:cTn>
                                         <p:tgtEl>
-                                          <p:spTgt spid="332">
+                                          <p:spTgt spid="346">
                                             <p:txEl>
                                               <p:pRg end="3" st="3"/>
                                             </p:txEl>
@@ -29005,7 +30273,7 @@
                                       <p:cBhvr>
                                         <p:cTn dur="1000"/>
                                         <p:tgtEl>
-                                          <p:spTgt spid="332">
+                                          <p:spTgt spid="346">
                                             <p:txEl>
                                               <p:pRg end="3" st="3"/>
                                             </p:txEl>
@@ -29048,7 +30316,7 @@
                                           </p:stCondLst>
                                         </p:cTn>
                                         <p:tgtEl>
-                                          <p:spTgt spid="332">
+                                          <p:spTgt spid="346">
                                             <p:txEl>
                                               <p:pRg end="4" st="4"/>
                                             </p:txEl>
@@ -29066,7 +30334,7 @@
                                       <p:cBhvr>
                                         <p:cTn dur="1000"/>
                                         <p:tgtEl>
-                                          <p:spTgt spid="332">
+                                          <p:spTgt spid="346">
                                             <p:txEl>
                                               <p:pRg end="4" st="4"/>
                                             </p:txEl>
@@ -29109,7 +30377,7 @@
                                           </p:stCondLst>
                                         </p:cTn>
                                         <p:tgtEl>
-                                          <p:spTgt spid="332">
+                                          <p:spTgt spid="346">
                                             <p:txEl>
                                               <p:pRg end="5" st="5"/>
                                             </p:txEl>
@@ -29127,7 +30395,7 @@
                                       <p:cBhvr>
                                         <p:cTn dur="1000"/>
                                         <p:tgtEl>
-                                          <p:spTgt spid="332">
+                                          <p:spTgt spid="346">
                                             <p:txEl>
                                               <p:pRg end="5" st="5"/>
                                             </p:txEl>
@@ -29170,7 +30438,7 @@
                                           </p:stCondLst>
                                         </p:cTn>
                                         <p:tgtEl>
-                                          <p:spTgt spid="332">
+                                          <p:spTgt spid="346">
                                             <p:txEl>
                                               <p:pRg end="6" st="6"/>
                                             </p:txEl>
@@ -29188,7 +30456,7 @@
                                       <p:cBhvr>
                                         <p:cTn dur="1000"/>
                                         <p:tgtEl>
-                                          <p:spTgt spid="332">
+                                          <p:spTgt spid="346">
                                             <p:txEl>
                                               <p:pRg end="6" st="6"/>
                                             </p:txEl>
@@ -29227,324 +30495,6 @@
       </p:par>
     </p:tnLst>
   </p:timing>
-</p:sld>
-</file>
-
-<file path=ppt/slides/slide43.xml><?xml version="1.0" encoding="utf-8"?>
-<p:sld xmlns:a="http://schemas.openxmlformats.org/drawingml/2006/main" xmlns:r="http://schemas.openxmlformats.org/officeDocument/2006/relationships" xmlns:mc="http://schemas.openxmlformats.org/markup-compatibility/2006" xmlns:mv="urn:schemas-microsoft-com:mac:vml" xmlns:p="http://schemas.openxmlformats.org/presentationml/2006/main" xmlns:c="http://schemas.openxmlformats.org/drawingml/2006/chart" xmlns:dgm="http://schemas.openxmlformats.org/drawingml/2006/diagram" xmlns:o="urn:schemas-microsoft-com:office:office" xmlns:v="urn:schemas-microsoft-com:vml" xmlns:pvml="urn:schemas-microsoft-com:office:powerpoint" xmlns:com="http://schemas.openxmlformats.org/drawingml/2006/compatibility" xmlns:p14="http://schemas.microsoft.com/office/powerpoint/2010/main" xmlns:p15="http://schemas.microsoft.com/office/powerpoint/2012/main" xmlns:ahyp="http://schemas.microsoft.com/office/drawing/2018/hyperlinkcolor">
-  <p:cSld>
-    <p:spTree>
-      <p:nvGrpSpPr>
-        <p:cNvPr id="338" name="Shape 338"/>
-        <p:cNvGrpSpPr/>
-        <p:nvPr/>
-      </p:nvGrpSpPr>
-      <p:grpSpPr>
-        <a:xfrm>
-          <a:off x="0" y="0"/>
-          <a:ext cx="0" cy="0"/>
-          <a:chOff x="0" y="0"/>
-          <a:chExt cx="0" cy="0"/>
-        </a:xfrm>
-      </p:grpSpPr>
-      <p:sp>
-        <p:nvSpPr>
-          <p:cNvPr id="339" name="Google Shape;339;p55"/>
-          <p:cNvSpPr txBox="1"/>
-          <p:nvPr>
-            <p:ph type="title"/>
-          </p:nvPr>
-        </p:nvSpPr>
-        <p:spPr>
-          <a:xfrm>
-            <a:off x="311700" y="445025"/>
-            <a:ext cx="8520600" cy="572700"/>
-          </a:xfrm>
-          <a:prstGeom prst="rect">
-            <a:avLst/>
-          </a:prstGeom>
-        </p:spPr>
-        <p:txBody>
-          <a:bodyPr anchorCtr="0" anchor="t" bIns="91425" lIns="91425" spcFirstLastPara="1" rIns="91425" wrap="square" tIns="91425">
-            <a:normAutofit fontScale="90000"/>
-          </a:bodyPr>
-          <a:lstStyle/>
-          <a:p>
-            <a:pPr indent="0" lvl="0" marL="0" rtl="0" algn="l">
-              <a:spcBef>
-                <a:spcPts val="0"/>
-              </a:spcBef>
-              <a:spcAft>
-                <a:spcPts val="0"/>
-              </a:spcAft>
-              <a:buNone/>
-            </a:pPr>
-            <a:r>
-              <a:rPr lang="en"/>
-              <a:t>(Correlation </a:t>
-            </a:r>
-            <a:r>
-              <a:rPr lang="en"/>
-              <a:t>Coefficient)</a:t>
-            </a:r>
-            <a:r>
-              <a:rPr lang="en"/>
-              <a:t>^2 = </a:t>
-            </a:r>
-            <a:r>
-              <a:rPr lang="en"/>
-              <a:t>Coefficient</a:t>
-            </a:r>
-            <a:r>
-              <a:rPr lang="en"/>
-              <a:t> of Determination</a:t>
-            </a:r>
-            <a:endParaRPr/>
-          </a:p>
-        </p:txBody>
-      </p:sp>
-      <p:sp>
-        <p:nvSpPr>
-          <p:cNvPr id="340" name="Google Shape;340;p55"/>
-          <p:cNvSpPr txBox="1"/>
-          <p:nvPr>
-            <p:ph idx="1" type="body"/>
-          </p:nvPr>
-        </p:nvSpPr>
-        <p:spPr>
-          <a:xfrm>
-            <a:off x="311700" y="1469575"/>
-            <a:ext cx="8520600" cy="3099300"/>
-          </a:xfrm>
-          <a:prstGeom prst="rect">
-            <a:avLst/>
-          </a:prstGeom>
-        </p:spPr>
-        <p:txBody>
-          <a:bodyPr anchorCtr="0" anchor="t" bIns="91425" lIns="91425" spcFirstLastPara="1" rIns="91425" wrap="square" tIns="91425">
-            <a:normAutofit/>
-          </a:bodyPr>
-          <a:lstStyle/>
-          <a:p>
-            <a:pPr indent="0" lvl="0" marL="0" rtl="0" algn="l">
-              <a:spcBef>
-                <a:spcPts val="0"/>
-              </a:spcBef>
-              <a:spcAft>
-                <a:spcPts val="0"/>
-              </a:spcAft>
-              <a:buNone/>
-            </a:pPr>
-            <a:r>
-              <a:rPr lang="en"/>
-              <a:t>Coefficient</a:t>
-            </a:r>
-            <a:r>
-              <a:rPr lang="en"/>
-              <a:t> of determination: The percentage of the variance in one variable that is attributable / explainable in terms of the variable’s linear relationship with the other variable</a:t>
-            </a:r>
-            <a:endParaRPr/>
-          </a:p>
-          <a:p>
-            <a:pPr indent="0" lvl="0" marL="0" rtl="0" algn="l">
-              <a:spcBef>
-                <a:spcPts val="1200"/>
-              </a:spcBef>
-              <a:spcAft>
-                <a:spcPts val="0"/>
-              </a:spcAft>
-              <a:buNone/>
-            </a:pPr>
-            <a:r>
-              <a:rPr lang="en"/>
-              <a:t>If r = 0.5, r^2 = 0.25, meaning that 25% of the variance in Y can be explained by the variance in X</a:t>
-            </a:r>
-            <a:endParaRPr/>
-          </a:p>
-          <a:p>
-            <a:pPr indent="0" lvl="0" marL="0" rtl="0" algn="l">
-              <a:spcBef>
-                <a:spcPts val="1200"/>
-              </a:spcBef>
-              <a:spcAft>
-                <a:spcPts val="1200"/>
-              </a:spcAft>
-              <a:buNone/>
-            </a:pPr>
-            <a:r>
-              <a:rPr lang="en"/>
-              <a:t>Much more on R^2 later!</a:t>
-            </a:r>
-            <a:endParaRPr/>
-          </a:p>
-        </p:txBody>
-      </p:sp>
-    </p:spTree>
-  </p:cSld>
-  <p:clrMapOvr>
-    <a:masterClrMapping/>
-  </p:clrMapOvr>
-</p:sld>
-</file>
-
-<file path=ppt/slides/slide44.xml><?xml version="1.0" encoding="utf-8"?>
-<p:sld xmlns:a="http://schemas.openxmlformats.org/drawingml/2006/main" xmlns:r="http://schemas.openxmlformats.org/officeDocument/2006/relationships" xmlns:mc="http://schemas.openxmlformats.org/markup-compatibility/2006" xmlns:mv="urn:schemas-microsoft-com:mac:vml" xmlns:p="http://schemas.openxmlformats.org/presentationml/2006/main" xmlns:c="http://schemas.openxmlformats.org/drawingml/2006/chart" xmlns:dgm="http://schemas.openxmlformats.org/drawingml/2006/diagram" xmlns:o="urn:schemas-microsoft-com:office:office" xmlns:v="urn:schemas-microsoft-com:vml" xmlns:pvml="urn:schemas-microsoft-com:office:powerpoint" xmlns:com="http://schemas.openxmlformats.org/drawingml/2006/compatibility" xmlns:p14="http://schemas.microsoft.com/office/powerpoint/2010/main" xmlns:p15="http://schemas.microsoft.com/office/powerpoint/2012/main" xmlns:ahyp="http://schemas.microsoft.com/office/drawing/2018/hyperlinkcolor">
-  <p:cSld>
-    <p:spTree>
-      <p:nvGrpSpPr>
-        <p:cNvPr id="344" name="Shape 344"/>
-        <p:cNvGrpSpPr/>
-        <p:nvPr/>
-      </p:nvGrpSpPr>
-      <p:grpSpPr>
-        <a:xfrm>
-          <a:off x="0" y="0"/>
-          <a:ext cx="0" cy="0"/>
-          <a:chOff x="0" y="0"/>
-          <a:chExt cx="0" cy="0"/>
-        </a:xfrm>
-      </p:grpSpPr>
-      <p:sp>
-        <p:nvSpPr>
-          <p:cNvPr id="345" name="Google Shape;345;p56"/>
-          <p:cNvSpPr txBox="1"/>
-          <p:nvPr>
-            <p:ph type="title"/>
-          </p:nvPr>
-        </p:nvSpPr>
-        <p:spPr>
-          <a:xfrm>
-            <a:off x="311700" y="445025"/>
-            <a:ext cx="8520600" cy="572700"/>
-          </a:xfrm>
-          <a:prstGeom prst="rect">
-            <a:avLst/>
-          </a:prstGeom>
-        </p:spPr>
-        <p:txBody>
-          <a:bodyPr anchorCtr="0" anchor="t" bIns="91425" lIns="91425" spcFirstLastPara="1" rIns="91425" wrap="square" tIns="91425">
-            <a:normAutofit fontScale="90000"/>
-          </a:bodyPr>
-          <a:lstStyle/>
-          <a:p>
-            <a:pPr indent="0" lvl="0" marL="0" rtl="0" algn="l">
-              <a:spcBef>
-                <a:spcPts val="0"/>
-              </a:spcBef>
-              <a:spcAft>
-                <a:spcPts val="0"/>
-              </a:spcAft>
-              <a:buNone/>
-            </a:pPr>
-            <a:r>
-              <a:rPr lang="en"/>
-              <a:t>Correlation Scatter Plots</a:t>
-            </a:r>
-            <a:endParaRPr/>
-          </a:p>
-        </p:txBody>
-      </p:sp>
-      <p:pic>
-        <p:nvPicPr>
-          <p:cNvPr id="346" name="Google Shape;346;p56"/>
-          <p:cNvPicPr preferRelativeResize="0"/>
-          <p:nvPr/>
-        </p:nvPicPr>
-        <p:blipFill>
-          <a:blip r:embed="rId3">
-            <a:alphaModFix/>
-          </a:blip>
-          <a:stretch>
-            <a:fillRect/>
-          </a:stretch>
-        </p:blipFill>
-        <p:spPr>
-          <a:xfrm>
-            <a:off x="417488" y="1799457"/>
-            <a:ext cx="8309024" cy="1981825"/>
-          </a:xfrm>
-          <a:prstGeom prst="rect">
-            <a:avLst/>
-          </a:prstGeom>
-          <a:noFill/>
-          <a:ln>
-            <a:noFill/>
-          </a:ln>
-        </p:spPr>
-      </p:pic>
-      <p:sp>
-        <p:nvSpPr>
-          <p:cNvPr id="347" name="Google Shape;347;p56"/>
-          <p:cNvSpPr txBox="1"/>
-          <p:nvPr/>
-        </p:nvSpPr>
-        <p:spPr>
-          <a:xfrm>
-            <a:off x="1996250" y="4720875"/>
-            <a:ext cx="6060600" cy="400200"/>
-          </a:xfrm>
-          <a:prstGeom prst="rect">
-            <a:avLst/>
-          </a:prstGeom>
-          <a:noFill/>
-          <a:ln>
-            <a:noFill/>
-          </a:ln>
-        </p:spPr>
-        <p:txBody>
-          <a:bodyPr anchorCtr="0" anchor="t" bIns="91425" lIns="91425" spcFirstLastPara="1" rIns="91425" wrap="square" tIns="91425">
-            <a:spAutoFit/>
-          </a:bodyPr>
-          <a:lstStyle/>
-          <a:p>
-            <a:pPr indent="0" lvl="0" marL="0" rtl="0" algn="l">
-              <a:spcBef>
-                <a:spcPts val="0"/>
-              </a:spcBef>
-              <a:spcAft>
-                <a:spcPts val="0"/>
-              </a:spcAft>
-              <a:buNone/>
-            </a:pPr>
-            <a:r>
-              <a:rPr lang="en"/>
-              <a:t>Correlation coefficient cannot account for non-linear relationships</a:t>
-            </a:r>
-            <a:endParaRPr/>
-          </a:p>
-        </p:txBody>
-      </p:sp>
-      <p:cxnSp>
-        <p:nvCxnSpPr>
-          <p:cNvPr id="348" name="Google Shape;348;p56"/>
-          <p:cNvCxnSpPr/>
-          <p:nvPr/>
-        </p:nvCxnSpPr>
-        <p:spPr>
-          <a:xfrm flipH="1" rot="10800000">
-            <a:off x="6420375" y="3587775"/>
-            <a:ext cx="575700" cy="1133100"/>
-          </a:xfrm>
-          <a:prstGeom prst="straightConnector1">
-            <a:avLst/>
-          </a:prstGeom>
-          <a:noFill/>
-          <a:ln cap="flat" cmpd="sng" w="9525">
-            <a:solidFill>
-              <a:schemeClr val="dk2"/>
-            </a:solidFill>
-            <a:prstDash val="solid"/>
-            <a:round/>
-            <a:headEnd len="med" w="med" type="none"/>
-            <a:tailEnd len="med" w="med" type="triangle"/>
-          </a:ln>
-        </p:spPr>
-      </p:cxnSp>
-    </p:spTree>
-  </p:cSld>
-  <p:clrMapOvr>
-    <a:masterClrMapping/>
-  </p:clrMapOvr>
 </p:sld>
 </file>
 
@@ -29598,7 +30548,24 @@
               <a:buNone/>
             </a:pPr>
             <a:r>
-              <a:t/>
+              <a:rPr lang="en"/>
+              <a:t>(Correlation </a:t>
+            </a:r>
+            <a:r>
+              <a:rPr lang="en"/>
+              <a:t>Coefficient)</a:t>
+            </a:r>
+            <a:r>
+              <a:rPr lang="en"/>
+              <a:t>^2 = </a:t>
+            </a:r>
+            <a:r>
+              <a:rPr lang="en"/>
+              <a:t>Coefficient</a:t>
+            </a:r>
+            <a:r>
+              <a:rPr lang="en"/>
+              <a:t> of Determination</a:t>
             </a:r>
             <a:endParaRPr/>
           </a:p>
@@ -29607,6 +30574,307 @@
       <p:sp>
         <p:nvSpPr>
           <p:cNvPr id="354" name="Google Shape;354;p57"/>
+          <p:cNvSpPr txBox="1"/>
+          <p:nvPr>
+            <p:ph idx="1" type="body"/>
+          </p:nvPr>
+        </p:nvSpPr>
+        <p:spPr>
+          <a:xfrm>
+            <a:off x="311700" y="1469575"/>
+            <a:ext cx="8520600" cy="3099300"/>
+          </a:xfrm>
+          <a:prstGeom prst="rect">
+            <a:avLst/>
+          </a:prstGeom>
+        </p:spPr>
+        <p:txBody>
+          <a:bodyPr anchorCtr="0" anchor="t" bIns="91425" lIns="91425" spcFirstLastPara="1" rIns="91425" wrap="square" tIns="91425">
+            <a:normAutofit/>
+          </a:bodyPr>
+          <a:lstStyle/>
+          <a:p>
+            <a:pPr indent="0" lvl="0" marL="0" rtl="0" algn="l">
+              <a:spcBef>
+                <a:spcPts val="0"/>
+              </a:spcBef>
+              <a:spcAft>
+                <a:spcPts val="0"/>
+              </a:spcAft>
+              <a:buNone/>
+            </a:pPr>
+            <a:r>
+              <a:rPr lang="en"/>
+              <a:t>Coefficient</a:t>
+            </a:r>
+            <a:r>
+              <a:rPr lang="en"/>
+              <a:t> of determination: The percentage of the variance in one variable that is attributable / explainable in terms of the variable’s linear relationship with the other variable</a:t>
+            </a:r>
+            <a:endParaRPr/>
+          </a:p>
+          <a:p>
+            <a:pPr indent="0" lvl="0" marL="0" rtl="0" algn="l">
+              <a:spcBef>
+                <a:spcPts val="1200"/>
+              </a:spcBef>
+              <a:spcAft>
+                <a:spcPts val="0"/>
+              </a:spcAft>
+              <a:buNone/>
+            </a:pPr>
+            <a:r>
+              <a:rPr lang="en"/>
+              <a:t>If r = 0.5, r^2 = 0.25, meaning that 25% of the variance in Y can be explained by the variance in X</a:t>
+            </a:r>
+            <a:endParaRPr/>
+          </a:p>
+          <a:p>
+            <a:pPr indent="0" lvl="0" marL="0" rtl="0" algn="l">
+              <a:spcBef>
+                <a:spcPts val="1200"/>
+              </a:spcBef>
+              <a:spcAft>
+                <a:spcPts val="1200"/>
+              </a:spcAft>
+              <a:buNone/>
+            </a:pPr>
+            <a:r>
+              <a:rPr lang="en"/>
+              <a:t>Much more on R^2 later!</a:t>
+            </a:r>
+            <a:endParaRPr/>
+          </a:p>
+        </p:txBody>
+      </p:sp>
+    </p:spTree>
+  </p:cSld>
+  <p:clrMapOvr>
+    <a:masterClrMapping/>
+  </p:clrMapOvr>
+</p:sld>
+</file>
+
+<file path=ppt/slides/slide46.xml><?xml version="1.0" encoding="utf-8"?>
+<p:sld xmlns:a="http://schemas.openxmlformats.org/drawingml/2006/main" xmlns:r="http://schemas.openxmlformats.org/officeDocument/2006/relationships" xmlns:mc="http://schemas.openxmlformats.org/markup-compatibility/2006" xmlns:mv="urn:schemas-microsoft-com:mac:vml" xmlns:p="http://schemas.openxmlformats.org/presentationml/2006/main" xmlns:c="http://schemas.openxmlformats.org/drawingml/2006/chart" xmlns:dgm="http://schemas.openxmlformats.org/drawingml/2006/diagram" xmlns:o="urn:schemas-microsoft-com:office:office" xmlns:v="urn:schemas-microsoft-com:vml" xmlns:pvml="urn:schemas-microsoft-com:office:powerpoint" xmlns:com="http://schemas.openxmlformats.org/drawingml/2006/compatibility" xmlns:p14="http://schemas.microsoft.com/office/powerpoint/2010/main" xmlns:p15="http://schemas.microsoft.com/office/powerpoint/2012/main" xmlns:ahyp="http://schemas.microsoft.com/office/drawing/2018/hyperlinkcolor">
+  <p:cSld>
+    <p:spTree>
+      <p:nvGrpSpPr>
+        <p:cNvPr id="358" name="Shape 358"/>
+        <p:cNvGrpSpPr/>
+        <p:nvPr/>
+      </p:nvGrpSpPr>
+      <p:grpSpPr>
+        <a:xfrm>
+          <a:off x="0" y="0"/>
+          <a:ext cx="0" cy="0"/>
+          <a:chOff x="0" y="0"/>
+          <a:chExt cx="0" cy="0"/>
+        </a:xfrm>
+      </p:grpSpPr>
+      <p:sp>
+        <p:nvSpPr>
+          <p:cNvPr id="359" name="Google Shape;359;p58"/>
+          <p:cNvSpPr txBox="1"/>
+          <p:nvPr>
+            <p:ph type="title"/>
+          </p:nvPr>
+        </p:nvSpPr>
+        <p:spPr>
+          <a:xfrm>
+            <a:off x="311700" y="445025"/>
+            <a:ext cx="8520600" cy="572700"/>
+          </a:xfrm>
+          <a:prstGeom prst="rect">
+            <a:avLst/>
+          </a:prstGeom>
+        </p:spPr>
+        <p:txBody>
+          <a:bodyPr anchorCtr="0" anchor="t" bIns="91425" lIns="91425" spcFirstLastPara="1" rIns="91425" wrap="square" tIns="91425">
+            <a:normAutofit fontScale="90000"/>
+          </a:bodyPr>
+          <a:lstStyle/>
+          <a:p>
+            <a:pPr indent="0" lvl="0" marL="0" rtl="0" algn="l">
+              <a:spcBef>
+                <a:spcPts val="0"/>
+              </a:spcBef>
+              <a:spcAft>
+                <a:spcPts val="0"/>
+              </a:spcAft>
+              <a:buNone/>
+            </a:pPr>
+            <a:r>
+              <a:rPr lang="en"/>
+              <a:t>Correlation Scatter Plots</a:t>
+            </a:r>
+            <a:endParaRPr/>
+          </a:p>
+        </p:txBody>
+      </p:sp>
+      <p:pic>
+        <p:nvPicPr>
+          <p:cNvPr id="360" name="Google Shape;360;p58"/>
+          <p:cNvPicPr preferRelativeResize="0"/>
+          <p:nvPr/>
+        </p:nvPicPr>
+        <p:blipFill>
+          <a:blip r:embed="rId3">
+            <a:alphaModFix/>
+          </a:blip>
+          <a:stretch>
+            <a:fillRect/>
+          </a:stretch>
+        </p:blipFill>
+        <p:spPr>
+          <a:xfrm>
+            <a:off x="417488" y="1799457"/>
+            <a:ext cx="8309024" cy="1981825"/>
+          </a:xfrm>
+          <a:prstGeom prst="rect">
+            <a:avLst/>
+          </a:prstGeom>
+          <a:noFill/>
+          <a:ln>
+            <a:noFill/>
+          </a:ln>
+        </p:spPr>
+      </p:pic>
+      <p:sp>
+        <p:nvSpPr>
+          <p:cNvPr id="361" name="Google Shape;361;p58"/>
+          <p:cNvSpPr txBox="1"/>
+          <p:nvPr/>
+        </p:nvSpPr>
+        <p:spPr>
+          <a:xfrm>
+            <a:off x="1996250" y="4720875"/>
+            <a:ext cx="6060600" cy="400200"/>
+          </a:xfrm>
+          <a:prstGeom prst="rect">
+            <a:avLst/>
+          </a:prstGeom>
+          <a:noFill/>
+          <a:ln>
+            <a:noFill/>
+          </a:ln>
+        </p:spPr>
+        <p:txBody>
+          <a:bodyPr anchorCtr="0" anchor="t" bIns="91425" lIns="91425" spcFirstLastPara="1" rIns="91425" wrap="square" tIns="91425">
+            <a:spAutoFit/>
+          </a:bodyPr>
+          <a:lstStyle/>
+          <a:p>
+            <a:pPr indent="0" lvl="0" marL="0" rtl="0" algn="l">
+              <a:spcBef>
+                <a:spcPts val="0"/>
+              </a:spcBef>
+              <a:spcAft>
+                <a:spcPts val="0"/>
+              </a:spcAft>
+              <a:buNone/>
+            </a:pPr>
+            <a:r>
+              <a:rPr lang="en"/>
+              <a:t>Correlation coefficient cannot account for non-linear relationships</a:t>
+            </a:r>
+            <a:endParaRPr/>
+          </a:p>
+        </p:txBody>
+      </p:sp>
+      <p:cxnSp>
+        <p:nvCxnSpPr>
+          <p:cNvPr id="362" name="Google Shape;362;p58"/>
+          <p:cNvCxnSpPr/>
+          <p:nvPr/>
+        </p:nvCxnSpPr>
+        <p:spPr>
+          <a:xfrm flipH="1" rot="10800000">
+            <a:off x="6420375" y="3587775"/>
+            <a:ext cx="575700" cy="1133100"/>
+          </a:xfrm>
+          <a:prstGeom prst="straightConnector1">
+            <a:avLst/>
+          </a:prstGeom>
+          <a:noFill/>
+          <a:ln cap="flat" cmpd="sng" w="9525">
+            <a:solidFill>
+              <a:schemeClr val="dk2"/>
+            </a:solidFill>
+            <a:prstDash val="solid"/>
+            <a:round/>
+            <a:headEnd len="med" w="med" type="none"/>
+            <a:tailEnd len="med" w="med" type="triangle"/>
+          </a:ln>
+        </p:spPr>
+      </p:cxnSp>
+    </p:spTree>
+  </p:cSld>
+  <p:clrMapOvr>
+    <a:masterClrMapping/>
+  </p:clrMapOvr>
+</p:sld>
+</file>
+
+<file path=ppt/slides/slide47.xml><?xml version="1.0" encoding="utf-8"?>
+<p:sld xmlns:a="http://schemas.openxmlformats.org/drawingml/2006/main" xmlns:r="http://schemas.openxmlformats.org/officeDocument/2006/relationships" xmlns:mc="http://schemas.openxmlformats.org/markup-compatibility/2006" xmlns:mv="urn:schemas-microsoft-com:mac:vml" xmlns:p="http://schemas.openxmlformats.org/presentationml/2006/main" xmlns:c="http://schemas.openxmlformats.org/drawingml/2006/chart" xmlns:dgm="http://schemas.openxmlformats.org/drawingml/2006/diagram" xmlns:o="urn:schemas-microsoft-com:office:office" xmlns:v="urn:schemas-microsoft-com:vml" xmlns:pvml="urn:schemas-microsoft-com:office:powerpoint" xmlns:com="http://schemas.openxmlformats.org/drawingml/2006/compatibility" xmlns:p14="http://schemas.microsoft.com/office/powerpoint/2010/main" xmlns:p15="http://schemas.microsoft.com/office/powerpoint/2012/main" xmlns:ahyp="http://schemas.microsoft.com/office/drawing/2018/hyperlinkcolor">
+  <p:cSld>
+    <p:spTree>
+      <p:nvGrpSpPr>
+        <p:cNvPr id="366" name="Shape 366"/>
+        <p:cNvGrpSpPr/>
+        <p:nvPr/>
+      </p:nvGrpSpPr>
+      <p:grpSpPr>
+        <a:xfrm>
+          <a:off x="0" y="0"/>
+          <a:ext cx="0" cy="0"/>
+          <a:chOff x="0" y="0"/>
+          <a:chExt cx="0" cy="0"/>
+        </a:xfrm>
+      </p:grpSpPr>
+      <p:sp>
+        <p:nvSpPr>
+          <p:cNvPr id="367" name="Google Shape;367;p59"/>
+          <p:cNvSpPr txBox="1"/>
+          <p:nvPr>
+            <p:ph type="title"/>
+          </p:nvPr>
+        </p:nvSpPr>
+        <p:spPr>
+          <a:xfrm>
+            <a:off x="311700" y="445025"/>
+            <a:ext cx="8520600" cy="572700"/>
+          </a:xfrm>
+          <a:prstGeom prst="rect">
+            <a:avLst/>
+          </a:prstGeom>
+        </p:spPr>
+        <p:txBody>
+          <a:bodyPr anchorCtr="0" anchor="t" bIns="91425" lIns="91425" spcFirstLastPara="1" rIns="91425" wrap="square" tIns="91425">
+            <a:normAutofit fontScale="90000"/>
+          </a:bodyPr>
+          <a:lstStyle/>
+          <a:p>
+            <a:pPr indent="0" lvl="0" marL="0" rtl="0" algn="l">
+              <a:spcBef>
+                <a:spcPts val="0"/>
+              </a:spcBef>
+              <a:spcAft>
+                <a:spcPts val="0"/>
+              </a:spcAft>
+              <a:buNone/>
+            </a:pPr>
+            <a:r>
+              <a:t/>
+            </a:r>
+            <a:endParaRPr/>
+          </a:p>
+        </p:txBody>
+      </p:sp>
+      <p:sp>
+        <p:nvSpPr>
+          <p:cNvPr id="368" name="Google Shape;368;p59"/>
           <p:cNvSpPr txBox="1"/>
           <p:nvPr>
             <p:ph idx="1" type="body"/>
@@ -29645,7 +30913,7 @@
       </p:sp>
       <p:pic>
         <p:nvPicPr>
-          <p:cNvPr id="355" name="Google Shape;355;p57"/>
+          <p:cNvPr id="369" name="Google Shape;369;p59"/>
           <p:cNvPicPr preferRelativeResize="0"/>
           <p:nvPr/>
         </p:nvPicPr>
@@ -29679,12 +30947,12 @@
 </p:sld>
 </file>
 
-<file path=ppt/slides/slide46.xml><?xml version="1.0" encoding="utf-8"?>
+<file path=ppt/slides/slide48.xml><?xml version="1.0" encoding="utf-8"?>
 <p:sld xmlns:a="http://schemas.openxmlformats.org/drawingml/2006/main" xmlns:r="http://schemas.openxmlformats.org/officeDocument/2006/relationships" xmlns:mc="http://schemas.openxmlformats.org/markup-compatibility/2006" xmlns:mv="urn:schemas-microsoft-com:mac:vml" xmlns:p="http://schemas.openxmlformats.org/presentationml/2006/main" xmlns:c="http://schemas.openxmlformats.org/drawingml/2006/chart" xmlns:dgm="http://schemas.openxmlformats.org/drawingml/2006/diagram" xmlns:o="urn:schemas-microsoft-com:office:office" xmlns:v="urn:schemas-microsoft-com:vml" xmlns:pvml="urn:schemas-microsoft-com:office:powerpoint" xmlns:com="http://schemas.openxmlformats.org/drawingml/2006/compatibility" xmlns:p14="http://schemas.microsoft.com/office/powerpoint/2010/main" xmlns:p15="http://schemas.microsoft.com/office/powerpoint/2012/main" xmlns:ahyp="http://schemas.microsoft.com/office/drawing/2018/hyperlinkcolor">
   <p:cSld>
     <p:spTree>
       <p:nvGrpSpPr>
-        <p:cNvPr id="359" name="Shape 359"/>
+        <p:cNvPr id="373" name="Shape 373"/>
         <p:cNvGrpSpPr/>
         <p:nvPr/>
       </p:nvGrpSpPr>
@@ -29698,7 +30966,7 @@
       </p:grpSpPr>
       <p:sp>
         <p:nvSpPr>
-          <p:cNvPr id="360" name="Google Shape;360;p58"/>
+          <p:cNvPr id="374" name="Google Shape;374;p60"/>
           <p:cNvSpPr txBox="1"/>
           <p:nvPr>
             <p:ph type="title"/>
@@ -29738,7 +31006,7 @@
       </p:sp>
       <p:sp>
         <p:nvSpPr>
-          <p:cNvPr id="361" name="Google Shape;361;p58"/>
+          <p:cNvPr id="375" name="Google Shape;375;p60"/>
           <p:cNvSpPr txBox="1"/>
           <p:nvPr>
             <p:ph idx="1" type="body"/>
@@ -29877,7 +31145,7 @@
                                           </p:stCondLst>
                                         </p:cTn>
                                         <p:tgtEl>
-                                          <p:spTgt spid="361">
+                                          <p:spTgt spid="375">
                                             <p:txEl>
                                               <p:pRg end="0" st="0"/>
                                             </p:txEl>
@@ -29895,7 +31163,7 @@
                                       <p:cBhvr>
                                         <p:cTn dur="1000"/>
                                         <p:tgtEl>
-                                          <p:spTgt spid="361">
+                                          <p:spTgt spid="375">
                                             <p:txEl>
                                               <p:pRg end="0" st="0"/>
                                             </p:txEl>
@@ -29938,7 +31206,7 @@
                                           </p:stCondLst>
                                         </p:cTn>
                                         <p:tgtEl>
-                                          <p:spTgt spid="361">
+                                          <p:spTgt spid="375">
                                             <p:txEl>
                                               <p:pRg end="1" st="1"/>
                                             </p:txEl>
@@ -29956,7 +31224,7 @@
                                       <p:cBhvr>
                                         <p:cTn dur="1000"/>
                                         <p:tgtEl>
-                                          <p:spTgt spid="361">
+                                          <p:spTgt spid="375">
                                             <p:txEl>
                                               <p:pRg end="1" st="1"/>
                                             </p:txEl>
@@ -29999,7 +31267,7 @@
                                           </p:stCondLst>
                                         </p:cTn>
                                         <p:tgtEl>
-                                          <p:spTgt spid="361">
+                                          <p:spTgt spid="375">
                                             <p:txEl>
                                               <p:pRg end="2" st="2"/>
                                             </p:txEl>
@@ -30017,7 +31285,7 @@
                                       <p:cBhvr>
                                         <p:cTn dur="1000"/>
                                         <p:tgtEl>
-                                          <p:spTgt spid="361">
+                                          <p:spTgt spid="375">
                                             <p:txEl>
                                               <p:pRg end="2" st="2"/>
                                             </p:txEl>
@@ -30060,7 +31328,7 @@
                                           </p:stCondLst>
                                         </p:cTn>
                                         <p:tgtEl>
-                                          <p:spTgt spid="361">
+                                          <p:spTgt spid="375">
                                             <p:txEl>
                                               <p:pRg end="3" st="3"/>
                                             </p:txEl>
@@ -30078,7 +31346,7 @@
                                       <p:cBhvr>
                                         <p:cTn dur="1000"/>
                                         <p:tgtEl>
-                                          <p:spTgt spid="361">
+                                          <p:spTgt spid="375">
                                             <p:txEl>
                                               <p:pRg end="3" st="3"/>
                                             </p:txEl>
@@ -30121,7 +31389,7 @@
                                           </p:stCondLst>
                                         </p:cTn>
                                         <p:tgtEl>
-                                          <p:spTgt spid="361">
+                                          <p:spTgt spid="375">
                                             <p:txEl>
                                               <p:pRg end="4" st="4"/>
                                             </p:txEl>
@@ -30139,7 +31407,7 @@
                                       <p:cBhvr>
                                         <p:cTn dur="1000"/>
                                         <p:tgtEl>
-                                          <p:spTgt spid="361">
+                                          <p:spTgt spid="375">
                                             <p:txEl>
                                               <p:pRg end="4" st="4"/>
                                             </p:txEl>
@@ -30181,12 +31449,12 @@
 </p:sld>
 </file>
 
-<file path=ppt/slides/slide47.xml><?xml version="1.0" encoding="utf-8"?>
+<file path=ppt/slides/slide49.xml><?xml version="1.0" encoding="utf-8"?>
 <p:sld xmlns:a="http://schemas.openxmlformats.org/drawingml/2006/main" xmlns:r="http://schemas.openxmlformats.org/officeDocument/2006/relationships" xmlns:mc="http://schemas.openxmlformats.org/markup-compatibility/2006" xmlns:mv="urn:schemas-microsoft-com:mac:vml" xmlns:p="http://schemas.openxmlformats.org/presentationml/2006/main" xmlns:c="http://schemas.openxmlformats.org/drawingml/2006/chart" xmlns:dgm="http://schemas.openxmlformats.org/drawingml/2006/diagram" xmlns:o="urn:schemas-microsoft-com:office:office" xmlns:v="urn:schemas-microsoft-com:vml" xmlns:pvml="urn:schemas-microsoft-com:office:powerpoint" xmlns:com="http://schemas.openxmlformats.org/drawingml/2006/compatibility" xmlns:p14="http://schemas.microsoft.com/office/powerpoint/2010/main" xmlns:p15="http://schemas.microsoft.com/office/powerpoint/2012/main" xmlns:ahyp="http://schemas.microsoft.com/office/drawing/2018/hyperlinkcolor">
   <p:cSld>
     <p:spTree>
       <p:nvGrpSpPr>
-        <p:cNvPr id="365" name="Shape 365"/>
+        <p:cNvPr id="379" name="Shape 379"/>
         <p:cNvGrpSpPr/>
         <p:nvPr/>
       </p:nvGrpSpPr>
@@ -30200,7 +31468,7 @@
       </p:grpSpPr>
       <p:sp>
         <p:nvSpPr>
-          <p:cNvPr id="366" name="Google Shape;366;p59"/>
+          <p:cNvPr id="380" name="Google Shape;380;p61"/>
           <p:cNvSpPr txBox="1"/>
           <p:nvPr>
             <p:ph type="title"/>
@@ -30240,7 +31508,7 @@
       </p:sp>
       <p:sp>
         <p:nvSpPr>
-          <p:cNvPr id="367" name="Google Shape;367;p59"/>
+          <p:cNvPr id="381" name="Google Shape;381;p61"/>
           <p:cNvSpPr txBox="1"/>
           <p:nvPr>
             <p:ph idx="1" type="body"/>
@@ -30280,7 +31548,7 @@
       </p:sp>
       <p:pic>
         <p:nvPicPr>
-          <p:cNvPr id="368" name="Google Shape;368;p59"/>
+          <p:cNvPr id="382" name="Google Shape;382;p61"/>
           <p:cNvPicPr preferRelativeResize="0"/>
           <p:nvPr/>
         </p:nvPicPr>
@@ -30314,12 +31582,65 @@
 </p:sld>
 </file>
 
-<file path=ppt/slides/slide48.xml><?xml version="1.0" encoding="utf-8"?>
+<file path=ppt/slides/slide5.xml><?xml version="1.0" encoding="utf-8"?>
 <p:sld xmlns:a="http://schemas.openxmlformats.org/drawingml/2006/main" xmlns:r="http://schemas.openxmlformats.org/officeDocument/2006/relationships" xmlns:mc="http://schemas.openxmlformats.org/markup-compatibility/2006" xmlns:mv="urn:schemas-microsoft-com:mac:vml" xmlns:p="http://schemas.openxmlformats.org/presentationml/2006/main" xmlns:c="http://schemas.openxmlformats.org/drawingml/2006/chart" xmlns:dgm="http://schemas.openxmlformats.org/drawingml/2006/diagram" xmlns:o="urn:schemas-microsoft-com:office:office" xmlns:v="urn:schemas-microsoft-com:vml" xmlns:pvml="urn:schemas-microsoft-com:office:powerpoint" xmlns:com="http://schemas.openxmlformats.org/drawingml/2006/compatibility" xmlns:p14="http://schemas.microsoft.com/office/powerpoint/2010/main" xmlns:p15="http://schemas.microsoft.com/office/powerpoint/2012/main" xmlns:ahyp="http://schemas.microsoft.com/office/drawing/2018/hyperlinkcolor">
   <p:cSld>
     <p:spTree>
       <p:nvGrpSpPr>
-        <p:cNvPr id="372" name="Shape 372"/>
+        <p:cNvPr id="78" name="Shape 78"/>
+        <p:cNvGrpSpPr/>
+        <p:nvPr/>
+      </p:nvGrpSpPr>
+      <p:grpSpPr>
+        <a:xfrm>
+          <a:off x="0" y="0"/>
+          <a:ext cx="0" cy="0"/>
+          <a:chOff x="0" y="0"/>
+          <a:chExt cx="0" cy="0"/>
+        </a:xfrm>
+      </p:grpSpPr>
+      <p:pic>
+        <p:nvPicPr>
+          <p:cNvPr id="79" name="Google Shape;79;p17"/>
+          <p:cNvPicPr preferRelativeResize="0"/>
+          <p:nvPr/>
+        </p:nvPicPr>
+        <p:blipFill>
+          <a:blip r:embed="rId3">
+            <a:alphaModFix/>
+          </a:blip>
+          <a:stretch>
+            <a:fillRect/>
+          </a:stretch>
+        </p:blipFill>
+        <p:spPr>
+          <a:xfrm>
+            <a:off x="946462" y="603600"/>
+            <a:ext cx="7251075" cy="3616451"/>
+          </a:xfrm>
+          <a:prstGeom prst="rect">
+            <a:avLst/>
+          </a:prstGeom>
+          <a:noFill/>
+          <a:ln>
+            <a:noFill/>
+          </a:ln>
+        </p:spPr>
+      </p:pic>
+    </p:spTree>
+  </p:cSld>
+  <p:clrMapOvr>
+    <a:masterClrMapping/>
+  </p:clrMapOvr>
+</p:sld>
+</file>
+
+<file path=ppt/slides/slide50.xml><?xml version="1.0" encoding="utf-8"?>
+<p:sld xmlns:a="http://schemas.openxmlformats.org/drawingml/2006/main" xmlns:r="http://schemas.openxmlformats.org/officeDocument/2006/relationships" xmlns:mc="http://schemas.openxmlformats.org/markup-compatibility/2006" xmlns:mv="urn:schemas-microsoft-com:mac:vml" xmlns:p="http://schemas.openxmlformats.org/presentationml/2006/main" xmlns:c="http://schemas.openxmlformats.org/drawingml/2006/chart" xmlns:dgm="http://schemas.openxmlformats.org/drawingml/2006/diagram" xmlns:o="urn:schemas-microsoft-com:office:office" xmlns:v="urn:schemas-microsoft-com:vml" xmlns:pvml="urn:schemas-microsoft-com:office:powerpoint" xmlns:com="http://schemas.openxmlformats.org/drawingml/2006/compatibility" xmlns:p14="http://schemas.microsoft.com/office/powerpoint/2010/main" xmlns:p15="http://schemas.microsoft.com/office/powerpoint/2012/main" xmlns:ahyp="http://schemas.microsoft.com/office/drawing/2018/hyperlinkcolor">
+  <p:cSld>
+    <p:spTree>
+      <p:nvGrpSpPr>
+        <p:cNvPr id="386" name="Shape 386"/>
         <p:cNvGrpSpPr/>
         <p:nvPr/>
       </p:nvGrpSpPr>
@@ -30333,7 +31654,7 @@
       </p:grpSpPr>
       <p:sp>
         <p:nvSpPr>
-          <p:cNvPr id="373" name="Google Shape;373;p60"/>
+          <p:cNvPr id="387" name="Google Shape;387;p62"/>
           <p:cNvSpPr txBox="1"/>
           <p:nvPr>
             <p:ph type="title"/>
@@ -30373,7 +31694,7 @@
       </p:sp>
       <p:sp>
         <p:nvSpPr>
-          <p:cNvPr id="374" name="Google Shape;374;p60"/>
+          <p:cNvPr id="388" name="Google Shape;388;p62"/>
           <p:cNvSpPr txBox="1"/>
           <p:nvPr>
             <p:ph idx="1" type="body"/>
@@ -30420,6 +31741,46 @@
               <a:buNone/>
             </a:pPr>
             <a:r>
+              <a:rPr b="1" lang="en"/>
+              <a:t>X could cause Y…Y could cause X…Z could cause X and Y…</a:t>
+            </a:r>
+            <a:endParaRPr b="1"/>
+          </a:p>
+          <a:p>
+            <a:pPr indent="0" lvl="0" marL="0" rtl="0" algn="l">
+              <a:spcBef>
+                <a:spcPts val="1200"/>
+              </a:spcBef>
+              <a:spcAft>
+                <a:spcPts val="0"/>
+              </a:spcAft>
+              <a:buNone/>
+            </a:pPr>
+            <a:r>
+              <a:rPr b="1" lang="en"/>
+              <a:t>Or it </a:t>
+            </a:r>
+            <a:r>
+              <a:rPr b="1" lang="en"/>
+              <a:t>could</a:t>
+            </a:r>
+            <a:r>
+              <a:rPr b="1" lang="en"/>
+              <a:t> just be a fluke.</a:t>
+            </a:r>
+            <a:endParaRPr b="1"/>
+          </a:p>
+          <a:p>
+            <a:pPr indent="0" lvl="0" marL="0" rtl="0" algn="l">
+              <a:spcBef>
+                <a:spcPts val="1200"/>
+              </a:spcBef>
+              <a:spcAft>
+                <a:spcPts val="0"/>
+              </a:spcAft>
+              <a:buNone/>
+            </a:pPr>
+            <a:r>
               <a:rPr lang="en"/>
               <a:t>People attribute causality to concurrent phenomena</a:t>
             </a:r>
@@ -30447,44 +31808,13 @@
                 <a:spcPts val="1200"/>
               </a:spcBef>
               <a:spcAft>
-                <a:spcPts val="0"/>
+                <a:spcPts val="1200"/>
               </a:spcAft>
               <a:buNone/>
             </a:pPr>
             <a:r>
               <a:rPr lang="en"/>
-              <a:t>Without theory / subject matter specifics, causality cannot be inferred </a:t>
-            </a:r>
-            <a:endParaRPr/>
-          </a:p>
-          <a:p>
-            <a:pPr indent="0" lvl="0" marL="0" rtl="0" algn="l">
-              <a:spcBef>
-                <a:spcPts val="1200"/>
-              </a:spcBef>
-              <a:spcAft>
-                <a:spcPts val="0"/>
-              </a:spcAft>
-              <a:buNone/>
-            </a:pPr>
-            <a:r>
-              <a:t/>
-            </a:r>
-            <a:endParaRPr/>
-          </a:p>
-          <a:p>
-            <a:pPr indent="0" lvl="0" marL="0" rtl="0" algn="l">
-              <a:spcBef>
-                <a:spcPts val="1200"/>
-              </a:spcBef>
-              <a:spcAft>
-                <a:spcPts val="1200"/>
-              </a:spcAft>
-              <a:buNone/>
-            </a:pPr>
-            <a:r>
-              <a:rPr lang="en"/>
-              <a:t>Or can it...</a:t>
+              <a:t>Without theory / subject matter specifics / advanced methodology, causality cannot be inferred </a:t>
             </a:r>
             <a:endParaRPr/>
           </a:p>
@@ -30529,7 +31859,7 @@
                                           </p:stCondLst>
                                         </p:cTn>
                                         <p:tgtEl>
-                                          <p:spTgt spid="374">
+                                          <p:spTgt spid="388">
                                             <p:txEl>
                                               <p:pRg end="0" st="0"/>
                                             </p:txEl>
@@ -30578,7 +31908,7 @@
                                           </p:stCondLst>
                                         </p:cTn>
                                         <p:tgtEl>
-                                          <p:spTgt spid="374">
+                                          <p:spTgt spid="388">
                                             <p:txEl>
                                               <p:pRg end="1" st="1"/>
                                             </p:txEl>
@@ -30627,7 +31957,7 @@
                                           </p:stCondLst>
                                         </p:cTn>
                                         <p:tgtEl>
-                                          <p:spTgt spid="374">
+                                          <p:spTgt spid="388">
                                             <p:txEl>
                                               <p:pRg end="2" st="2"/>
                                             </p:txEl>
@@ -30676,7 +32006,7 @@
                                           </p:stCondLst>
                                         </p:cTn>
                                         <p:tgtEl>
-                                          <p:spTgt spid="374">
+                                          <p:spTgt spid="388">
                                             <p:txEl>
                                               <p:pRg end="3" st="3"/>
                                             </p:txEl>
@@ -30725,7 +32055,7 @@
                                           </p:stCondLst>
                                         </p:cTn>
                                         <p:tgtEl>
-                                          <p:spTgt spid="374">
+                                          <p:spTgt spid="388">
                                             <p:txEl>
                                               <p:pRg end="4" st="4"/>
                                             </p:txEl>
@@ -30774,7 +32104,7 @@
                                           </p:stCondLst>
                                         </p:cTn>
                                         <p:tgtEl>
-                                          <p:spTgt spid="374">
+                                          <p:spTgt spid="388">
                                             <p:txEl>
                                               <p:pRg end="5" st="5"/>
                                             </p:txEl>
@@ -30822,12 +32152,12 @@
 </p:sld>
 </file>
 
-<file path=ppt/slides/slide49.xml><?xml version="1.0" encoding="utf-8"?>
+<file path=ppt/slides/slide51.xml><?xml version="1.0" encoding="utf-8"?>
 <p:sld xmlns:a="http://schemas.openxmlformats.org/drawingml/2006/main" xmlns:r="http://schemas.openxmlformats.org/officeDocument/2006/relationships" xmlns:mc="http://schemas.openxmlformats.org/markup-compatibility/2006" xmlns:mv="urn:schemas-microsoft-com:mac:vml" xmlns:p="http://schemas.openxmlformats.org/presentationml/2006/main" xmlns:c="http://schemas.openxmlformats.org/drawingml/2006/chart" xmlns:dgm="http://schemas.openxmlformats.org/drawingml/2006/diagram" xmlns:o="urn:schemas-microsoft-com:office:office" xmlns:v="urn:schemas-microsoft-com:vml" xmlns:pvml="urn:schemas-microsoft-com:office:powerpoint" xmlns:com="http://schemas.openxmlformats.org/drawingml/2006/compatibility" xmlns:p14="http://schemas.microsoft.com/office/powerpoint/2010/main" xmlns:p15="http://schemas.microsoft.com/office/powerpoint/2012/main" xmlns:ahyp="http://schemas.microsoft.com/office/drawing/2018/hyperlinkcolor">
   <p:cSld>
     <p:spTree>
       <p:nvGrpSpPr>
-        <p:cNvPr id="378" name="Shape 378"/>
+        <p:cNvPr id="392" name="Shape 392"/>
         <p:cNvGrpSpPr/>
         <p:nvPr/>
       </p:nvGrpSpPr>
@@ -30841,7 +32171,7 @@
       </p:grpSpPr>
       <p:sp>
         <p:nvSpPr>
-          <p:cNvPr id="379" name="Google Shape;379;p61"/>
+          <p:cNvPr id="393" name="Google Shape;393;p63"/>
           <p:cNvSpPr txBox="1"/>
           <p:nvPr>
             <p:ph type="title"/>
@@ -30881,7 +32211,7 @@
       </p:sp>
       <p:sp>
         <p:nvSpPr>
-          <p:cNvPr id="380" name="Google Shape;380;p61"/>
+          <p:cNvPr id="394" name="Google Shape;394;p63"/>
           <p:cNvSpPr txBox="1"/>
           <p:nvPr>
             <p:ph idx="1" type="body"/>
@@ -30969,7 +32299,7 @@
       </p:sp>
       <p:pic>
         <p:nvPicPr>
-          <p:cNvPr id="381" name="Google Shape;381;p61"/>
+          <p:cNvPr id="395" name="Google Shape;395;p63"/>
           <p:cNvPicPr preferRelativeResize="0"/>
           <p:nvPr/>
         </p:nvPicPr>
@@ -31034,7 +32364,7 @@
                                           </p:stCondLst>
                                         </p:cTn>
                                         <p:tgtEl>
-                                          <p:spTgt spid="380">
+                                          <p:spTgt spid="394">
                                             <p:txEl>
                                               <p:pRg end="0" st="0"/>
                                             </p:txEl>
@@ -31052,7 +32382,7 @@
                                       <p:cBhvr>
                                         <p:cTn dur="1000"/>
                                         <p:tgtEl>
-                                          <p:spTgt spid="380">
+                                          <p:spTgt spid="394">
                                             <p:txEl>
                                               <p:pRg end="0" st="0"/>
                                             </p:txEl>
@@ -31095,7 +32425,7 @@
                                           </p:stCondLst>
                                         </p:cTn>
                                         <p:tgtEl>
-                                          <p:spTgt spid="380">
+                                          <p:spTgt spid="394">
                                             <p:txEl>
                                               <p:pRg end="1" st="1"/>
                                             </p:txEl>
@@ -31113,7 +32443,7 @@
                                       <p:cBhvr>
                                         <p:cTn dur="1000"/>
                                         <p:tgtEl>
-                                          <p:spTgt spid="380">
+                                          <p:spTgt spid="394">
                                             <p:txEl>
                                               <p:pRg end="1" st="1"/>
                                             </p:txEl>
@@ -31156,7 +32486,7 @@
                                           </p:stCondLst>
                                         </p:cTn>
                                         <p:tgtEl>
-                                          <p:spTgt spid="380">
+                                          <p:spTgt spid="394">
                                             <p:txEl>
                                               <p:pRg end="2" st="2"/>
                                             </p:txEl>
@@ -31174,7 +32504,7 @@
                                       <p:cBhvr>
                                         <p:cTn dur="1000"/>
                                         <p:tgtEl>
-                                          <p:spTgt spid="380">
+                                          <p:spTgt spid="394">
                                             <p:txEl>
                                               <p:pRg end="2" st="2"/>
                                             </p:txEl>
@@ -31217,7 +32547,7 @@
                                           </p:stCondLst>
                                         </p:cTn>
                                         <p:tgtEl>
-                                          <p:spTgt spid="380">
+                                          <p:spTgt spid="394">
                                             <p:txEl>
                                               <p:pRg end="3" st="3"/>
                                             </p:txEl>
@@ -31235,7 +32565,7 @@
                                       <p:cBhvr>
                                         <p:cTn dur="1000"/>
                                         <p:tgtEl>
-                                          <p:spTgt spid="380">
+                                          <p:spTgt spid="394">
                                             <p:txEl>
                                               <p:pRg end="3" st="3"/>
                                             </p:txEl>
@@ -31277,12 +32607,12 @@
 </p:sld>
 </file>
 
-<file path=ppt/slides/slide5.xml><?xml version="1.0" encoding="utf-8"?>
+<file path=ppt/slides/slide52.xml><?xml version="1.0" encoding="utf-8"?>
 <p:sld xmlns:a="http://schemas.openxmlformats.org/drawingml/2006/main" xmlns:r="http://schemas.openxmlformats.org/officeDocument/2006/relationships" xmlns:mc="http://schemas.openxmlformats.org/markup-compatibility/2006" xmlns:mv="urn:schemas-microsoft-com:mac:vml" xmlns:p="http://schemas.openxmlformats.org/presentationml/2006/main" xmlns:c="http://schemas.openxmlformats.org/drawingml/2006/chart" xmlns:dgm="http://schemas.openxmlformats.org/drawingml/2006/diagram" xmlns:o="urn:schemas-microsoft-com:office:office" xmlns:v="urn:schemas-microsoft-com:vml" xmlns:pvml="urn:schemas-microsoft-com:office:powerpoint" xmlns:com="http://schemas.openxmlformats.org/drawingml/2006/compatibility" xmlns:p14="http://schemas.microsoft.com/office/powerpoint/2010/main" xmlns:p15="http://schemas.microsoft.com/office/powerpoint/2012/main" xmlns:ahyp="http://schemas.microsoft.com/office/drawing/2018/hyperlinkcolor">
   <p:cSld>
     <p:spTree>
       <p:nvGrpSpPr>
-        <p:cNvPr id="78" name="Shape 78"/>
+        <p:cNvPr id="399" name="Shape 399"/>
         <p:cNvGrpSpPr/>
         <p:nvPr/>
       </p:nvGrpSpPr>
@@ -31296,60 +32626,7 @@
       </p:grpSpPr>
       <p:pic>
         <p:nvPicPr>
-          <p:cNvPr id="79" name="Google Shape;79;p17"/>
-          <p:cNvPicPr preferRelativeResize="0"/>
-          <p:nvPr/>
-        </p:nvPicPr>
-        <p:blipFill>
-          <a:blip r:embed="rId3">
-            <a:alphaModFix/>
-          </a:blip>
-          <a:stretch>
-            <a:fillRect/>
-          </a:stretch>
-        </p:blipFill>
-        <p:spPr>
-          <a:xfrm>
-            <a:off x="946462" y="603600"/>
-            <a:ext cx="7251075" cy="3616451"/>
-          </a:xfrm>
-          <a:prstGeom prst="rect">
-            <a:avLst/>
-          </a:prstGeom>
-          <a:noFill/>
-          <a:ln>
-            <a:noFill/>
-          </a:ln>
-        </p:spPr>
-      </p:pic>
-    </p:spTree>
-  </p:cSld>
-  <p:clrMapOvr>
-    <a:masterClrMapping/>
-  </p:clrMapOvr>
-</p:sld>
-</file>
-
-<file path=ppt/slides/slide50.xml><?xml version="1.0" encoding="utf-8"?>
-<p:sld xmlns:a="http://schemas.openxmlformats.org/drawingml/2006/main" xmlns:r="http://schemas.openxmlformats.org/officeDocument/2006/relationships" xmlns:mc="http://schemas.openxmlformats.org/markup-compatibility/2006" xmlns:mv="urn:schemas-microsoft-com:mac:vml" xmlns:p="http://schemas.openxmlformats.org/presentationml/2006/main" xmlns:c="http://schemas.openxmlformats.org/drawingml/2006/chart" xmlns:dgm="http://schemas.openxmlformats.org/drawingml/2006/diagram" xmlns:o="urn:schemas-microsoft-com:office:office" xmlns:v="urn:schemas-microsoft-com:vml" xmlns:pvml="urn:schemas-microsoft-com:office:powerpoint" xmlns:com="http://schemas.openxmlformats.org/drawingml/2006/compatibility" xmlns:p14="http://schemas.microsoft.com/office/powerpoint/2010/main" xmlns:p15="http://schemas.microsoft.com/office/powerpoint/2012/main" xmlns:ahyp="http://schemas.microsoft.com/office/drawing/2018/hyperlinkcolor">
-  <p:cSld>
-    <p:spTree>
-      <p:nvGrpSpPr>
-        <p:cNvPr id="385" name="Shape 385"/>
-        <p:cNvGrpSpPr/>
-        <p:nvPr/>
-      </p:nvGrpSpPr>
-      <p:grpSpPr>
-        <a:xfrm>
-          <a:off x="0" y="0"/>
-          <a:ext cx="0" cy="0"/>
-          <a:chOff x="0" y="0"/>
-          <a:chExt cx="0" cy="0"/>
-        </a:xfrm>
-      </p:grpSpPr>
-      <p:pic>
-        <p:nvPicPr>
-          <p:cNvPr id="386" name="Google Shape;386;p62"/>
+          <p:cNvPr id="400" name="Google Shape;400;p64"/>
           <p:cNvPicPr preferRelativeResize="0"/>
           <p:nvPr/>
         </p:nvPicPr>
@@ -31383,12 +32660,12 @@
 </p:sld>
 </file>
 
-<file path=ppt/slides/slide51.xml><?xml version="1.0" encoding="utf-8"?>
+<file path=ppt/slides/slide53.xml><?xml version="1.0" encoding="utf-8"?>
 <p:sld xmlns:a="http://schemas.openxmlformats.org/drawingml/2006/main" xmlns:r="http://schemas.openxmlformats.org/officeDocument/2006/relationships" xmlns:mc="http://schemas.openxmlformats.org/markup-compatibility/2006" xmlns:mv="urn:schemas-microsoft-com:mac:vml" xmlns:p="http://schemas.openxmlformats.org/presentationml/2006/main" xmlns:c="http://schemas.openxmlformats.org/drawingml/2006/chart" xmlns:dgm="http://schemas.openxmlformats.org/drawingml/2006/diagram" xmlns:o="urn:schemas-microsoft-com:office:office" xmlns:v="urn:schemas-microsoft-com:vml" xmlns:pvml="urn:schemas-microsoft-com:office:powerpoint" xmlns:com="http://schemas.openxmlformats.org/drawingml/2006/compatibility" xmlns:p14="http://schemas.microsoft.com/office/powerpoint/2010/main" xmlns:p15="http://schemas.microsoft.com/office/powerpoint/2012/main" xmlns:ahyp="http://schemas.microsoft.com/office/drawing/2018/hyperlinkcolor">
   <p:cSld>
     <p:spTree>
       <p:nvGrpSpPr>
-        <p:cNvPr id="390" name="Shape 390"/>
+        <p:cNvPr id="404" name="Shape 404"/>
         <p:cNvGrpSpPr/>
         <p:nvPr/>
       </p:nvGrpSpPr>
@@ -31402,7 +32679,7 @@
       </p:grpSpPr>
       <p:pic>
         <p:nvPicPr>
-          <p:cNvPr id="391" name="Google Shape;391;p63"/>
+          <p:cNvPr id="405" name="Google Shape;405;p65"/>
           <p:cNvPicPr preferRelativeResize="0"/>
           <p:nvPr/>
         </p:nvPicPr>
@@ -31436,12 +32713,12 @@
 </p:sld>
 </file>
 
-<file path=ppt/slides/slide52.xml><?xml version="1.0" encoding="utf-8"?>
+<file path=ppt/slides/slide54.xml><?xml version="1.0" encoding="utf-8"?>
 <p:sld xmlns:a="http://schemas.openxmlformats.org/drawingml/2006/main" xmlns:r="http://schemas.openxmlformats.org/officeDocument/2006/relationships" xmlns:mc="http://schemas.openxmlformats.org/markup-compatibility/2006" xmlns:mv="urn:schemas-microsoft-com:mac:vml" xmlns:p="http://schemas.openxmlformats.org/presentationml/2006/main" xmlns:c="http://schemas.openxmlformats.org/drawingml/2006/chart" xmlns:dgm="http://schemas.openxmlformats.org/drawingml/2006/diagram" xmlns:o="urn:schemas-microsoft-com:office:office" xmlns:v="urn:schemas-microsoft-com:vml" xmlns:pvml="urn:schemas-microsoft-com:office:powerpoint" xmlns:com="http://schemas.openxmlformats.org/drawingml/2006/compatibility" xmlns:p14="http://schemas.microsoft.com/office/powerpoint/2010/main" xmlns:p15="http://schemas.microsoft.com/office/powerpoint/2012/main" xmlns:ahyp="http://schemas.microsoft.com/office/drawing/2018/hyperlinkcolor">
   <p:cSld>
     <p:spTree>
       <p:nvGrpSpPr>
-        <p:cNvPr id="395" name="Shape 395"/>
+        <p:cNvPr id="409" name="Shape 409"/>
         <p:cNvGrpSpPr/>
         <p:nvPr/>
       </p:nvGrpSpPr>
@@ -31455,7 +32732,7 @@
       </p:grpSpPr>
       <p:pic>
         <p:nvPicPr>
-          <p:cNvPr id="396" name="Google Shape;396;p64"/>
+          <p:cNvPr id="410" name="Google Shape;410;p66"/>
           <p:cNvPicPr preferRelativeResize="0"/>
           <p:nvPr/>
         </p:nvPicPr>
@@ -31489,12 +32766,12 @@
 </p:sld>
 </file>
 
-<file path=ppt/slides/slide53.xml><?xml version="1.0" encoding="utf-8"?>
+<file path=ppt/slides/slide55.xml><?xml version="1.0" encoding="utf-8"?>
 <p:sld xmlns:a="http://schemas.openxmlformats.org/drawingml/2006/main" xmlns:r="http://schemas.openxmlformats.org/officeDocument/2006/relationships" xmlns:mc="http://schemas.openxmlformats.org/markup-compatibility/2006" xmlns:mv="urn:schemas-microsoft-com:mac:vml" xmlns:p="http://schemas.openxmlformats.org/presentationml/2006/main" xmlns:c="http://schemas.openxmlformats.org/drawingml/2006/chart" xmlns:dgm="http://schemas.openxmlformats.org/drawingml/2006/diagram" xmlns:o="urn:schemas-microsoft-com:office:office" xmlns:v="urn:schemas-microsoft-com:vml" xmlns:pvml="urn:schemas-microsoft-com:office:powerpoint" xmlns:com="http://schemas.openxmlformats.org/drawingml/2006/compatibility" xmlns:p14="http://schemas.microsoft.com/office/powerpoint/2010/main" xmlns:p15="http://schemas.microsoft.com/office/powerpoint/2012/main" xmlns:ahyp="http://schemas.microsoft.com/office/drawing/2018/hyperlinkcolor">
   <p:cSld>
     <p:spTree>
       <p:nvGrpSpPr>
-        <p:cNvPr id="400" name="Shape 400"/>
+        <p:cNvPr id="414" name="Shape 414"/>
         <p:cNvGrpSpPr/>
         <p:nvPr/>
       </p:nvGrpSpPr>
@@ -31508,7 +32785,7 @@
       </p:grpSpPr>
       <p:pic>
         <p:nvPicPr>
-          <p:cNvPr descr="Today we’re going to talk about measures of central tendency - those are the numbers that tend to hang out in the middle of our data: the mean, the median, and mode. All of these numbers can be called “averages” and they’re the numbers we tend to see most often - whether it’s in politics when talking about polling or income equality to batting averages in baseball (and cricket) and Amazon reviews. Averages are everywhere so today we’re going to discuss how these measures differ, how their relationship with one another can tell us a lot about the underlying data, and how they are sometimes used to mislead. &#10;&#10;&#10;Crash Course is on Patreon! You can support us directly by signing up at http://www.patreon.com/crashcourse&#10;&#10;Thanks to the following Patrons for their generous monthly contributions that help keep Crash Course free for everyone forever:&#10;&#10;Mark Brouwer, Nickie Miskell Jr., Jessica Wode, Eric Prestemon, Kathrin Benoit, Tom Trval, Jason Saslow, Nathan Taylor, Divonne Holmes à Court, Brian Thomas Gossett, Khaled El Shalakany, Indika Siriwardena, Robert Kunz, SR Foxley, Sam Ferguson, Yasenia Cruz, Daniel Baulig, Eric Koslow, Caleb Weeks, Tim Curwick, Evren Türkmenoğlu, Alexander Tamas, Justin Zingsheim, D.A. Noe, Shawn Arnold, mark austin, Ruth Perez, Malcolm Callis, Ken Penttinen, Advait Shinde, Cody Carpenter, Annamaria Herrera, William McGraw, Bader AlGhamdi, Vaso, Melissa Briski, Joey Quek, Andrei Krishkevich, Rachel Bright, Alex S, Mayumi Maeda, Kathy &amp; Tim Philip, Montather, Jirat, Eric Kitchen, Moritz Schmidt, Ian Dundore, Chris Peters, Sandra Aft, Steve Marshall&#10;&#10;Want to find Crash Course elsewhere on the internet?&#10;Facebook - http://www.facebook.com/YouTubeCrashC...&#10;Twitter - http://www.twitter.com/TheCrashCourse&#10;Tumblr - http://thecrashcourse.tumblr.com &#10;Support Crash Course on Patreon: http://patreon.com/crashcourse&#10;CC Kids: http://www.youtube.com/crashcoursekids" id="401" name="Google Shape;401;p65" title="Mean, Median, and Mode: Measures of Central Tendency: Crash Course Statistics #3">
+          <p:cNvPr descr="Today we’re going to talk about measures of central tendency - those are the numbers that tend to hang out in the middle of our data: the mean, the median, and mode. All of these numbers can be called “averages” and they’re the numbers we tend to see most often - whether it’s in politics when talking about polling or income equality to batting averages in baseball (and cricket) and Amazon reviews. Averages are everywhere so today we’re going to discuss how these measures differ, how their relationship with one another can tell us a lot about the underlying data, and how they are sometimes used to mislead. &#10;&#10;&#10;Crash Course is on Patreon! You can support us directly by signing up at http://www.patreon.com/crashcourse&#10;&#10;Thanks to the following Patrons for their generous monthly contributions that help keep Crash Course free for everyone forever:&#10;&#10;Mark Brouwer, Nickie Miskell Jr., Jessica Wode, Eric Prestemon, Kathrin Benoit, Tom Trval, Jason Saslow, Nathan Taylor, Divonne Holmes à Court, Brian Thomas Gossett, Khaled El Shalakany, Indika Siriwardena, Robert Kunz, SR Foxley, Sam Ferguson, Yasenia Cruz, Daniel Baulig, Eric Koslow, Caleb Weeks, Tim Curwick, Evren Türkmenoğlu, Alexander Tamas, Justin Zingsheim, D.A. Noe, Shawn Arnold, mark austin, Ruth Perez, Malcolm Callis, Ken Penttinen, Advait Shinde, Cody Carpenter, Annamaria Herrera, William McGraw, Bader AlGhamdi, Vaso, Melissa Briski, Joey Quek, Andrei Krishkevich, Rachel Bright, Alex S, Mayumi Maeda, Kathy &amp; Tim Philip, Montather, Jirat, Eric Kitchen, Moritz Schmidt, Ian Dundore, Chris Peters, Sandra Aft, Steve Marshall&#10;&#10;Want to find Crash Course elsewhere on the internet?&#10;Facebook - http://www.facebook.com/YouTubeCrashC...&#10;Twitter - http://www.twitter.com/TheCrashCourse&#10;Tumblr - http://thecrashcourse.tumblr.com &#10;Support Crash Course on Patreon: http://patreon.com/crashcourse&#10;CC Kids: http://www.youtube.com/crashcoursekids" id="415" name="Google Shape;415;p67" title="Mean, Median, and Mode: Measures of Central Tendency: Crash Course Statistics #3">
             <a:hlinkClick r:id="rId3"/>
           </p:cNvPr>
           <p:cNvPicPr preferRelativeResize="0"/>
@@ -31575,7 +32852,7 @@
                                           </p:stCondLst>
                                         </p:cTn>
                                         <p:tgtEl>
-                                          <p:spTgt spid="401"/>
+                                          <p:spTgt spid="415"/>
                                         </p:tgtEl>
                                         <p:attrNameLst>
                                           <p:attrName>style.visibility</p:attrName>
@@ -31589,7 +32866,7 @@
                                       <p:cBhvr>
                                         <p:cTn dur="1000"/>
                                         <p:tgtEl>
-                                          <p:spTgt spid="401"/>
+                                          <p:spTgt spid="415"/>
                                         </p:tgtEl>
                                       </p:cBhvr>
                                     </p:animEffect>
@@ -31627,12 +32904,12 @@
 </p:sld>
 </file>
 
-<file path=ppt/slides/slide54.xml><?xml version="1.0" encoding="utf-8"?>
+<file path=ppt/slides/slide56.xml><?xml version="1.0" encoding="utf-8"?>
 <p:sld xmlns:a="http://schemas.openxmlformats.org/drawingml/2006/main" xmlns:r="http://schemas.openxmlformats.org/officeDocument/2006/relationships" xmlns:mc="http://schemas.openxmlformats.org/markup-compatibility/2006" xmlns:mv="urn:schemas-microsoft-com:mac:vml" xmlns:p="http://schemas.openxmlformats.org/presentationml/2006/main" xmlns:c="http://schemas.openxmlformats.org/drawingml/2006/chart" xmlns:dgm="http://schemas.openxmlformats.org/drawingml/2006/diagram" xmlns:o="urn:schemas-microsoft-com:office:office" xmlns:v="urn:schemas-microsoft-com:vml" xmlns:pvml="urn:schemas-microsoft-com:office:powerpoint" xmlns:com="http://schemas.openxmlformats.org/drawingml/2006/compatibility" xmlns:p14="http://schemas.microsoft.com/office/powerpoint/2010/main" xmlns:p15="http://schemas.microsoft.com/office/powerpoint/2012/main" xmlns:ahyp="http://schemas.microsoft.com/office/drawing/2018/hyperlinkcolor">
   <p:cSld>
     <p:spTree>
       <p:nvGrpSpPr>
-        <p:cNvPr id="405" name="Shape 405"/>
+        <p:cNvPr id="419" name="Shape 419"/>
         <p:cNvGrpSpPr/>
         <p:nvPr/>
       </p:nvGrpSpPr>
@@ -31646,7 +32923,7 @@
       </p:grpSpPr>
       <p:pic>
         <p:nvPicPr>
-          <p:cNvPr descr="Today, we're looking at measures of spread, or dispersion, which we use to understand how well medians and means represent the data, and how reliable our conclusions are. They can help understand test scores, income inequality, spot stock bubbles, and plan gambling junkets. They're pretty useful, and now you're going to know how to calculate them!&#10;&#10;Crash Course is on Patreon! You can support us directly by signing up at http://www.patreon.com/crashcourse&#10;&#10;Thanks to the following Patrons for their generous monthly contributions that help keep Crash Course free for everyone forever:&#10;&#10;Mark Brouwer, Nickie Miskell Jr., Jessica Wode, Eric Prestemon, Kathrin Benoit, Tom Trval, Jason Saslow, Nathan Taylor, Divonne Holmes à Court, Brian Thomas Gossett, Khaled El Shalakany, Indika Siriwardena, Robert Kunz, SR Foxley, Sam Ferguson, Yasenia Cruz, Daniel Baulig, Eric Koslow, Caleb Weeks, Tim Curwick, Evren Türkmenoğlu, Alexander Tamas, Justin Zingsheim, D.A. Noe, Shawn Arnold, mark austin, Ruth Perez, Malcolm Callis, Ken Penttinen, Advait Shinde, Cody Carpenter, Annamaria Herrera, William McGraw, Bader AlGhamdi, Vaso, Melissa Briski, Joey Quek, Andrei Krishkevich, Rachel Bright, Alex S, Mayumi Maeda, Kathy &amp; Tim Philip, Montather, Jirat, Eric Kitchen, Moritz Schmidt, Ian Dundore, Chris Peters, Sandra Aft, Steve Marshall&#10;--&#10;&#10;Want to find Crash Course elsewhere on the internet?&#10;Facebook - http://www.facebook.com/YouTubeCrashCourse&#10;Twitter - http://www.twitter.com/TheCrashCourse&#10;Tumblr - http://thecrashcourse.tumblr.com &#10;Support Crash Course on Patreon: http://patreon.com/crashcourse&#10;&#10;CC Kids: http://www.youtube.com/crashcoursekids" id="406" name="Google Shape;406;p66" title="Measures of Spread: Crash Course Statistics #4">
+          <p:cNvPr descr="Today, we're looking at measures of spread, or dispersion, which we use to understand how well medians and means represent the data, and how reliable our conclusions are. They can help understand test scores, income inequality, spot stock bubbles, and plan gambling junkets. They're pretty useful, and now you're going to know how to calculate them!&#10;&#10;Crash Course is on Patreon! You can support us directly by signing up at http://www.patreon.com/crashcourse&#10;&#10;Thanks to the following Patrons for their generous monthly contributions that help keep Crash Course free for everyone forever:&#10;&#10;Mark Brouwer, Nickie Miskell Jr., Jessica Wode, Eric Prestemon, Kathrin Benoit, Tom Trval, Jason Saslow, Nathan Taylor, Divonne Holmes à Court, Brian Thomas Gossett, Khaled El Shalakany, Indika Siriwardena, Robert Kunz, SR Foxley, Sam Ferguson, Yasenia Cruz, Daniel Baulig, Eric Koslow, Caleb Weeks, Tim Curwick, Evren Türkmenoğlu, Alexander Tamas, Justin Zingsheim, D.A. Noe, Shawn Arnold, mark austin, Ruth Perez, Malcolm Callis, Ken Penttinen, Advait Shinde, Cody Carpenter, Annamaria Herrera, William McGraw, Bader AlGhamdi, Vaso, Melissa Briski, Joey Quek, Andrei Krishkevich, Rachel Bright, Alex S, Mayumi Maeda, Kathy &amp; Tim Philip, Montather, Jirat, Eric Kitchen, Moritz Schmidt, Ian Dundore, Chris Peters, Sandra Aft, Steve Marshall&#10;--&#10;&#10;Want to find Crash Course elsewhere on the internet?&#10;Facebook - http://www.facebook.com/YouTubeCrashCourse&#10;Twitter - http://www.twitter.com/TheCrashCourse&#10;Tumblr - http://thecrashcourse.tumblr.com &#10;Support Crash Course on Patreon: http://patreon.com/crashcourse&#10;&#10;CC Kids: http://www.youtube.com/crashcoursekids" id="420" name="Google Shape;420;p68" title="Measures of Spread: Crash Course Statistics #4">
             <a:hlinkClick r:id="rId3"/>
           </p:cNvPr>
           <p:cNvPicPr preferRelativeResize="0"/>
@@ -31713,7 +32990,7 @@
                                           </p:stCondLst>
                                         </p:cTn>
                                         <p:tgtEl>
-                                          <p:spTgt spid="406"/>
+                                          <p:spTgt spid="420"/>
                                         </p:tgtEl>
                                         <p:attrNameLst>
                                           <p:attrName>style.visibility</p:attrName>
@@ -31727,7 +33004,7 @@
                                       <p:cBhvr>
                                         <p:cTn dur="1000"/>
                                         <p:tgtEl>
-                                          <p:spTgt spid="406"/>
+                                          <p:spTgt spid="420"/>
                                         </p:tgtEl>
                                       </p:cBhvr>
                                     </p:animEffect>
@@ -31863,10 +33140,10 @@
               <a:buNone/>
             </a:pPr>
             <a:r>
-              <a:rPr lang="en" sz="1942"/>
+              <a:rPr lang="en" sz="1943"/>
               <a:t>There are many types of “average”.</a:t>
             </a:r>
-            <a:endParaRPr sz="1942"/>
+            <a:endParaRPr sz="1943"/>
           </a:p>
           <a:p>
             <a:pPr indent="0" lvl="0" marL="0" rtl="0" algn="l">
@@ -31879,18 +33156,18 @@
               <a:buNone/>
             </a:pPr>
             <a:r>
-              <a:rPr lang="en" sz="1942"/>
+              <a:rPr lang="en" sz="1943"/>
               <a:t>The most common is the “</a:t>
             </a:r>
             <a:r>
-              <a:rPr lang="en" sz="1942"/>
+              <a:rPr lang="en" sz="1943"/>
               <a:t>arithmetic</a:t>
             </a:r>
             <a:r>
-              <a:rPr lang="en" sz="1942"/>
+              <a:rPr lang="en" sz="1943"/>
               <a:t> mean”, often just called the “mean”</a:t>
             </a:r>
-            <a:endParaRPr sz="1942"/>
+            <a:endParaRPr sz="1943"/>
           </a:p>
           <a:p>
             <a:pPr indent="0" lvl="0" marL="0" rtl="0" algn="l">
@@ -31903,10 +33180,10 @@
               <a:buNone/>
             </a:pPr>
             <a:r>
-              <a:rPr lang="en" sz="1942"/>
+              <a:rPr lang="en" sz="1943"/>
               <a:t>Add up all the numbers, then divide by the number of numbers in the series</a:t>
             </a:r>
-            <a:endParaRPr sz="1942"/>
+            <a:endParaRPr sz="1943"/>
           </a:p>
           <a:p>
             <a:pPr indent="0" lvl="0" marL="0" rtl="0" algn="l">
@@ -31919,10 +33196,10 @@
               <a:buNone/>
             </a:pPr>
             <a:r>
-              <a:rPr lang="en" sz="1942"/>
+              <a:rPr lang="en" sz="1943"/>
               <a:t>If we have a series of five numbers {1, 2, 3, 4, 5}</a:t>
             </a:r>
-            <a:endParaRPr sz="1942"/>
+            <a:endParaRPr sz="1943"/>
           </a:p>
           <a:p>
             <a:pPr indent="0" lvl="0" marL="0" rtl="0" algn="l">
@@ -31935,10 +33212,10 @@
               <a:buNone/>
             </a:pPr>
             <a:r>
-              <a:rPr lang="en" sz="1942"/>
+              <a:rPr lang="en" sz="1943"/>
               <a:t>1 + 2 + 3 + 4 + 5 = 15</a:t>
             </a:r>
-            <a:endParaRPr sz="1942"/>
+            <a:endParaRPr sz="1943"/>
           </a:p>
           <a:p>
             <a:pPr indent="0" lvl="0" marL="0" rtl="0" algn="l">
@@ -31951,10 +33228,10 @@
               <a:buNone/>
             </a:pPr>
             <a:r>
-              <a:rPr lang="en" sz="1942"/>
+              <a:rPr lang="en" sz="1943"/>
               <a:t>15 / 5 =  3</a:t>
             </a:r>
-            <a:endParaRPr sz="1942"/>
+            <a:endParaRPr sz="1943"/>
           </a:p>
           <a:p>
             <a:pPr indent="0" lvl="0" marL="0" rtl="0" algn="l">
@@ -31969,7 +33246,7 @@
             <a:r>
               <a:t/>
             </a:r>
-            <a:endParaRPr sz="1942"/>
+            <a:endParaRPr sz="1943"/>
           </a:p>
           <a:p>
             <a:pPr indent="0" lvl="0" marL="0" rtl="0" algn="l">
@@ -31982,10 +33259,10 @@
               <a:buNone/>
             </a:pPr>
             <a:r>
-              <a:rPr lang="en" sz="1942"/>
+              <a:rPr lang="en" sz="1943"/>
               <a:t>Warning: The arithmetic mean is sensitive to extreme values / outliers</a:t>
             </a:r>
-            <a:endParaRPr sz="1942"/>
+            <a:endParaRPr sz="1943"/>
           </a:p>
         </p:txBody>
       </p:sp>
@@ -32697,7 +33974,7 @@
             <a:tbl>
               <a:tblPr>
                 <a:noFill/>
-                <a:tableStyleId>{EED47769-FA5E-423C-9B21-314CA9FAAA3A}</a:tableStyleId>
+                <a:tableStyleId>{A49DC9EB-9361-4B51-8153-D682CE428B52}</a:tableStyleId>
               </a:tblPr>
               <a:tblGrid>
                 <a:gridCol w="2008900"/>
@@ -33622,7 +34899,7 @@
               <a:buClr>
                 <a:schemeClr val="dk1"/>
               </a:buClr>
-              <a:buSzPct val="36666"/>
+              <a:buSzPct val="36667"/>
               <a:buFont typeface="Arial"/>
               <a:buNone/>
             </a:pPr>
@@ -33704,7 +34981,7 @@
             <a:tbl>
               <a:tblPr>
                 <a:noFill/>
-                <a:tableStyleId>{EED47769-FA5E-423C-9B21-314CA9FAAA3A}</a:tableStyleId>
+                <a:tableStyleId>{A49DC9EB-9361-4B51-8153-D682CE428B52}</a:tableStyleId>
               </a:tblPr>
               <a:tblGrid>
                 <a:gridCol w="1369450"/>
